--- a/powers-lesson/أنشطة-وتطبيقات-القوى.pptx
+++ b/powers-lesson/أنشطة-وتطبيقات-القوى.pptx
@@ -120,18 +120,18 @@
   <p:extLst>
     <p:ext uri="{521415D9-36F7-43E2-AB2F-B90AF26B5E84}">
       <p14:sectionLst xmlns:p14="http://schemas.microsoft.com/office/powerpoint/2010/main">
-        <p14:section name="البداية" id="{aa127eaf-7d5b-d104-cb73-b60e11f18499}">
+        <p14:section name="البداية" id="{e110bda5-bcda-122f-6a8e-239d1e3558c9}">
           <p14:sldIdLst>
             <p14:sldId id="256"/>
           </p14:sldIdLst>
         </p14:section>
-        <p14:section name="التمهيد" id="{c9a00a79-72bf-ed14-319c-8ab8c44768ba}">
+        <p14:section name="التمهيد" id="{6e387266-f7bc-9ac8-b672-06011a8bb2c7}">
           <p14:sldIdLst>
             <p14:sldId id="257"/>
             <p14:sldId id="258"/>
           </p14:sldIdLst>
         </p14:section>
-        <p14:section name="الاستكشاف" id="{d5167186-72fc-1bdd-d9ee-070a585c17a6}">
+        <p14:section name="الاستكشاف" id="{f7242ed7-8daf-6563-71b9-a62cac864c81}">
           <p14:sldIdLst>
             <p14:sldId id="259"/>
             <p14:sldId id="260"/>
@@ -139,7 +139,7 @@
             <p14:sldId id="262"/>
           </p14:sldIdLst>
         </p14:section>
-        <p14:section name="التطبيق" id="{272ad852-5b0d-8a6f-dcbd-212be7b53150}">
+        <p14:section name="التطبيق" id="{3d9ae07b-c1f1-d59f-aa9d-e565ddd5db46}">
           <p14:sldIdLst>
             <p14:sldId id="263"/>
             <p14:sldId id="264"/>
@@ -147,7 +147,7 @@
             <p14:sldId id="266"/>
           </p14:sldIdLst>
         </p14:section>
-        <p14:section name="التقييم" id="{918cfecd-9557-1569-172d-9a1bd02a1cb2}">
+        <p14:section name="التقييم" id="{fa674e56-9c24-35b9-5264-9a22628d369c}">
           <p14:sldIdLst>
             <p14:sldId id="267"/>
             <p14:sldId id="268"/>
@@ -646,7 +646,7 @@
           <a:p>
             <a:r>
               <a:rPr lang="en-US" dirty="0"/>
-              <a:t>الحل: 1) 5. 2) 3. 3) (x أُس 2) أُس 6، (x أُس 6) أُس 2، (x أُس 3) أُس 4، (x أُس 4) أُس 3. 4) متساويتان: كلتاهما 2 أُس 12 لأن 4 = 2 أُس 2. 5) جمع الأُسّين، والصحيح 3 أُس 6 = 729.</a:t>
+              <a:t>الحل: 1) 4. 2) 6. 3) 3 أُس 2 = 9 أكبر من 2 أُس 3 = 8. 4) خطأ، الصحيح 2 أُس 6.</a:t>
             </a:r>
             <a:endParaRPr lang="en-US" dirty="0"/>
           </a:p>
@@ -822,7 +822,7 @@
           <a:p>
             <a:r>
               <a:rPr lang="en-US" dirty="0"/>
-              <a:t>بعد الحل: اقرأ إجاباتك لزميلك. عند الاختلاف اسألا زميلًا ثالثًا ثم رابعًا قبل المعلم.</a:t>
+              <a:t/>
             </a:r>
             <a:endParaRPr lang="en-US" dirty="0"/>
           </a:p>
@@ -1086,7 +1086,7 @@
           <a:p>
             <a:r>
               <a:rPr lang="en-US" dirty="0"/>
-              <a:t>الحل: بعد 4 خطوات: (أ) 8 و(ب) 16. بعد 10 خطوات: (أ) 20 و(ب) 1024.</a:t>
+              <a:t>الحل: (أ) 2، 4، 6، 8. (ب) 2، 4، 8، 16. الكومة (ب) أكبر.</a:t>
             </a:r>
             <a:endParaRPr lang="en-US" dirty="0"/>
           </a:p>
@@ -1262,7 +1262,7 @@
           <a:p>
             <a:r>
               <a:rPr lang="en-US" dirty="0"/>
-              <a:t>الحل: 2، 4، 8، 16، 32. بعد 5 طيّات: 32 وليس 10، لأننا نضاعف (نضرب في 2) في كل طيّة. الاختصار: 2 أُس 5.</a:t>
+              <a:t>الحل: 2، 4، 8. ليس 6، بل 2 × 2 × 2 = 8.</a:t>
             </a:r>
             <a:endParaRPr lang="en-US" dirty="0"/>
           </a:p>
@@ -1350,7 +1350,7 @@
           <a:p>
             <a:r>
               <a:rPr lang="en-US" dirty="0"/>
-              <a:t>الحل: 5 مرات. 1) 32 = 2 أُس 5. 2) 81 = 3 أُس 4. 3) 12، وهو جمع متكرر (3 + 3 + 3 + 3) لا ضرب متكرر.</a:t>
+              <a:t>الحل: 3 مرات. 1) 8. 2) 2 أُس 3 = 8. 3) 2 × 3 = 6، وهو يختلف عن 2 أُس 3 = 8.</a:t>
             </a:r>
             <a:endParaRPr lang="en-US" dirty="0"/>
           </a:p>
@@ -1438,7 +1438,7 @@
           <a:p>
             <a:r>
               <a:rPr lang="en-US" dirty="0"/>
-              <a:t>الحل: 1) 6 خرزات: 2 أُس 6. 2) 6 خرزات: 5 أُس 6. نضرب عدد الخرزات في الخيط بعدد الخيوط: 3 × 2 = 6 و2 × 3 = 6.</a:t>
+              <a:t>الحل: 1) 4 خرزات. 2) 2 أُس 4 = 16.</a:t>
             </a:r>
             <a:endParaRPr lang="en-US" dirty="0"/>
           </a:p>
@@ -1614,7 +1614,7 @@
           <a:p>
             <a:r>
               <a:rPr lang="en-US" dirty="0"/>
-              <a:t>الحل: 1) 3 أُس 4 = 81. 2) 5 أُس 3 = 125. 3) (3×3×3×3، 3 أُس 4، 81)، (5×5×5، 5 أُس 3، 125)، (2×2×2×2×2×2، 2 أُس 6، 64)، (10×10، 10 أُس 2، 100)، (3+3+3+3، 4×3، 12). 4) 2 أُس 4 = 16. 5) 16 مكعّبًا.</a:t>
+              <a:t>الحل: 1) 2. 2) 3. 3) 4. 4) 2 × 3 = 6 و2 أُس 3 = 8.</a:t>
             </a:r>
             <a:endParaRPr lang="en-US" dirty="0"/>
           </a:p>
@@ -1702,7 +1702,7 @@
           <a:p>
             <a:r>
               <a:rPr lang="en-US" dirty="0"/>
-              <a:t>الحل: 1) 2 أُس 8 = 256. 2) 3 أُس 6 = 729. 3) خطأ، والصحيح 4 أُس 6. 4) خطأ، والصحيح 25. 5) 10 أُس 4 = 10000 متر مربّع.</a:t>
+              <a:t>الحل: 1) 5 أُس 3. 2) 9. 3) 4. 4) خطأ، الصحيح 3 أُس 2 = 9.</a:t>
             </a:r>
             <a:endParaRPr lang="en-US" dirty="0"/>
           </a:p>
@@ -2574,11 +2574,11 @@
         <p:spPr>
           <a:xfrm>
             <a:off x="457200" y="914400"/>
-            <a:ext cx="8229600" cy="676656"/>
+            <a:ext cx="8229600" cy="822960"/>
           </a:xfrm>
           <a:prstGeom prst="roundRect">
             <a:avLst>
-              <a:gd name="adj" fmla="val 13514"/>
+              <a:gd name="adj" fmla="val 11111"/>
             </a:avLst>
           </a:prstGeom>
           <a:solidFill>
@@ -2602,7 +2602,7 @@
         </p:nvSpPr>
         <p:spPr>
           <a:xfrm>
-            <a:off x="8183880" y="1060704"/>
+            <a:off x="8183880" y="1133856"/>
             <a:ext cx="384048" cy="384048"/>
           </a:xfrm>
           <a:prstGeom prst="ellipse">
@@ -2627,7 +2627,7 @@
         </p:nvSpPr>
         <p:spPr>
           <a:xfrm>
-            <a:off x="8183880" y="1060704"/>
+            <a:off x="8183880" y="1133856"/>
             <a:ext cx="384048" cy="384048"/>
           </a:xfrm>
           <a:prstGeom prst="rect">
@@ -2664,7 +2664,7 @@
         <p:spPr>
           <a:xfrm>
             <a:off x="3520440" y="914400"/>
-            <a:ext cx="4572000" cy="676656"/>
+            <a:ext cx="4572000" cy="822960"/>
           </a:xfrm>
           <a:prstGeom prst="rect">
             <a:avLst/>
@@ -2680,14 +2680,14 @@
               <a:buNone/>
             </a:pPr>
             <a:r>
-              <a:rPr lang="ar-LB" altLang="en-US" sz="1600" dirty="0">
+              <a:rPr lang="ar-LB" altLang="en-US" sz="1900" dirty="0">
                 <a:solidFill>
                   <a:srgbClr val="1B262C"/>
                 </a:solidFill>
               </a:rPr>
-              <a:t>أوجد العدد الناقص: (2 أُس ؟) الكلّ أُس 3 = 2 أُس 15.</a:t>
-            </a:r>
-            <a:endParaRPr lang="ar-LB" sz="1600" dirty="0"/>
+              <a:t>أكمل: (3 أُس 2) الكلّ أُس 2 = 3 أُس ؟</a:t>
+            </a:r>
+            <a:endParaRPr lang="ar-LB" sz="1900" dirty="0"/>
           </a:p>
         </p:txBody>
       </p:sp>
@@ -2700,7 +2700,7 @@
         <p:spPr>
           <a:xfrm>
             <a:off x="594360" y="914400"/>
-            <a:ext cx="2834640" cy="676656"/>
+            <a:ext cx="2834640" cy="822960"/>
           </a:xfrm>
           <a:prstGeom prst="rect">
             <a:avLst/>
@@ -2716,7 +2716,7 @@
               <a:buNone/>
             </a:pPr>
             <a:r>
-              <a:rPr lang="en-US" sz="1800" b="1" dirty="0">
+              <a:rPr lang="en-US" sz="2100" b="1" dirty="0">
                 <a:solidFill>
                   <a:srgbClr val="6A2F8F"/>
                 </a:solidFill>
@@ -2724,10 +2724,10 @@
                 <a:ea typeface="Arial" pitchFamily="34" charset="-122"/>
                 <a:cs typeface="Arial" pitchFamily="34" charset="-120"/>
               </a:rPr>
-              <a:t>(2</a:t>
-            </a:r>
-            <a:r>
-              <a:rPr lang="en-US" sz="1800" b="1" baseline="30000" dirty="0">
+              <a:t>(3</a:t>
+            </a:r>
+            <a:r>
+              <a:rPr lang="en-US" sz="2100" b="1" baseline="30000" dirty="0">
                 <a:solidFill>
                   <a:srgbClr val="6A2F8F"/>
                 </a:solidFill>
@@ -2735,10 +2735,10 @@
                 <a:ea typeface="Arial" pitchFamily="34" charset="-122"/>
                 <a:cs typeface="Arial" pitchFamily="34" charset="-120"/>
               </a:rPr>
-              <a:t>?</a:t>
-            </a:r>
-            <a:r>
-              <a:rPr lang="en-US" sz="1800" b="1" dirty="0">
+              <a:t>2</a:t>
+            </a:r>
+            <a:r>
+              <a:rPr lang="en-US" sz="2100" b="1" dirty="0">
                 <a:solidFill>
                   <a:srgbClr val="6A2F8F"/>
                 </a:solidFill>
@@ -2749,7 +2749,7 @@
               <a:t>)</a:t>
             </a:r>
             <a:r>
-              <a:rPr lang="en-US" sz="1800" b="1" baseline="30000" dirty="0">
+              <a:rPr lang="en-US" sz="2100" b="1" baseline="30000" dirty="0">
                 <a:solidFill>
                   <a:srgbClr val="6A2F8F"/>
                 </a:solidFill>
@@ -2757,10 +2757,10 @@
                 <a:ea typeface="Arial" pitchFamily="34" charset="-122"/>
                 <a:cs typeface="Arial" pitchFamily="34" charset="-120"/>
               </a:rPr>
-              <a:t>3</a:t>
-            </a:r>
-            <a:r>
-              <a:rPr lang="en-US" sz="1800" b="1" dirty="0">
+              <a:t>2</a:t>
+            </a:r>
+            <a:r>
+              <a:rPr lang="en-US" sz="2100" b="1" dirty="0">
                 <a:solidFill>
                   <a:srgbClr val="6A2F8F"/>
                 </a:solidFill>
@@ -2768,10 +2768,10 @@
                 <a:ea typeface="Arial" pitchFamily="34" charset="-122"/>
                 <a:cs typeface="Arial" pitchFamily="34" charset="-120"/>
               </a:rPr>
-              <a:t> = 2</a:t>
-            </a:r>
-            <a:r>
-              <a:rPr lang="en-US" sz="1800" b="1" baseline="30000" dirty="0">
+              <a:t> = 3</a:t>
+            </a:r>
+            <a:r>
+              <a:rPr lang="en-US" sz="2100" b="1" baseline="30000" dirty="0">
                 <a:solidFill>
                   <a:srgbClr val="6A2F8F"/>
                 </a:solidFill>
@@ -2779,9 +2779,9 @@
                 <a:ea typeface="Arial" pitchFamily="34" charset="-122"/>
                 <a:cs typeface="Arial" pitchFamily="34" charset="-120"/>
               </a:rPr>
-              <a:t>15</a:t>
-            </a:r>
-            <a:endParaRPr lang="en-US" sz="1800" dirty="0"/>
+              <a:t>?</a:t>
+            </a:r>
+            <a:endParaRPr lang="en-US" sz="2100" dirty="0"/>
           </a:p>
         </p:txBody>
       </p:sp>
@@ -2793,12 +2793,12 @@
         </p:nvSpPr>
         <p:spPr>
           <a:xfrm>
-            <a:off x="457200" y="1664208"/>
-            <a:ext cx="8229600" cy="676656"/>
+            <a:off x="457200" y="1847088"/>
+            <a:ext cx="8229600" cy="822960"/>
           </a:xfrm>
           <a:prstGeom prst="roundRect">
             <a:avLst>
-              <a:gd name="adj" fmla="val 13514"/>
+              <a:gd name="adj" fmla="val 11111"/>
             </a:avLst>
           </a:prstGeom>
           <a:solidFill>
@@ -2822,7 +2822,7 @@
         </p:nvSpPr>
         <p:spPr>
           <a:xfrm>
-            <a:off x="8183880" y="1810512"/>
+            <a:off x="8183880" y="2066544"/>
             <a:ext cx="384048" cy="384048"/>
           </a:xfrm>
           <a:prstGeom prst="ellipse">
@@ -2847,7 +2847,7 @@
         </p:nvSpPr>
         <p:spPr>
           <a:xfrm>
-            <a:off x="8183880" y="1810512"/>
+            <a:off x="8183880" y="2066544"/>
             <a:ext cx="384048" cy="384048"/>
           </a:xfrm>
           <a:prstGeom prst="rect">
@@ -2883,8 +2883,8 @@
         </p:nvSpPr>
         <p:spPr>
           <a:xfrm>
-            <a:off x="3520440" y="1664208"/>
-            <a:ext cx="4572000" cy="676656"/>
+            <a:off x="3520440" y="1847088"/>
+            <a:ext cx="4572000" cy="822960"/>
           </a:xfrm>
           <a:prstGeom prst="rect">
             <a:avLst/>
@@ -2900,14 +2900,14 @@
               <a:buNone/>
             </a:pPr>
             <a:r>
-              <a:rPr lang="ar-LB" altLang="en-US" sz="1600" dirty="0">
+              <a:rPr lang="ar-LB" altLang="en-US" sz="1900" dirty="0">
                 <a:solidFill>
                   <a:srgbClr val="1B262C"/>
                 </a:solidFill>
               </a:rPr>
-              <a:t>أوجد العدد الناقص: (؟ أُس 2) الكلّ أُس 2 = 81.</a:t>
-            </a:r>
-            <a:endParaRPr lang="ar-LB" sz="1600" dirty="0"/>
+              <a:t>أكمل: (2 أُس 3) الكلّ أُس 2 = 2 أُس ؟</a:t>
+            </a:r>
+            <a:endParaRPr lang="ar-LB" sz="1900" dirty="0"/>
           </a:p>
         </p:txBody>
       </p:sp>
@@ -2919,8 +2919,8 @@
         </p:nvSpPr>
         <p:spPr>
           <a:xfrm>
-            <a:off x="594360" y="1664208"/>
-            <a:ext cx="2834640" cy="676656"/>
+            <a:off x="594360" y="1847088"/>
+            <a:ext cx="2834640" cy="822960"/>
           </a:xfrm>
           <a:prstGeom prst="rect">
             <a:avLst/>
@@ -2936,7 +2936,7 @@
               <a:buNone/>
             </a:pPr>
             <a:r>
-              <a:rPr lang="en-US" sz="1800" b="1" dirty="0">
+              <a:rPr lang="en-US" sz="2100" b="1" dirty="0">
                 <a:solidFill>
                   <a:srgbClr val="6A2F8F"/>
                 </a:solidFill>
@@ -2944,10 +2944,10 @@
                 <a:ea typeface="Arial" pitchFamily="34" charset="-122"/>
                 <a:cs typeface="Arial" pitchFamily="34" charset="-120"/>
               </a:rPr>
-              <a:t>(?</a:t>
-            </a:r>
-            <a:r>
-              <a:rPr lang="en-US" sz="1800" b="1" baseline="30000" dirty="0">
+              <a:t>(2</a:t>
+            </a:r>
+            <a:r>
+              <a:rPr lang="en-US" sz="2100" b="1" baseline="30000" dirty="0">
                 <a:solidFill>
                   <a:srgbClr val="6A2F8F"/>
                 </a:solidFill>
@@ -2955,10 +2955,10 @@
                 <a:ea typeface="Arial" pitchFamily="34" charset="-122"/>
                 <a:cs typeface="Arial" pitchFamily="34" charset="-120"/>
               </a:rPr>
-              <a:t>2</a:t>
-            </a:r>
-            <a:r>
-              <a:rPr lang="en-US" sz="1800" b="1" dirty="0">
+              <a:t>3</a:t>
+            </a:r>
+            <a:r>
+              <a:rPr lang="en-US" sz="2100" b="1" dirty="0">
                 <a:solidFill>
                   <a:srgbClr val="6A2F8F"/>
                 </a:solidFill>
@@ -2969,7 +2969,7 @@
               <a:t>)</a:t>
             </a:r>
             <a:r>
-              <a:rPr lang="en-US" sz="1800" b="1" baseline="30000" dirty="0">
+              <a:rPr lang="en-US" sz="2100" b="1" baseline="30000" dirty="0">
                 <a:solidFill>
                   <a:srgbClr val="6A2F8F"/>
                 </a:solidFill>
@@ -2980,7 +2980,7 @@
               <a:t>2</a:t>
             </a:r>
             <a:r>
-              <a:rPr lang="en-US" sz="1800" b="1" dirty="0">
+              <a:rPr lang="en-US" sz="2100" b="1" dirty="0">
                 <a:solidFill>
                   <a:srgbClr val="6A2F8F"/>
                 </a:solidFill>
@@ -2988,9 +2988,20 @@
                 <a:ea typeface="Arial" pitchFamily="34" charset="-122"/>
                 <a:cs typeface="Arial" pitchFamily="34" charset="-120"/>
               </a:rPr>
-              <a:t> = 81</a:t>
-            </a:r>
-            <a:endParaRPr lang="en-US" sz="1800" dirty="0"/>
+              <a:t> = 2</a:t>
+            </a:r>
+            <a:r>
+              <a:rPr lang="en-US" sz="2100" b="1" baseline="30000" dirty="0">
+                <a:solidFill>
+                  <a:srgbClr val="6A2F8F"/>
+                </a:solidFill>
+                <a:latin typeface="Arial" pitchFamily="34" charset="0"/>
+                <a:ea typeface="Arial" pitchFamily="34" charset="-122"/>
+                <a:cs typeface="Arial" pitchFamily="34" charset="-120"/>
+              </a:rPr>
+              <a:t>?</a:t>
+            </a:r>
+            <a:endParaRPr lang="en-US" sz="2100" dirty="0"/>
           </a:p>
         </p:txBody>
       </p:sp>
@@ -3002,12 +3013,12 @@
         </p:nvSpPr>
         <p:spPr>
           <a:xfrm>
-            <a:off x="457200" y="2414016"/>
-            <a:ext cx="8229600" cy="676656"/>
+            <a:off x="457200" y="2779776"/>
+            <a:ext cx="8229600" cy="822960"/>
           </a:xfrm>
           <a:prstGeom prst="roundRect">
             <a:avLst>
-              <a:gd name="adj" fmla="val 13514"/>
+              <a:gd name="adj" fmla="val 11111"/>
             </a:avLst>
           </a:prstGeom>
           <a:solidFill>
@@ -3031,7 +3042,7 @@
         </p:nvSpPr>
         <p:spPr>
           <a:xfrm>
-            <a:off x="8183880" y="2560320"/>
+            <a:off x="8183880" y="2999232"/>
             <a:ext cx="384048" cy="384048"/>
           </a:xfrm>
           <a:prstGeom prst="ellipse">
@@ -3056,7 +3067,7 @@
         </p:nvSpPr>
         <p:spPr>
           <a:xfrm>
-            <a:off x="8183880" y="2560320"/>
+            <a:off x="8183880" y="2999232"/>
             <a:ext cx="384048" cy="384048"/>
           </a:xfrm>
           <a:prstGeom prst="rect">
@@ -3092,8 +3103,8 @@
         </p:nvSpPr>
         <p:spPr>
           <a:xfrm>
-            <a:off x="3520440" y="2414016"/>
-            <a:ext cx="4572000" cy="676656"/>
+            <a:off x="3520440" y="2779776"/>
+            <a:ext cx="4572000" cy="822960"/>
           </a:xfrm>
           <a:prstGeom prst="rect">
             <a:avLst/>
@@ -3109,14 +3120,14 @@
               <a:buNone/>
             </a:pPr>
             <a:r>
-              <a:rPr lang="ar-LB" altLang="en-US" sz="1600" dirty="0">
+              <a:rPr lang="ar-LB" altLang="en-US" sz="1900" dirty="0">
                 <a:solidFill>
                   <a:srgbClr val="1B262C"/>
                 </a:solidFill>
               </a:rPr>
-              <a:t>اكتب x أُس 12 كقوّة قوّة بأربع طرق (أُسس أكبر من 1).</a:t>
-            </a:r>
-            <a:endParaRPr lang="ar-LB" sz="1600" dirty="0"/>
+              <a:t>أيّهما أكبر: 2 أُس 3 أم 3 أُس 2؟</a:t>
+            </a:r>
+            <a:endParaRPr lang="ar-LB" sz="1900" dirty="0"/>
           </a:p>
         </p:txBody>
       </p:sp>
@@ -3128,8 +3139,8 @@
         </p:nvSpPr>
         <p:spPr>
           <a:xfrm>
-            <a:off x="594360" y="2414016"/>
-            <a:ext cx="2834640" cy="676656"/>
+            <a:off x="594360" y="2779776"/>
+            <a:ext cx="2834640" cy="822960"/>
           </a:xfrm>
           <a:prstGeom prst="rect">
             <a:avLst/>
@@ -3145,7 +3156,7 @@
               <a:buNone/>
             </a:pPr>
             <a:r>
-              <a:rPr lang="en-US" sz="1800" b="1" dirty="0">
+              <a:rPr lang="en-US" sz="2100" b="1" dirty="0">
                 <a:solidFill>
                   <a:srgbClr val="6A2F8F"/>
                 </a:solidFill>
@@ -3153,10 +3164,10 @@
                 <a:ea typeface="Arial" pitchFamily="34" charset="-122"/>
                 <a:cs typeface="Arial" pitchFamily="34" charset="-120"/>
               </a:rPr>
-              <a:t>x</a:t>
-            </a:r>
-            <a:r>
-              <a:rPr lang="en-US" sz="1800" b="1" baseline="30000" dirty="0">
+              <a:t>2</a:t>
+            </a:r>
+            <a:r>
+              <a:rPr lang="en-US" sz="2100" b="1" baseline="30000" dirty="0">
                 <a:solidFill>
                   <a:srgbClr val="6A2F8F"/>
                 </a:solidFill>
@@ -3164,9 +3175,31 @@
                 <a:ea typeface="Arial" pitchFamily="34" charset="-122"/>
                 <a:cs typeface="Arial" pitchFamily="34" charset="-120"/>
               </a:rPr>
-              <a:t>12</a:t>
-            </a:r>
-            <a:endParaRPr lang="en-US" sz="1800" dirty="0"/>
+              <a:t>3</a:t>
+            </a:r>
+            <a:r>
+              <a:rPr lang="en-US" sz="2100" b="1" dirty="0">
+                <a:solidFill>
+                  <a:srgbClr val="6A2F8F"/>
+                </a:solidFill>
+                <a:latin typeface="Arial" pitchFamily="34" charset="0"/>
+                <a:ea typeface="Arial" pitchFamily="34" charset="-122"/>
+                <a:cs typeface="Arial" pitchFamily="34" charset="-120"/>
+              </a:rPr>
+              <a:t>     3</a:t>
+            </a:r>
+            <a:r>
+              <a:rPr lang="en-US" sz="2100" b="1" baseline="30000" dirty="0">
+                <a:solidFill>
+                  <a:srgbClr val="6A2F8F"/>
+                </a:solidFill>
+                <a:latin typeface="Arial" pitchFamily="34" charset="0"/>
+                <a:ea typeface="Arial" pitchFamily="34" charset="-122"/>
+                <a:cs typeface="Arial" pitchFamily="34" charset="-120"/>
+              </a:rPr>
+              <a:t>2</a:t>
+            </a:r>
+            <a:endParaRPr lang="en-US" sz="2100" dirty="0"/>
           </a:p>
         </p:txBody>
       </p:sp>
@@ -3178,12 +3211,12 @@
         </p:nvSpPr>
         <p:spPr>
           <a:xfrm>
-            <a:off x="457200" y="3163824"/>
-            <a:ext cx="8229600" cy="676656"/>
+            <a:off x="457200" y="3712464"/>
+            <a:ext cx="8229600" cy="822960"/>
           </a:xfrm>
           <a:prstGeom prst="roundRect">
             <a:avLst>
-              <a:gd name="adj" fmla="val 13514"/>
+              <a:gd name="adj" fmla="val 11111"/>
             </a:avLst>
           </a:prstGeom>
           <a:solidFill>
@@ -3207,7 +3240,7 @@
         </p:nvSpPr>
         <p:spPr>
           <a:xfrm>
-            <a:off x="8183880" y="3310128"/>
+            <a:off x="8183880" y="3931920"/>
             <a:ext cx="384048" cy="384048"/>
           </a:xfrm>
           <a:prstGeom prst="ellipse">
@@ -3232,7 +3265,7 @@
         </p:nvSpPr>
         <p:spPr>
           <a:xfrm>
-            <a:off x="8183880" y="3310128"/>
+            <a:off x="8183880" y="3931920"/>
             <a:ext cx="384048" cy="384048"/>
           </a:xfrm>
           <a:prstGeom prst="rect">
@@ -3268,8 +3301,8 @@
         </p:nvSpPr>
         <p:spPr>
           <a:xfrm>
-            <a:off x="3520440" y="3163824"/>
-            <a:ext cx="4572000" cy="676656"/>
+            <a:off x="3520440" y="3712464"/>
+            <a:ext cx="4572000" cy="822960"/>
           </a:xfrm>
           <a:prstGeom prst="rect">
             <a:avLst/>
@@ -3285,14 +3318,14 @@
               <a:buNone/>
             </a:pPr>
             <a:r>
-              <a:rPr lang="ar-LB" altLang="en-US" sz="1600" dirty="0">
+              <a:rPr lang="ar-LB" altLang="en-US" sz="1900" dirty="0">
                 <a:solidFill>
                   <a:srgbClr val="1B262C"/>
                 </a:solidFill>
               </a:rPr>
-              <a:t>أيّهما أكبر؟ برّر دون حساب.</a:t>
-            </a:r>
-            <a:endParaRPr lang="ar-LB" sz="1600" dirty="0"/>
+              <a:t>صح أم خطأ: (2 أُس 2) الكلّ أُس 3 = 2 أُس 5</a:t>
+            </a:r>
+            <a:endParaRPr lang="ar-LB" sz="1900" dirty="0"/>
           </a:p>
         </p:txBody>
       </p:sp>
@@ -3304,8 +3337,8 @@
         </p:nvSpPr>
         <p:spPr>
           <a:xfrm>
-            <a:off x="594360" y="3163824"/>
-            <a:ext cx="2834640" cy="676656"/>
+            <a:off x="594360" y="3712464"/>
+            <a:ext cx="2834640" cy="822960"/>
           </a:xfrm>
           <a:prstGeom prst="rect">
             <a:avLst/>
@@ -3321,7 +3354,7 @@
               <a:buNone/>
             </a:pPr>
             <a:r>
-              <a:rPr lang="en-US" sz="1800" b="1" dirty="0">
+              <a:rPr lang="en-US" sz="2100" b="1" dirty="0">
                 <a:solidFill>
                   <a:srgbClr val="6A2F8F"/>
                 </a:solidFill>
@@ -3332,7 +3365,7 @@
               <a:t>(2</a:t>
             </a:r>
             <a:r>
-              <a:rPr lang="en-US" sz="1800" b="1" baseline="30000" dirty="0">
+              <a:rPr lang="en-US" sz="2100" b="1" baseline="30000" dirty="0">
                 <a:solidFill>
                   <a:srgbClr val="6A2F8F"/>
                 </a:solidFill>
@@ -3340,10 +3373,10 @@
                 <a:ea typeface="Arial" pitchFamily="34" charset="-122"/>
                 <a:cs typeface="Arial" pitchFamily="34" charset="-120"/>
               </a:rPr>
-              <a:t>3</a:t>
-            </a:r>
-            <a:r>
-              <a:rPr lang="en-US" sz="1800" b="1" dirty="0">
+              <a:t>2</a:t>
+            </a:r>
+            <a:r>
+              <a:rPr lang="en-US" sz="2100" b="1" dirty="0">
                 <a:solidFill>
                   <a:srgbClr val="6A2F8F"/>
                 </a:solidFill>
@@ -3354,7 +3387,7 @@
               <a:t>)</a:t>
             </a:r>
             <a:r>
-              <a:rPr lang="en-US" sz="1800" b="1" baseline="30000" dirty="0">
+              <a:rPr lang="en-US" sz="2100" b="1" baseline="30000" dirty="0">
                 <a:solidFill>
                   <a:srgbClr val="6A2F8F"/>
                 </a:solidFill>
@@ -3362,10 +3395,10 @@
                 <a:ea typeface="Arial" pitchFamily="34" charset="-122"/>
                 <a:cs typeface="Arial" pitchFamily="34" charset="-120"/>
               </a:rPr>
-              <a:t>4</a:t>
-            </a:r>
-            <a:r>
-              <a:rPr lang="en-US" sz="1800" b="1" dirty="0">
+              <a:t>3</a:t>
+            </a:r>
+            <a:r>
+              <a:rPr lang="en-US" sz="2100" b="1" dirty="0">
                 <a:solidFill>
                   <a:srgbClr val="6A2F8F"/>
                 </a:solidFill>
@@ -3373,10 +3406,10 @@
                 <a:ea typeface="Arial" pitchFamily="34" charset="-122"/>
                 <a:cs typeface="Arial" pitchFamily="34" charset="-120"/>
               </a:rPr>
-              <a:t>   (4</a:t>
-            </a:r>
-            <a:r>
-              <a:rPr lang="en-US" sz="1800" b="1" baseline="30000" dirty="0">
+              <a:t> = 2</a:t>
+            </a:r>
+            <a:r>
+              <a:rPr lang="en-US" sz="2100" b="1" baseline="30000" dirty="0">
                 <a:solidFill>
                   <a:srgbClr val="6A2F8F"/>
                 </a:solidFill>
@@ -3384,251 +3417,9 @@
                 <a:ea typeface="Arial" pitchFamily="34" charset="-122"/>
                 <a:cs typeface="Arial" pitchFamily="34" charset="-120"/>
               </a:rPr>
-              <a:t>2</a:t>
-            </a:r>
-            <a:r>
-              <a:rPr lang="en-US" sz="1800" b="1" dirty="0">
-                <a:solidFill>
-                  <a:srgbClr val="6A2F8F"/>
-                </a:solidFill>
-                <a:latin typeface="Arial" pitchFamily="34" charset="0"/>
-                <a:ea typeface="Arial" pitchFamily="34" charset="-122"/>
-                <a:cs typeface="Arial" pitchFamily="34" charset="-120"/>
-              </a:rPr>
-              <a:t>)</a:t>
-            </a:r>
-            <a:r>
-              <a:rPr lang="en-US" sz="1800" b="1" baseline="30000" dirty="0">
-                <a:solidFill>
-                  <a:srgbClr val="6A2F8F"/>
-                </a:solidFill>
-                <a:latin typeface="Arial" pitchFamily="34" charset="0"/>
-                <a:ea typeface="Arial" pitchFamily="34" charset="-122"/>
-                <a:cs typeface="Arial" pitchFamily="34" charset="-120"/>
-              </a:rPr>
-              <a:t>3</a:t>
-            </a:r>
-            <a:endParaRPr lang="en-US" sz="1800" dirty="0"/>
-          </a:p>
-        </p:txBody>
-      </p:sp>
-      <p:sp>
-        <p:nvSpPr>
-          <p:cNvPr id="25" name="Shape 22"/>
-          <p:cNvSpPr/>
-          <p:nvPr/>
-        </p:nvSpPr>
-        <p:spPr>
-          <a:xfrm>
-            <a:off x="457200" y="3913632"/>
-            <a:ext cx="8229600" cy="676656"/>
-          </a:xfrm>
-          <a:prstGeom prst="roundRect">
-            <a:avLst>
-              <a:gd name="adj" fmla="val 13514"/>
-            </a:avLst>
-          </a:prstGeom>
-          <a:solidFill>
-            <a:srgbClr val="6A2F8F">
-              <a:alpha val="8000"/>
-            </a:srgbClr>
-          </a:solidFill>
-          <a:ln w="19050">
-            <a:solidFill>
-              <a:srgbClr val="6A2F8F"/>
-            </a:solidFill>
-            <a:prstDash val="solid"/>
-          </a:ln>
-        </p:spPr>
-      </p:sp>
-      <p:sp>
-        <p:nvSpPr>
-          <p:cNvPr id="26" name="Shape 23"/>
-          <p:cNvSpPr/>
-          <p:nvPr/>
-        </p:nvSpPr>
-        <p:spPr>
-          <a:xfrm>
-            <a:off x="8183880" y="4059936"/>
-            <a:ext cx="384048" cy="384048"/>
-          </a:xfrm>
-          <a:prstGeom prst="ellipse">
-            <a:avLst/>
-          </a:prstGeom>
-          <a:solidFill>
-            <a:srgbClr val="6A2F8F"/>
-          </a:solidFill>
-          <a:ln w="12700">
-            <a:solidFill>
-              <a:srgbClr val="6A2F8F"/>
-            </a:solidFill>
-            <a:prstDash val="solid"/>
-          </a:ln>
-        </p:spPr>
-      </p:sp>
-      <p:sp>
-        <p:nvSpPr>
-          <p:cNvPr id="27" name="Text 24"/>
-          <p:cNvSpPr txBox="1"/>
-          <p:nvPr/>
-        </p:nvSpPr>
-        <p:spPr>
-          <a:xfrm>
-            <a:off x="8183880" y="4059936"/>
-            <a:ext cx="384048" cy="384048"/>
-          </a:xfrm>
-          <a:prstGeom prst="rect">
-            <a:avLst/>
-          </a:prstGeom>
-          <a:noFill/>
-          <a:ln/>
-        </p:spPr>
-        <p:txBody>
-          <a:bodyPr wrap="square" lIns="0" tIns="0" rIns="0" bIns="0" rtlCol="0" anchor="ctr"/>
-          <a:lstStyle/>
-          <a:p>
-            <a:pPr rtl="1" algn="ctr" indent="0" marL="0">
-              <a:buNone/>
-            </a:pPr>
-            <a:r>
-              <a:rPr lang="ar-LB" altLang="en-US" sz="1600" b="1" dirty="0">
-                <a:solidFill>
-                  <a:srgbClr val="FFFFFF"/>
-                </a:solidFill>
-              </a:rPr>
               <a:t>5</a:t>
             </a:r>
-            <a:endParaRPr lang="ar-LB" sz="1600" dirty="0"/>
-          </a:p>
-        </p:txBody>
-      </p:sp>
-      <p:sp>
-        <p:nvSpPr>
-          <p:cNvPr id="28" name="Text 25"/>
-          <p:cNvSpPr txBox="1"/>
-          <p:nvPr/>
-        </p:nvSpPr>
-        <p:spPr>
-          <a:xfrm>
-            <a:off x="3520440" y="3913632"/>
-            <a:ext cx="4572000" cy="676656"/>
-          </a:xfrm>
-          <a:prstGeom prst="rect">
-            <a:avLst/>
-          </a:prstGeom>
-          <a:noFill/>
-          <a:ln/>
-        </p:spPr>
-        <p:txBody>
-          <a:bodyPr wrap="square" lIns="0" tIns="0" rIns="0" bIns="0" rtlCol="0" anchor="ctr"/>
-          <a:lstStyle/>
-          <a:p>
-            <a:pPr rtl="1" algn="r" indent="0" marL="0">
-              <a:buNone/>
-            </a:pPr>
-            <a:r>
-              <a:rPr lang="ar-LB" altLang="en-US" sz="1600" dirty="0">
-                <a:solidFill>
-                  <a:srgbClr val="1B262C"/>
-                </a:solidFill>
-              </a:rPr>
-              <a:t>كتب سامي: (3 أُس 2) الكلّ أُس 3 = 3 أُس 5. أين الخطأ؟</a:t>
-            </a:r>
-            <a:endParaRPr lang="ar-LB" sz="1600" dirty="0"/>
-          </a:p>
-        </p:txBody>
-      </p:sp>
-      <p:sp>
-        <p:nvSpPr>
-          <p:cNvPr id="29" name="Text 26"/>
-          <p:cNvSpPr txBox="1"/>
-          <p:nvPr/>
-        </p:nvSpPr>
-        <p:spPr>
-          <a:xfrm>
-            <a:off x="594360" y="3913632"/>
-            <a:ext cx="2834640" cy="676656"/>
-          </a:xfrm>
-          <a:prstGeom prst="rect">
-            <a:avLst/>
-          </a:prstGeom>
-          <a:noFill/>
-          <a:ln/>
-        </p:spPr>
-        <p:txBody>
-          <a:bodyPr wrap="square" lIns="0" tIns="0" rIns="0" bIns="0" rtlCol="0" anchor="ctr"/>
-          <a:lstStyle/>
-          <a:p>
-            <a:pPr rtl="0" algn="ctr" indent="0" marL="0">
-              <a:buNone/>
-            </a:pPr>
-            <a:r>
-              <a:rPr lang="en-US" sz="1800" b="1" dirty="0">
-                <a:solidFill>
-                  <a:srgbClr val="6A2F8F"/>
-                </a:solidFill>
-                <a:latin typeface="Arial" pitchFamily="34" charset="0"/>
-                <a:ea typeface="Arial" pitchFamily="34" charset="-122"/>
-                <a:cs typeface="Arial" pitchFamily="34" charset="-120"/>
-              </a:rPr>
-              <a:t>(3</a:t>
-            </a:r>
-            <a:r>
-              <a:rPr lang="en-US" sz="1800" b="1" baseline="30000" dirty="0">
-                <a:solidFill>
-                  <a:srgbClr val="6A2F8F"/>
-                </a:solidFill>
-                <a:latin typeface="Arial" pitchFamily="34" charset="0"/>
-                <a:ea typeface="Arial" pitchFamily="34" charset="-122"/>
-                <a:cs typeface="Arial" pitchFamily="34" charset="-120"/>
-              </a:rPr>
-              <a:t>2</a:t>
-            </a:r>
-            <a:r>
-              <a:rPr lang="en-US" sz="1800" b="1" dirty="0">
-                <a:solidFill>
-                  <a:srgbClr val="6A2F8F"/>
-                </a:solidFill>
-                <a:latin typeface="Arial" pitchFamily="34" charset="0"/>
-                <a:ea typeface="Arial" pitchFamily="34" charset="-122"/>
-                <a:cs typeface="Arial" pitchFamily="34" charset="-120"/>
-              </a:rPr>
-              <a:t>)</a:t>
-            </a:r>
-            <a:r>
-              <a:rPr lang="en-US" sz="1800" b="1" baseline="30000" dirty="0">
-                <a:solidFill>
-                  <a:srgbClr val="6A2F8F"/>
-                </a:solidFill>
-                <a:latin typeface="Arial" pitchFamily="34" charset="0"/>
-                <a:ea typeface="Arial" pitchFamily="34" charset="-122"/>
-                <a:cs typeface="Arial" pitchFamily="34" charset="-120"/>
-              </a:rPr>
-              <a:t>3</a:t>
-            </a:r>
-            <a:r>
-              <a:rPr lang="en-US" sz="1800" b="1" dirty="0">
-                <a:solidFill>
-                  <a:srgbClr val="6A2F8F"/>
-                </a:solidFill>
-                <a:latin typeface="Arial" pitchFamily="34" charset="0"/>
-                <a:ea typeface="Arial" pitchFamily="34" charset="-122"/>
-                <a:cs typeface="Arial" pitchFamily="34" charset="-120"/>
-              </a:rPr>
-              <a:t> = 3</a:t>
-            </a:r>
-            <a:r>
-              <a:rPr lang="en-US" sz="1800" b="1" baseline="30000" dirty="0">
-                <a:solidFill>
-                  <a:srgbClr val="6A2F8F"/>
-                </a:solidFill>
-                <a:latin typeface="Arial" pitchFamily="34" charset="0"/>
-                <a:ea typeface="Arial" pitchFamily="34" charset="-122"/>
-                <a:cs typeface="Arial" pitchFamily="34" charset="-120"/>
-              </a:rPr>
-              <a:t>5</a:t>
-            </a:r>
-            <a:endParaRPr lang="en-US" sz="1800" dirty="0"/>
+            <a:endParaRPr lang="en-US" sz="2100" dirty="0"/>
           </a:p>
         </p:txBody>
       </p:sp>
@@ -3778,7 +3569,7 @@
         <p:spPr>
           <a:xfrm>
             <a:off x="5989320" y="960120"/>
-            <a:ext cx="2606040" cy="411480"/>
+            <a:ext cx="2606040" cy="457200"/>
           </a:xfrm>
           <a:prstGeom prst="rect">
             <a:avLst/>
@@ -3794,14 +3585,14 @@
               <a:buNone/>
             </a:pPr>
             <a:r>
-              <a:rPr lang="ar-LB" altLang="en-US" sz="1800" b="1" dirty="0">
+              <a:rPr lang="ar-LB" altLang="en-US" sz="1900" b="1" dirty="0">
                 <a:solidFill>
                   <a:srgbClr val="1F7A45"/>
                 </a:solidFill>
               </a:rPr>
               <a:t>مجموعة الدائرة</a:t>
             </a:r>
-            <a:endParaRPr lang="ar-LB" sz="1800" dirty="0"/>
+            <a:endParaRPr lang="ar-LB" sz="1900" dirty="0"/>
           </a:p>
         </p:txBody>
       </p:sp>
@@ -3813,8 +3604,8 @@
         </p:nvSpPr>
         <p:spPr>
           <a:xfrm>
-            <a:off x="6099048" y="1417320"/>
-            <a:ext cx="2386584" cy="3154680"/>
+            <a:off x="6126480" y="1508760"/>
+            <a:ext cx="2331720" cy="3063240"/>
           </a:xfrm>
           <a:prstGeom prst="rect">
             <a:avLst/>
@@ -3828,87 +3619,70 @@
           <a:p>
             <a:pPr rtl="1" algn="r" indent="0" marL="0">
               <a:spcAft>
-                <a:spcPts val="800"/>
+                <a:spcPts val="1200"/>
               </a:spcAft>
               <a:buNone/>
             </a:pPr>
             <a:r>
-              <a:rPr lang="ar-LB" altLang="en-US" sz="1500" dirty="0">
+              <a:rPr lang="ar-LB" altLang="en-US" sz="1800" dirty="0">
                 <a:solidFill>
                   <a:srgbClr val="1B262C"/>
                 </a:solidFill>
               </a:rPr>
-              <a:t>1) 3 أُس 4 = 81</a:t>
-            </a:r>
-            <a:endParaRPr lang="ar-LB" sz="1500" dirty="0"/>
+              <a:t>1) 3 أُس 2</a:t>
+            </a:r>
+            <a:endParaRPr lang="ar-LB" sz="1800" dirty="0"/>
           </a:p>
           <a:p>
             <a:pPr rtl="1" algn="r" indent="0" marL="0">
               <a:spcAft>
-                <a:spcPts val="800"/>
+                <a:spcPts val="1200"/>
               </a:spcAft>
               <a:buNone/>
             </a:pPr>
             <a:r>
-              <a:rPr lang="ar-LB" altLang="en-US" sz="1500" dirty="0">
+              <a:rPr lang="ar-LB" altLang="en-US" sz="1800" dirty="0">
                 <a:solidFill>
                   <a:srgbClr val="1B262C"/>
                 </a:solidFill>
               </a:rPr>
-              <a:t>2) 5 أُس 3 = 125</a:t>
-            </a:r>
-            <a:endParaRPr lang="ar-LB" sz="1500" dirty="0"/>
+              <a:t>2) 2 أُس 3</a:t>
+            </a:r>
+            <a:endParaRPr lang="ar-LB" sz="1800" dirty="0"/>
           </a:p>
           <a:p>
             <a:pPr rtl="1" algn="r" indent="0" marL="0">
               <a:spcAft>
-                <a:spcPts val="800"/>
+                <a:spcPts val="1200"/>
               </a:spcAft>
               <a:buNone/>
             </a:pPr>
             <a:r>
-              <a:rPr lang="ar-LB" altLang="en-US" sz="1500" dirty="0">
+              <a:rPr lang="ar-LB" altLang="en-US" sz="1800" dirty="0">
                 <a:solidFill>
                   <a:srgbClr val="1B262C"/>
                 </a:solidFill>
               </a:rPr>
-              <a:t>3) 3+3+3+3 = 4 × 3 = 12 ضرب لا قوّة</a:t>
-            </a:r>
-            <a:endParaRPr lang="ar-LB" sz="1500" dirty="0"/>
+              <a:t>3) 4</a:t>
+            </a:r>
+            <a:endParaRPr lang="ar-LB" sz="1800" dirty="0"/>
           </a:p>
           <a:p>
             <a:pPr rtl="1" algn="r" indent="0" marL="0">
               <a:spcAft>
-                <a:spcPts val="800"/>
+                <a:spcPts val="1200"/>
               </a:spcAft>
               <a:buNone/>
             </a:pPr>
             <a:r>
-              <a:rPr lang="ar-LB" altLang="en-US" sz="1500" dirty="0">
+              <a:rPr lang="ar-LB" altLang="en-US" sz="1800" dirty="0">
                 <a:solidFill>
                   <a:srgbClr val="1B262C"/>
                 </a:solidFill>
               </a:rPr>
-              <a:t>4) 2 أُس 4 = 16</a:t>
-            </a:r>
-            <a:endParaRPr lang="ar-LB" sz="1500" dirty="0"/>
-          </a:p>
-          <a:p>
-            <a:pPr rtl="1" algn="r" indent="0" marL="0">
-              <a:spcAft>
-                <a:spcPts val="800"/>
-              </a:spcAft>
-              <a:buNone/>
-            </a:pPr>
-            <a:r>
-              <a:rPr lang="ar-LB" altLang="en-US" sz="1500" dirty="0">
-                <a:solidFill>
-                  <a:srgbClr val="1B262C"/>
-                </a:solidFill>
-              </a:rPr>
-              <a:t>5) 16 مكعّبًا</a:t>
-            </a:r>
-            <a:endParaRPr lang="ar-LB" sz="1500" dirty="0"/>
+              <a:t>4) 6 و 8</a:t>
+            </a:r>
+            <a:endParaRPr lang="ar-LB" sz="1800" dirty="0"/>
           </a:p>
         </p:txBody>
       </p:sp>
@@ -3950,7 +3724,7 @@
         <p:spPr>
           <a:xfrm>
             <a:off x="3246120" y="960120"/>
-            <a:ext cx="2606040" cy="411480"/>
+            <a:ext cx="2606040" cy="457200"/>
           </a:xfrm>
           <a:prstGeom prst="rect">
             <a:avLst/>
@@ -3966,14 +3740,14 @@
               <a:buNone/>
             </a:pPr>
             <a:r>
-              <a:rPr lang="ar-LB" altLang="en-US" sz="1800" b="1" dirty="0">
+              <a:rPr lang="ar-LB" altLang="en-US" sz="1900" b="1" dirty="0">
                 <a:solidFill>
                   <a:srgbClr val="1F5C99"/>
                 </a:solidFill>
               </a:rPr>
               <a:t>مجموعة المربّع</a:t>
             </a:r>
-            <a:endParaRPr lang="ar-LB" sz="1800" dirty="0"/>
+            <a:endParaRPr lang="ar-LB" sz="1900" dirty="0"/>
           </a:p>
         </p:txBody>
       </p:sp>
@@ -3985,8 +3759,8 @@
         </p:nvSpPr>
         <p:spPr>
           <a:xfrm>
-            <a:off x="3355848" y="1417320"/>
-            <a:ext cx="2386584" cy="3154680"/>
+            <a:off x="3383280" y="1508760"/>
+            <a:ext cx="2331720" cy="3063240"/>
           </a:xfrm>
           <a:prstGeom prst="rect">
             <a:avLst/>
@@ -4000,87 +3774,70 @@
           <a:p>
             <a:pPr rtl="1" algn="r" indent="0" marL="0">
               <a:spcAft>
-                <a:spcPts val="800"/>
+                <a:spcPts val="1200"/>
               </a:spcAft>
               <a:buNone/>
             </a:pPr>
             <a:r>
-              <a:rPr lang="ar-LB" altLang="en-US" sz="1500" dirty="0">
+              <a:rPr lang="ar-LB" altLang="en-US" sz="1800" dirty="0">
                 <a:solidFill>
                   <a:srgbClr val="1B262C"/>
                 </a:solidFill>
               </a:rPr>
-              <a:t>1) 2 أُس 8 = 256</a:t>
-            </a:r>
-            <a:endParaRPr lang="ar-LB" sz="1500" dirty="0"/>
+              <a:t>1) 5 أُس 3</a:t>
+            </a:r>
+            <a:endParaRPr lang="ar-LB" sz="1800" dirty="0"/>
           </a:p>
           <a:p>
             <a:pPr rtl="1" algn="r" indent="0" marL="0">
               <a:spcAft>
-                <a:spcPts val="800"/>
+                <a:spcPts val="1200"/>
               </a:spcAft>
               <a:buNone/>
             </a:pPr>
             <a:r>
-              <a:rPr lang="ar-LB" altLang="en-US" sz="1500" dirty="0">
+              <a:rPr lang="ar-LB" altLang="en-US" sz="1800" dirty="0">
                 <a:solidFill>
                   <a:srgbClr val="1B262C"/>
                 </a:solidFill>
               </a:rPr>
-              <a:t>2) 3 أُس 6 = 729</a:t>
-            </a:r>
-            <a:endParaRPr lang="ar-LB" sz="1500" dirty="0"/>
+              <a:t>2) 9</a:t>
+            </a:r>
+            <a:endParaRPr lang="ar-LB" sz="1800" dirty="0"/>
           </a:p>
           <a:p>
             <a:pPr rtl="1" algn="r" indent="0" marL="0">
               <a:spcAft>
-                <a:spcPts val="800"/>
+                <a:spcPts val="1200"/>
               </a:spcAft>
               <a:buNone/>
             </a:pPr>
             <a:r>
-              <a:rPr lang="ar-LB" altLang="en-US" sz="1500" dirty="0">
+              <a:rPr lang="ar-LB" altLang="en-US" sz="1800" dirty="0">
                 <a:solidFill>
                   <a:srgbClr val="1B262C"/>
                 </a:solidFill>
               </a:rPr>
-              <a:t>3) خطأ ← 4 أُس 6</a:t>
-            </a:r>
-            <a:endParaRPr lang="ar-LB" sz="1500" dirty="0"/>
+              <a:t>3) 2 أُس 4</a:t>
+            </a:r>
+            <a:endParaRPr lang="ar-LB" sz="1800" dirty="0"/>
           </a:p>
           <a:p>
             <a:pPr rtl="1" algn="r" indent="0" marL="0">
               <a:spcAft>
-                <a:spcPts val="800"/>
+                <a:spcPts val="1200"/>
               </a:spcAft>
               <a:buNone/>
             </a:pPr>
             <a:r>
-              <a:rPr lang="ar-LB" altLang="en-US" sz="1500" dirty="0">
+              <a:rPr lang="ar-LB" altLang="en-US" sz="1800" dirty="0">
                 <a:solidFill>
                   <a:srgbClr val="1B262C"/>
                 </a:solidFill>
               </a:rPr>
-              <a:t>4) خطأ ← 25</a:t>
-            </a:r>
-            <a:endParaRPr lang="ar-LB" sz="1500" dirty="0"/>
-          </a:p>
-          <a:p>
-            <a:pPr rtl="1" algn="r" indent="0" marL="0">
-              <a:spcAft>
-                <a:spcPts val="800"/>
-              </a:spcAft>
-              <a:buNone/>
-            </a:pPr>
-            <a:r>
-              <a:rPr lang="ar-LB" altLang="en-US" sz="1500" dirty="0">
-                <a:solidFill>
-                  <a:srgbClr val="1B262C"/>
-                </a:solidFill>
-              </a:rPr>
-              <a:t>5) 10 أُس 4 = 10000 م²</a:t>
-            </a:r>
-            <a:endParaRPr lang="ar-LB" sz="1500" dirty="0"/>
+              <a:t>4) خطأ، الصحيح 9</a:t>
+            </a:r>
+            <a:endParaRPr lang="ar-LB" sz="1800" dirty="0"/>
           </a:p>
         </p:txBody>
       </p:sp>
@@ -4122,7 +3879,7 @@
         <p:spPr>
           <a:xfrm>
             <a:off x="502920" y="960120"/>
-            <a:ext cx="2606040" cy="411480"/>
+            <a:ext cx="2606040" cy="457200"/>
           </a:xfrm>
           <a:prstGeom prst="rect">
             <a:avLst/>
@@ -4138,14 +3895,14 @@
               <a:buNone/>
             </a:pPr>
             <a:r>
-              <a:rPr lang="ar-LB" altLang="en-US" sz="1800" b="1" dirty="0">
+              <a:rPr lang="ar-LB" altLang="en-US" sz="1900" b="1" dirty="0">
                 <a:solidFill>
                   <a:srgbClr val="6A2F8F"/>
                 </a:solidFill>
               </a:rPr>
               <a:t>مجموعة المثلث</a:t>
             </a:r>
-            <a:endParaRPr lang="ar-LB" sz="1800" dirty="0"/>
+            <a:endParaRPr lang="ar-LB" sz="1900" dirty="0"/>
           </a:p>
         </p:txBody>
       </p:sp>
@@ -4157,8 +3914,8 @@
         </p:nvSpPr>
         <p:spPr>
           <a:xfrm>
-            <a:off x="612648" y="1417320"/>
-            <a:ext cx="2386584" cy="3154680"/>
+            <a:off x="640080" y="1508760"/>
+            <a:ext cx="2331720" cy="3063240"/>
           </a:xfrm>
           <a:prstGeom prst="rect">
             <a:avLst/>
@@ -4172,87 +3929,70 @@
           <a:p>
             <a:pPr rtl="1" algn="r" indent="0" marL="0">
               <a:spcAft>
-                <a:spcPts val="800"/>
+                <a:spcPts val="1200"/>
               </a:spcAft>
               <a:buNone/>
             </a:pPr>
             <a:r>
-              <a:rPr lang="ar-LB" altLang="en-US" sz="1500" dirty="0">
+              <a:rPr lang="ar-LB" altLang="en-US" sz="1800" dirty="0">
                 <a:solidFill>
                   <a:srgbClr val="1B262C"/>
                 </a:solidFill>
               </a:rPr>
-              <a:t>1) 5</a:t>
-            </a:r>
-            <a:endParaRPr lang="ar-LB" sz="1500" dirty="0"/>
+              <a:t>1) 3 أُس 4</a:t>
+            </a:r>
+            <a:endParaRPr lang="ar-LB" sz="1800" dirty="0"/>
           </a:p>
           <a:p>
             <a:pPr rtl="1" algn="r" indent="0" marL="0">
               <a:spcAft>
-                <a:spcPts val="800"/>
+                <a:spcPts val="1200"/>
               </a:spcAft>
               <a:buNone/>
             </a:pPr>
             <a:r>
-              <a:rPr lang="ar-LB" altLang="en-US" sz="1500" dirty="0">
+              <a:rPr lang="ar-LB" altLang="en-US" sz="1800" dirty="0">
                 <a:solidFill>
                   <a:srgbClr val="1B262C"/>
                 </a:solidFill>
               </a:rPr>
-              <a:t>2) 3</a:t>
-            </a:r>
-            <a:endParaRPr lang="ar-LB" sz="1500" dirty="0"/>
+              <a:t>2) 2 أُس 6</a:t>
+            </a:r>
+            <a:endParaRPr lang="ar-LB" sz="1800" dirty="0"/>
           </a:p>
           <a:p>
             <a:pPr rtl="1" algn="r" indent="0" marL="0">
               <a:spcAft>
-                <a:spcPts val="800"/>
+                <a:spcPts val="1200"/>
               </a:spcAft>
               <a:buNone/>
             </a:pPr>
             <a:r>
-              <a:rPr lang="ar-LB" altLang="en-US" sz="1500" dirty="0">
+              <a:rPr lang="ar-LB" altLang="en-US" sz="1800" dirty="0">
                 <a:solidFill>
                   <a:srgbClr val="1B262C"/>
                 </a:solidFill>
               </a:rPr>
-              <a:t>3) الأُسّان: 2 و6، 6 و2، 3 و4، 4 و3</a:t>
-            </a:r>
-            <a:endParaRPr lang="ar-LB" sz="1500" dirty="0"/>
+              <a:t>3) 3 أُس 2 أكبر (9 أكبر من 8)</a:t>
+            </a:r>
+            <a:endParaRPr lang="ar-LB" sz="1800" dirty="0"/>
           </a:p>
           <a:p>
             <a:pPr rtl="1" algn="r" indent="0" marL="0">
               <a:spcAft>
-                <a:spcPts val="800"/>
+                <a:spcPts val="1200"/>
               </a:spcAft>
               <a:buNone/>
             </a:pPr>
             <a:r>
-              <a:rPr lang="ar-LB" altLang="en-US" sz="1500" dirty="0">
+              <a:rPr lang="ar-LB" altLang="en-US" sz="1800" dirty="0">
                 <a:solidFill>
                   <a:srgbClr val="1B262C"/>
                 </a:solidFill>
               </a:rPr>
-              <a:t>4) متساويتان: 2 أُس 12</a:t>
-            </a:r>
-            <a:endParaRPr lang="ar-LB" sz="1500" dirty="0"/>
-          </a:p>
-          <a:p>
-            <a:pPr rtl="1" algn="r" indent="0" marL="0">
-              <a:spcAft>
-                <a:spcPts val="800"/>
-              </a:spcAft>
-              <a:buNone/>
-            </a:pPr>
-            <a:r>
-              <a:rPr lang="ar-LB" altLang="en-US" sz="1500" dirty="0">
-                <a:solidFill>
-                  <a:srgbClr val="1B262C"/>
-                </a:solidFill>
-              </a:rPr>
-              <a:t>5) نضرب الأُسّين: 3 أُس 6 = 729</a:t>
-            </a:r>
-            <a:endParaRPr lang="ar-LB" sz="1500" dirty="0"/>
+              <a:t>4) خطأ، الصحيح 2 أُس 6</a:t>
+            </a:r>
+            <a:endParaRPr lang="ar-LB" sz="1800" dirty="0"/>
           </a:p>
         </p:txBody>
       </p:sp>
@@ -4373,11 +4113,11 @@
         <p:spPr>
           <a:xfrm>
             <a:off x="457200" y="914400"/>
-            <a:ext cx="8229600" cy="676656"/>
+            <a:ext cx="8229600" cy="822960"/>
           </a:xfrm>
           <a:prstGeom prst="roundRect">
             <a:avLst>
-              <a:gd name="adj" fmla="val 13514"/>
+              <a:gd name="adj" fmla="val 11111"/>
             </a:avLst>
           </a:prstGeom>
           <a:solidFill>
@@ -4401,7 +4141,7 @@
         </p:nvSpPr>
         <p:spPr>
           <a:xfrm>
-            <a:off x="8183880" y="1060704"/>
+            <a:off x="8183880" y="1133856"/>
             <a:ext cx="384048" cy="384048"/>
           </a:xfrm>
           <a:prstGeom prst="ellipse">
@@ -4426,7 +4166,7 @@
         </p:nvSpPr>
         <p:spPr>
           <a:xfrm>
-            <a:off x="8183880" y="1060704"/>
+            <a:off x="8183880" y="1133856"/>
             <a:ext cx="384048" cy="384048"/>
           </a:xfrm>
           <a:prstGeom prst="rect">
@@ -4462,8 +4202,8 @@
         </p:nvSpPr>
         <p:spPr>
           <a:xfrm>
-            <a:off x="3520440" y="914400"/>
-            <a:ext cx="4572000" cy="676656"/>
+            <a:off x="640080" y="914400"/>
+            <a:ext cx="7452360" cy="822960"/>
           </a:xfrm>
           <a:prstGeom prst="rect">
             <a:avLst/>
@@ -4479,81 +4219,31 @@
               <a:buNone/>
             </a:pPr>
             <a:r>
-              <a:rPr lang="ar-LB" altLang="en-US" sz="1700" dirty="0">
+              <a:rPr lang="ar-LB" altLang="en-US" sz="1900" dirty="0">
                 <a:solidFill>
                   <a:srgbClr val="1B262C"/>
                 </a:solidFill>
               </a:rPr>
-              <a:t>أيّهما يساوي 6 أُس 3: (أ) 6 × 3 أم (ب) 6 × 6 × 6؟ لماذا؟</a:t>
-            </a:r>
-            <a:endParaRPr lang="ar-LB" sz="1700" dirty="0"/>
-          </a:p>
-        </p:txBody>
-      </p:sp>
-      <p:sp>
-        <p:nvSpPr>
-          <p:cNvPr id="7" name="Text 5"/>
-          <p:cNvSpPr txBox="1"/>
-          <p:nvPr/>
-        </p:nvSpPr>
-        <p:spPr>
-          <a:xfrm>
-            <a:off x="594360" y="914400"/>
-            <a:ext cx="2834640" cy="676656"/>
-          </a:xfrm>
-          <a:prstGeom prst="rect">
-            <a:avLst/>
-          </a:prstGeom>
-          <a:noFill/>
-          <a:ln/>
-        </p:spPr>
-        <p:txBody>
-          <a:bodyPr wrap="square" lIns="0" tIns="0" rIns="0" bIns="0" rtlCol="0" anchor="ctr"/>
-          <a:lstStyle/>
-          <a:p>
-            <a:pPr rtl="0" algn="ctr" indent="0" marL="0">
-              <a:buNone/>
-            </a:pPr>
-            <a:r>
-              <a:rPr lang="en-US" sz="1900" b="1" dirty="0">
-                <a:solidFill>
-                  <a:srgbClr val="0F4C5C"/>
-                </a:solidFill>
-                <a:latin typeface="Arial" pitchFamily="34" charset="0"/>
-                <a:ea typeface="Arial" pitchFamily="34" charset="-122"/>
-                <a:cs typeface="Arial" pitchFamily="34" charset="-120"/>
-              </a:rPr>
-              <a:t>6</a:t>
-            </a:r>
-            <a:r>
-              <a:rPr lang="en-US" sz="1900" b="1" baseline="30000" dirty="0">
-                <a:solidFill>
-                  <a:srgbClr val="0F4C5C"/>
-                </a:solidFill>
-                <a:latin typeface="Arial" pitchFamily="34" charset="0"/>
-                <a:ea typeface="Arial" pitchFamily="34" charset="-122"/>
-                <a:cs typeface="Arial" pitchFamily="34" charset="-120"/>
-              </a:rPr>
-              <a:t>3</a:t>
-            </a:r>
-            <a:endParaRPr lang="en-US" sz="1900" dirty="0"/>
-          </a:p>
-        </p:txBody>
-      </p:sp>
-      <p:sp>
-        <p:nvSpPr>
-          <p:cNvPr id="8" name="Shape 6"/>
+              <a:t>أيّهما يساوي 2 أُس 3: (أ) 2 × 3 أم (ب) 2 × 2 × 2؟</a:t>
+            </a:r>
+            <a:endParaRPr lang="ar-LB" sz="1900" dirty="0"/>
+          </a:p>
+        </p:txBody>
+      </p:sp>
+      <p:sp>
+        <p:nvSpPr>
+          <p:cNvPr id="7" name="Shape 5"/>
           <p:cNvSpPr/>
           <p:nvPr/>
         </p:nvSpPr>
         <p:spPr>
           <a:xfrm>
-            <a:off x="457200" y="1664208"/>
-            <a:ext cx="8229600" cy="676656"/>
+            <a:off x="457200" y="1847088"/>
+            <a:ext cx="8229600" cy="822960"/>
           </a:xfrm>
           <a:prstGeom prst="roundRect">
             <a:avLst>
-              <a:gd name="adj" fmla="val 13514"/>
+              <a:gd name="adj" fmla="val 11111"/>
             </a:avLst>
           </a:prstGeom>
           <a:solidFill>
@@ -4571,13 +4261,13 @@
       </p:sp>
       <p:sp>
         <p:nvSpPr>
-          <p:cNvPr id="9" name="Shape 7"/>
+          <p:cNvPr id="8" name="Shape 6"/>
           <p:cNvSpPr/>
           <p:nvPr/>
         </p:nvSpPr>
         <p:spPr>
           <a:xfrm>
-            <a:off x="8183880" y="1810512"/>
+            <a:off x="8183880" y="2066544"/>
             <a:ext cx="384048" cy="384048"/>
           </a:xfrm>
           <a:prstGeom prst="ellipse">
@@ -4596,14 +4286,50 @@
       </p:sp>
       <p:sp>
         <p:nvSpPr>
+          <p:cNvPr id="9" name="Text 7"/>
+          <p:cNvSpPr txBox="1"/>
+          <p:nvPr/>
+        </p:nvSpPr>
+        <p:spPr>
+          <a:xfrm>
+            <a:off x="8183880" y="2066544"/>
+            <a:ext cx="384048" cy="384048"/>
+          </a:xfrm>
+          <a:prstGeom prst="rect">
+            <a:avLst/>
+          </a:prstGeom>
+          <a:noFill/>
+          <a:ln/>
+        </p:spPr>
+        <p:txBody>
+          <a:bodyPr wrap="square" lIns="0" tIns="0" rIns="0" bIns="0" rtlCol="0" anchor="ctr"/>
+          <a:lstStyle/>
+          <a:p>
+            <a:pPr rtl="1" algn="ctr" indent="0" marL="0">
+              <a:buNone/>
+            </a:pPr>
+            <a:r>
+              <a:rPr lang="ar-LB" altLang="en-US" sz="1600" b="1" dirty="0">
+                <a:solidFill>
+                  <a:srgbClr val="FFFFFF"/>
+                </a:solidFill>
+              </a:rPr>
+              <a:t>2</a:t>
+            </a:r>
+            <a:endParaRPr lang="ar-LB" sz="1600" dirty="0"/>
+          </a:p>
+        </p:txBody>
+      </p:sp>
+      <p:sp>
+        <p:nvSpPr>
           <p:cNvPr id="10" name="Text 8"/>
           <p:cNvSpPr txBox="1"/>
           <p:nvPr/>
         </p:nvSpPr>
         <p:spPr>
           <a:xfrm>
-            <a:off x="8183880" y="1810512"/>
-            <a:ext cx="384048" cy="384048"/>
+            <a:off x="3520440" y="1847088"/>
+            <a:ext cx="4572000" cy="822960"/>
           </a:xfrm>
           <a:prstGeom prst="rect">
             <a:avLst/>
@@ -4615,18 +4341,18 @@
           <a:bodyPr wrap="square" lIns="0" tIns="0" rIns="0" bIns="0" rtlCol="0" anchor="ctr"/>
           <a:lstStyle/>
           <a:p>
-            <a:pPr rtl="1" algn="ctr" indent="0" marL="0">
-              <a:buNone/>
-            </a:pPr>
-            <a:r>
-              <a:rPr lang="ar-LB" altLang="en-US" sz="1600" b="1" dirty="0">
-                <a:solidFill>
-                  <a:srgbClr val="FFFFFF"/>
-                </a:solidFill>
-              </a:rPr>
-              <a:t>2</a:t>
-            </a:r>
-            <a:endParaRPr lang="ar-LB" sz="1600" dirty="0"/>
+            <a:pPr rtl="1" algn="r" indent="0" marL="0">
+              <a:buNone/>
+            </a:pPr>
+            <a:r>
+              <a:rPr lang="ar-LB" altLang="en-US" sz="1900" dirty="0">
+                <a:solidFill>
+                  <a:srgbClr val="1B262C"/>
+                </a:solidFill>
+              </a:rPr>
+              <a:t>اكتب على شكل قوّة: 4 × 4 × 4</a:t>
+            </a:r>
+            <a:endParaRPr lang="ar-LB" sz="1900" dirty="0"/>
           </a:p>
         </p:txBody>
       </p:sp>
@@ -4638,8 +4364,8 @@
         </p:nvSpPr>
         <p:spPr>
           <a:xfrm>
-            <a:off x="640080" y="1664208"/>
-            <a:ext cx="7452360" cy="676656"/>
+            <a:off x="594360" y="1847088"/>
+            <a:ext cx="2834640" cy="822960"/>
           </a:xfrm>
           <a:prstGeom prst="rect">
             <a:avLst/>
@@ -4651,18 +4377,21 @@
           <a:bodyPr wrap="square" lIns="0" tIns="0" rIns="0" bIns="0" rtlCol="0" anchor="ctr"/>
           <a:lstStyle/>
           <a:p>
-            <a:pPr rtl="1" algn="r" indent="0" marL="0">
-              <a:buNone/>
-            </a:pPr>
-            <a:r>
-              <a:rPr lang="ar-LB" altLang="en-US" sz="1700" dirty="0">
-                <a:solidFill>
-                  <a:srgbClr val="1B262C"/>
-                </a:solidFill>
-              </a:rPr>
-              <a:t>اكتب على شكل قوّة: 8 × 8 × 8 × 8 × 8، وكذلك y × y × y.</a:t>
-            </a:r>
-            <a:endParaRPr lang="ar-LB" sz="1700" dirty="0"/>
+            <a:pPr rtl="0" algn="ctr" indent="0" marL="0">
+              <a:buNone/>
+            </a:pPr>
+            <a:r>
+              <a:rPr lang="en-US" sz="2100" b="1" dirty="0">
+                <a:solidFill>
+                  <a:srgbClr val="0F4C5C"/>
+                </a:solidFill>
+                <a:latin typeface="Arial" pitchFamily="34" charset="0"/>
+                <a:ea typeface="Arial" pitchFamily="34" charset="-122"/>
+                <a:cs typeface="Arial" pitchFamily="34" charset="-120"/>
+              </a:rPr>
+              <a:t>4 × 4 × 4</a:t>
+            </a:r>
+            <a:endParaRPr lang="en-US" sz="2100" dirty="0"/>
           </a:p>
         </p:txBody>
       </p:sp>
@@ -4674,12 +4403,12 @@
         </p:nvSpPr>
         <p:spPr>
           <a:xfrm>
-            <a:off x="457200" y="2414016"/>
-            <a:ext cx="8229600" cy="676656"/>
+            <a:off x="457200" y="2779776"/>
+            <a:ext cx="8229600" cy="822960"/>
           </a:xfrm>
           <a:prstGeom prst="roundRect">
             <a:avLst>
-              <a:gd name="adj" fmla="val 13514"/>
+              <a:gd name="adj" fmla="val 11111"/>
             </a:avLst>
           </a:prstGeom>
           <a:solidFill>
@@ -4703,7 +4432,7 @@
         </p:nvSpPr>
         <p:spPr>
           <a:xfrm>
-            <a:off x="8183880" y="2560320"/>
+            <a:off x="8183880" y="2999232"/>
             <a:ext cx="384048" cy="384048"/>
           </a:xfrm>
           <a:prstGeom prst="ellipse">
@@ -4728,7 +4457,7 @@
         </p:nvSpPr>
         <p:spPr>
           <a:xfrm>
-            <a:off x="8183880" y="2560320"/>
+            <a:off x="8183880" y="2999232"/>
             <a:ext cx="384048" cy="384048"/>
           </a:xfrm>
           <a:prstGeom prst="rect">
@@ -4764,8 +4493,8 @@
         </p:nvSpPr>
         <p:spPr>
           <a:xfrm>
-            <a:off x="3520440" y="2414016"/>
-            <a:ext cx="4572000" cy="676656"/>
+            <a:off x="3520440" y="2779776"/>
+            <a:ext cx="4572000" cy="822960"/>
           </a:xfrm>
           <a:prstGeom prst="rect">
             <a:avLst/>
@@ -4781,14 +4510,14 @@
               <a:buNone/>
             </a:pPr>
             <a:r>
-              <a:rPr lang="ar-LB" altLang="en-US" sz="1700" dirty="0">
+              <a:rPr lang="ar-LB" altLang="en-US" sz="1900" dirty="0">
                 <a:solidFill>
                   <a:srgbClr val="1B262C"/>
                 </a:solidFill>
               </a:rPr>
-              <a:t>اكتب على شكل قوّة واحدة: (5 أُس 3) الكلّ أُس 4.</a:t>
-            </a:r>
-            <a:endParaRPr lang="ar-LB" sz="1700" dirty="0"/>
+              <a:t>احسب: 5 أُس 2</a:t>
+            </a:r>
+            <a:endParaRPr lang="ar-LB" sz="1900" dirty="0"/>
           </a:p>
         </p:txBody>
       </p:sp>
@@ -4800,8 +4529,8 @@
         </p:nvSpPr>
         <p:spPr>
           <a:xfrm>
-            <a:off x="594360" y="2414016"/>
-            <a:ext cx="2834640" cy="676656"/>
+            <a:off x="594360" y="2779776"/>
+            <a:ext cx="2834640" cy="822960"/>
           </a:xfrm>
           <a:prstGeom prst="rect">
             <a:avLst/>
@@ -4817,7 +4546,7 @@
               <a:buNone/>
             </a:pPr>
             <a:r>
-              <a:rPr lang="en-US" sz="1900" b="1" dirty="0">
+              <a:rPr lang="en-US" sz="2100" b="1" dirty="0">
                 <a:solidFill>
                   <a:srgbClr val="0F4C5C"/>
                 </a:solidFill>
@@ -4825,10 +4554,10 @@
                 <a:ea typeface="Arial" pitchFamily="34" charset="-122"/>
                 <a:cs typeface="Arial" pitchFamily="34" charset="-120"/>
               </a:rPr>
-              <a:t>(5</a:t>
-            </a:r>
-            <a:r>
-              <a:rPr lang="en-US" sz="1900" b="1" baseline="30000" dirty="0">
+              <a:t>5</a:t>
+            </a:r>
+            <a:r>
+              <a:rPr lang="en-US" sz="2100" b="1" baseline="30000" dirty="0">
                 <a:solidFill>
                   <a:srgbClr val="0F4C5C"/>
                 </a:solidFill>
@@ -4836,10 +4565,10 @@
                 <a:ea typeface="Arial" pitchFamily="34" charset="-122"/>
                 <a:cs typeface="Arial" pitchFamily="34" charset="-120"/>
               </a:rPr>
-              <a:t>3</a:t>
-            </a:r>
-            <a:r>
-              <a:rPr lang="en-US" sz="1900" b="1" dirty="0">
+              <a:t>2</a:t>
+            </a:r>
+            <a:r>
+              <a:rPr lang="en-US" sz="2100" b="1" dirty="0">
                 <a:solidFill>
                   <a:srgbClr val="0F4C5C"/>
                 </a:solidFill>
@@ -4847,20 +4576,9 @@
                 <a:ea typeface="Arial" pitchFamily="34" charset="-122"/>
                 <a:cs typeface="Arial" pitchFamily="34" charset="-120"/>
               </a:rPr>
-              <a:t>)</a:t>
-            </a:r>
-            <a:r>
-              <a:rPr lang="en-US" sz="1900" b="1" baseline="30000" dirty="0">
-                <a:solidFill>
-                  <a:srgbClr val="0F4C5C"/>
-                </a:solidFill>
-                <a:latin typeface="Arial" pitchFamily="34" charset="0"/>
-                <a:ea typeface="Arial" pitchFamily="34" charset="-122"/>
-                <a:cs typeface="Arial" pitchFamily="34" charset="-120"/>
-              </a:rPr>
-              <a:t>4</a:t>
-            </a:r>
-            <a:endParaRPr lang="en-US" sz="1900" dirty="0"/>
+              <a:t> = ?</a:t>
+            </a:r>
+            <a:endParaRPr lang="en-US" sz="2100" dirty="0"/>
           </a:p>
         </p:txBody>
       </p:sp>
@@ -4872,12 +4590,12 @@
         </p:nvSpPr>
         <p:spPr>
           <a:xfrm>
-            <a:off x="457200" y="3163824"/>
-            <a:ext cx="8229600" cy="676656"/>
+            <a:off x="457200" y="3712464"/>
+            <a:ext cx="8229600" cy="822960"/>
           </a:xfrm>
           <a:prstGeom prst="roundRect">
             <a:avLst>
-              <a:gd name="adj" fmla="val 13514"/>
+              <a:gd name="adj" fmla="val 11111"/>
             </a:avLst>
           </a:prstGeom>
           <a:solidFill>
@@ -4901,7 +4619,7 @@
         </p:nvSpPr>
         <p:spPr>
           <a:xfrm>
-            <a:off x="8183880" y="3310128"/>
+            <a:off x="8183880" y="3931920"/>
             <a:ext cx="384048" cy="384048"/>
           </a:xfrm>
           <a:prstGeom prst="ellipse">
@@ -4926,7 +4644,7 @@
         </p:nvSpPr>
         <p:spPr>
           <a:xfrm>
-            <a:off x="8183880" y="3310128"/>
+            <a:off x="8183880" y="3931920"/>
             <a:ext cx="384048" cy="384048"/>
           </a:xfrm>
           <a:prstGeom prst="rect">
@@ -4962,8 +4680,8 @@
         </p:nvSpPr>
         <p:spPr>
           <a:xfrm>
-            <a:off x="3520440" y="3163824"/>
-            <a:ext cx="4572000" cy="676656"/>
+            <a:off x="3520440" y="3712464"/>
+            <a:ext cx="4572000" cy="822960"/>
           </a:xfrm>
           <a:prstGeom prst="rect">
             <a:avLst/>
@@ -4979,14 +4697,14 @@
               <a:buNone/>
             </a:pPr>
             <a:r>
-              <a:rPr lang="ar-LB" altLang="en-US" sz="1700" dirty="0">
+              <a:rPr lang="ar-LB" altLang="en-US" sz="1900" dirty="0">
                 <a:solidFill>
                   <a:srgbClr val="1B262C"/>
                 </a:solidFill>
               </a:rPr>
-              <a:t>احسب: (2 أُس 2) الكلّ أُس 4.</a:t>
-            </a:r>
-            <a:endParaRPr lang="ar-LB" sz="1700" dirty="0"/>
+              <a:t>أكمل: (2 أُس 2) الكلّ أُس 2 = 2 أُس ؟</a:t>
+            </a:r>
+            <a:endParaRPr lang="ar-LB" sz="1900" dirty="0"/>
           </a:p>
         </p:txBody>
       </p:sp>
@@ -4998,8 +4716,8 @@
         </p:nvSpPr>
         <p:spPr>
           <a:xfrm>
-            <a:off x="594360" y="3163824"/>
-            <a:ext cx="2834640" cy="676656"/>
+            <a:off x="594360" y="3712464"/>
+            <a:ext cx="2834640" cy="822960"/>
           </a:xfrm>
           <a:prstGeom prst="rect">
             <a:avLst/>
@@ -5015,7 +4733,7 @@
               <a:buNone/>
             </a:pPr>
             <a:r>
-              <a:rPr lang="en-US" sz="1900" b="1" dirty="0">
+              <a:rPr lang="en-US" sz="2100" b="1" dirty="0">
                 <a:solidFill>
                   <a:srgbClr val="0F4C5C"/>
                 </a:solidFill>
@@ -5026,7 +4744,7 @@
               <a:t>(2</a:t>
             </a:r>
             <a:r>
-              <a:rPr lang="en-US" sz="1900" b="1" baseline="30000" dirty="0">
+              <a:rPr lang="en-US" sz="2100" b="1" baseline="30000" dirty="0">
                 <a:solidFill>
                   <a:srgbClr val="0F4C5C"/>
                 </a:solidFill>
@@ -5037,7 +4755,7 @@
               <a:t>2</a:t>
             </a:r>
             <a:r>
-              <a:rPr lang="en-US" sz="1900" b="1" dirty="0">
+              <a:rPr lang="en-US" sz="2100" b="1" dirty="0">
                 <a:solidFill>
                   <a:srgbClr val="0F4C5C"/>
                 </a:solidFill>
@@ -5048,7 +4766,7 @@
               <a:t>)</a:t>
             </a:r>
             <a:r>
-              <a:rPr lang="en-US" sz="1900" b="1" baseline="30000" dirty="0">
+              <a:rPr lang="en-US" sz="2100" b="1" baseline="30000" dirty="0">
                 <a:solidFill>
                   <a:srgbClr val="0F4C5C"/>
                 </a:solidFill>
@@ -5056,164 +4774,10 @@
                 <a:ea typeface="Arial" pitchFamily="34" charset="-122"/>
                 <a:cs typeface="Arial" pitchFamily="34" charset="-120"/>
               </a:rPr>
-              <a:t>4</a:t>
-            </a:r>
-            <a:endParaRPr lang="en-US" sz="1900" dirty="0"/>
-          </a:p>
-        </p:txBody>
-      </p:sp>
-      <p:sp>
-        <p:nvSpPr>
-          <p:cNvPr id="22" name="Shape 20"/>
-          <p:cNvSpPr/>
-          <p:nvPr/>
-        </p:nvSpPr>
-        <p:spPr>
-          <a:xfrm>
-            <a:off x="457200" y="3913632"/>
-            <a:ext cx="8229600" cy="676656"/>
-          </a:xfrm>
-          <a:prstGeom prst="roundRect">
-            <a:avLst>
-              <a:gd name="adj" fmla="val 13514"/>
-            </a:avLst>
-          </a:prstGeom>
-          <a:solidFill>
-            <a:srgbClr val="0F4C5C">
-              <a:alpha val="8000"/>
-            </a:srgbClr>
-          </a:solidFill>
-          <a:ln w="19050">
-            <a:solidFill>
-              <a:srgbClr val="0F4C5C"/>
-            </a:solidFill>
-            <a:prstDash val="solid"/>
-          </a:ln>
-        </p:spPr>
-      </p:sp>
-      <p:sp>
-        <p:nvSpPr>
-          <p:cNvPr id="23" name="Shape 21"/>
-          <p:cNvSpPr/>
-          <p:nvPr/>
-        </p:nvSpPr>
-        <p:spPr>
-          <a:xfrm>
-            <a:off x="8183880" y="4059936"/>
-            <a:ext cx="384048" cy="384048"/>
-          </a:xfrm>
-          <a:prstGeom prst="ellipse">
-            <a:avLst/>
-          </a:prstGeom>
-          <a:solidFill>
-            <a:srgbClr val="0F4C5C"/>
-          </a:solidFill>
-          <a:ln w="12700">
-            <a:solidFill>
-              <a:srgbClr val="0F4C5C"/>
-            </a:solidFill>
-            <a:prstDash val="solid"/>
-          </a:ln>
-        </p:spPr>
-      </p:sp>
-      <p:sp>
-        <p:nvSpPr>
-          <p:cNvPr id="24" name="Text 22"/>
-          <p:cNvSpPr txBox="1"/>
-          <p:nvPr/>
-        </p:nvSpPr>
-        <p:spPr>
-          <a:xfrm>
-            <a:off x="8183880" y="4059936"/>
-            <a:ext cx="384048" cy="384048"/>
-          </a:xfrm>
-          <a:prstGeom prst="rect">
-            <a:avLst/>
-          </a:prstGeom>
-          <a:noFill/>
-          <a:ln/>
-        </p:spPr>
-        <p:txBody>
-          <a:bodyPr wrap="square" lIns="0" tIns="0" rIns="0" bIns="0" rtlCol="0" anchor="ctr"/>
-          <a:lstStyle/>
-          <a:p>
-            <a:pPr rtl="1" algn="ctr" indent="0" marL="0">
-              <a:buNone/>
-            </a:pPr>
-            <a:r>
-              <a:rPr lang="ar-LB" altLang="en-US" sz="1600" b="1" dirty="0">
-                <a:solidFill>
-                  <a:srgbClr val="FFFFFF"/>
-                </a:solidFill>
-              </a:rPr>
-              <a:t>5</a:t>
-            </a:r>
-            <a:endParaRPr lang="ar-LB" sz="1600" dirty="0"/>
-          </a:p>
-        </p:txBody>
-      </p:sp>
-      <p:sp>
-        <p:nvSpPr>
-          <p:cNvPr id="25" name="Text 23"/>
-          <p:cNvSpPr txBox="1"/>
-          <p:nvPr/>
-        </p:nvSpPr>
-        <p:spPr>
-          <a:xfrm>
-            <a:off x="3520440" y="3913632"/>
-            <a:ext cx="4572000" cy="676656"/>
-          </a:xfrm>
-          <a:prstGeom prst="rect">
-            <a:avLst/>
-          </a:prstGeom>
-          <a:noFill/>
-          <a:ln/>
-        </p:spPr>
-        <p:txBody>
-          <a:bodyPr wrap="square" lIns="0" tIns="0" rIns="0" bIns="0" rtlCol="0" anchor="ctr"/>
-          <a:lstStyle/>
-          <a:p>
-            <a:pPr rtl="1" algn="r" indent="0" marL="0">
-              <a:buNone/>
-            </a:pPr>
-            <a:r>
-              <a:rPr lang="ar-LB" altLang="en-US" sz="1700" dirty="0">
-                <a:solidFill>
-                  <a:srgbClr val="1B262C"/>
-                </a:solidFill>
-              </a:rPr>
-              <a:t>صندوق مكعّب طول حرفه 10 أُس 2 سم. احسب حجمه.</a:t>
-            </a:r>
-            <a:endParaRPr lang="ar-LB" sz="1700" dirty="0"/>
-          </a:p>
-        </p:txBody>
-      </p:sp>
-      <p:sp>
-        <p:nvSpPr>
-          <p:cNvPr id="26" name="Text 24"/>
-          <p:cNvSpPr txBox="1"/>
-          <p:nvPr/>
-        </p:nvSpPr>
-        <p:spPr>
-          <a:xfrm>
-            <a:off x="594360" y="3913632"/>
-            <a:ext cx="2834640" cy="676656"/>
-          </a:xfrm>
-          <a:prstGeom prst="rect">
-            <a:avLst/>
-          </a:prstGeom>
-          <a:noFill/>
-          <a:ln/>
-        </p:spPr>
-        <p:txBody>
-          <a:bodyPr wrap="square" lIns="0" tIns="0" rIns="0" bIns="0" rtlCol="0" anchor="ctr"/>
-          <a:lstStyle/>
-          <a:p>
-            <a:pPr rtl="0" algn="ctr" indent="0" marL="0">
-              <a:buNone/>
-            </a:pPr>
-            <a:r>
-              <a:rPr lang="en-US" sz="1900" b="1" dirty="0">
+              <a:t>2</a:t>
+            </a:r>
+            <a:r>
+              <a:rPr lang="en-US" sz="2100" b="1" dirty="0">
                 <a:solidFill>
                   <a:srgbClr val="0F4C5C"/>
                 </a:solidFill>
@@ -5221,10 +4785,10 @@
                 <a:ea typeface="Arial" pitchFamily="34" charset="-122"/>
                 <a:cs typeface="Arial" pitchFamily="34" charset="-120"/>
               </a:rPr>
-              <a:t>(10</a:t>
-            </a:r>
-            <a:r>
-              <a:rPr lang="en-US" sz="1900" b="1" baseline="30000" dirty="0">
+              <a:t> = 2</a:t>
+            </a:r>
+            <a:r>
+              <a:rPr lang="en-US" sz="2100" b="1" baseline="30000" dirty="0">
                 <a:solidFill>
                   <a:srgbClr val="0F4C5C"/>
                 </a:solidFill>
@@ -5232,31 +4796,9 @@
                 <a:ea typeface="Arial" pitchFamily="34" charset="-122"/>
                 <a:cs typeface="Arial" pitchFamily="34" charset="-120"/>
               </a:rPr>
-              <a:t>2</a:t>
-            </a:r>
-            <a:r>
-              <a:rPr lang="en-US" sz="1900" b="1" dirty="0">
-                <a:solidFill>
-                  <a:srgbClr val="0F4C5C"/>
-                </a:solidFill>
-                <a:latin typeface="Arial" pitchFamily="34" charset="0"/>
-                <a:ea typeface="Arial" pitchFamily="34" charset="-122"/>
-                <a:cs typeface="Arial" pitchFamily="34" charset="-120"/>
-              </a:rPr>
-              <a:t>)</a:t>
-            </a:r>
-            <a:r>
-              <a:rPr lang="en-US" sz="1900" b="1" baseline="30000" dirty="0">
-                <a:solidFill>
-                  <a:srgbClr val="0F4C5C"/>
-                </a:solidFill>
-                <a:latin typeface="Arial" pitchFamily="34" charset="0"/>
-                <a:ea typeface="Arial" pitchFamily="34" charset="-122"/>
-                <a:cs typeface="Arial" pitchFamily="34" charset="-120"/>
-              </a:rPr>
-              <a:t>3</a:t>
-            </a:r>
-            <a:endParaRPr lang="en-US" sz="1900" dirty="0"/>
+              <a:t>?</a:t>
+            </a:r>
+            <a:endParaRPr lang="en-US" sz="2100" dirty="0"/>
           </a:p>
         </p:txBody>
       </p:sp>
@@ -5377,11 +4919,11 @@
         <p:spPr>
           <a:xfrm>
             <a:off x="457200" y="914400"/>
-            <a:ext cx="8229600" cy="676656"/>
+            <a:ext cx="8229600" cy="822960"/>
           </a:xfrm>
           <a:prstGeom prst="roundRect">
             <a:avLst>
-              <a:gd name="adj" fmla="val 13514"/>
+              <a:gd name="adj" fmla="val 11111"/>
             </a:avLst>
           </a:prstGeom>
           <a:solidFill>
@@ -5405,7 +4947,7 @@
         </p:nvSpPr>
         <p:spPr>
           <a:xfrm>
-            <a:off x="8183880" y="1060704"/>
+            <a:off x="8183880" y="1133856"/>
             <a:ext cx="384048" cy="384048"/>
           </a:xfrm>
           <a:prstGeom prst="ellipse">
@@ -5430,7 +4972,7 @@
         </p:nvSpPr>
         <p:spPr>
           <a:xfrm>
-            <a:off x="8183880" y="1060704"/>
+            <a:off x="8183880" y="1133856"/>
             <a:ext cx="384048" cy="384048"/>
           </a:xfrm>
           <a:prstGeom prst="rect">
@@ -5467,7 +5009,7 @@
         <p:spPr>
           <a:xfrm>
             <a:off x="3520440" y="914400"/>
-            <a:ext cx="4572000" cy="676656"/>
+            <a:ext cx="4572000" cy="822960"/>
           </a:xfrm>
           <a:prstGeom prst="rect">
             <a:avLst/>
@@ -5483,14 +5025,14 @@
               <a:buNone/>
             </a:pPr>
             <a:r>
-              <a:rPr lang="ar-LB" altLang="en-US" sz="1700" dirty="0">
+              <a:rPr lang="ar-LB" altLang="en-US" sz="1900" dirty="0">
                 <a:solidFill>
                   <a:srgbClr val="1B262C"/>
                 </a:solidFill>
               </a:rPr>
-              <a:t>(ب): 6 أُس 3 = 6 × 6 × 6 = 216، أما 6 × 3 = 18.</a:t>
-            </a:r>
-            <a:endParaRPr lang="ar-LB" sz="1700" dirty="0"/>
+              <a:t>(ب)، لأن 2 أُس 3 = 2 × 2 × 2 = 8</a:t>
+            </a:r>
+            <a:endParaRPr lang="ar-LB" sz="1900" dirty="0"/>
           </a:p>
         </p:txBody>
       </p:sp>
@@ -5503,7 +5045,7 @@
         <p:spPr>
           <a:xfrm>
             <a:off x="594360" y="914400"/>
-            <a:ext cx="2834640" cy="676656"/>
+            <a:ext cx="2834640" cy="822960"/>
           </a:xfrm>
           <a:prstGeom prst="rect">
             <a:avLst/>
@@ -5519,7 +5061,7 @@
               <a:buNone/>
             </a:pPr>
             <a:r>
-              <a:rPr lang="en-US" sz="1900" b="1" dirty="0">
+              <a:rPr lang="en-US" sz="2100" b="1" dirty="0">
                 <a:solidFill>
                   <a:srgbClr val="1F7A45"/>
                 </a:solidFill>
@@ -5527,10 +5069,10 @@
                 <a:ea typeface="Arial" pitchFamily="34" charset="-122"/>
                 <a:cs typeface="Arial" pitchFamily="34" charset="-120"/>
               </a:rPr>
-              <a:t>6</a:t>
-            </a:r>
-            <a:r>
-              <a:rPr lang="en-US" sz="1900" b="1" baseline="30000" dirty="0">
+              <a:t>2</a:t>
+            </a:r>
+            <a:r>
+              <a:rPr lang="en-US" sz="2100" b="1" baseline="30000" dirty="0">
                 <a:solidFill>
                   <a:srgbClr val="1F7A45"/>
                 </a:solidFill>
@@ -5541,7 +5083,7 @@
               <a:t>3</a:t>
             </a:r>
             <a:r>
-              <a:rPr lang="en-US" sz="1900" b="1" dirty="0">
+              <a:rPr lang="en-US" sz="2100" b="1" dirty="0">
                 <a:solidFill>
                   <a:srgbClr val="1F7A45"/>
                 </a:solidFill>
@@ -5549,9 +5091,9 @@
                 <a:ea typeface="Arial" pitchFamily="34" charset="-122"/>
                 <a:cs typeface="Arial" pitchFamily="34" charset="-120"/>
               </a:rPr>
-              <a:t> = 216</a:t>
-            </a:r>
-            <a:endParaRPr lang="en-US" sz="1900" dirty="0"/>
+              <a:t> = 8</a:t>
+            </a:r>
+            <a:endParaRPr lang="en-US" sz="2100" dirty="0"/>
           </a:p>
         </p:txBody>
       </p:sp>
@@ -5563,12 +5105,12 @@
         </p:nvSpPr>
         <p:spPr>
           <a:xfrm>
-            <a:off x="457200" y="1664208"/>
-            <a:ext cx="8229600" cy="676656"/>
+            <a:off x="457200" y="1847088"/>
+            <a:ext cx="8229600" cy="822960"/>
           </a:xfrm>
           <a:prstGeom prst="roundRect">
             <a:avLst>
-              <a:gd name="adj" fmla="val 13514"/>
+              <a:gd name="adj" fmla="val 11111"/>
             </a:avLst>
           </a:prstGeom>
           <a:solidFill>
@@ -5592,7 +5134,7 @@
         </p:nvSpPr>
         <p:spPr>
           <a:xfrm>
-            <a:off x="8183880" y="1810512"/>
+            <a:off x="8183880" y="2066544"/>
             <a:ext cx="384048" cy="384048"/>
           </a:xfrm>
           <a:prstGeom prst="ellipse">
@@ -5617,7 +5159,7 @@
         </p:nvSpPr>
         <p:spPr>
           <a:xfrm>
-            <a:off x="8183880" y="1810512"/>
+            <a:off x="8183880" y="2066544"/>
             <a:ext cx="384048" cy="384048"/>
           </a:xfrm>
           <a:prstGeom prst="rect">
@@ -5653,8 +5195,8 @@
         </p:nvSpPr>
         <p:spPr>
           <a:xfrm>
-            <a:off x="3520440" y="1664208"/>
-            <a:ext cx="4572000" cy="676656"/>
+            <a:off x="3520440" y="1847088"/>
+            <a:ext cx="4572000" cy="822960"/>
           </a:xfrm>
           <a:prstGeom prst="rect">
             <a:avLst/>
@@ -5670,14 +5212,14 @@
               <a:buNone/>
             </a:pPr>
             <a:r>
-              <a:rPr lang="ar-LB" altLang="en-US" sz="1700" dirty="0">
+              <a:rPr lang="ar-LB" altLang="en-US" sz="1900" dirty="0">
                 <a:solidFill>
                   <a:srgbClr val="1B262C"/>
                 </a:solidFill>
               </a:rPr>
-              <a:t>8 أُس 5، و y أُس 3.</a:t>
-            </a:r>
-            <a:endParaRPr lang="ar-LB" sz="1700" dirty="0"/>
+              <a:t>4 أُس 3</a:t>
+            </a:r>
+            <a:endParaRPr lang="ar-LB" sz="1900" dirty="0"/>
           </a:p>
         </p:txBody>
       </p:sp>
@@ -5689,8 +5231,8 @@
         </p:nvSpPr>
         <p:spPr>
           <a:xfrm>
-            <a:off x="594360" y="1664208"/>
-            <a:ext cx="2834640" cy="676656"/>
+            <a:off x="594360" y="1847088"/>
+            <a:ext cx="2834640" cy="822960"/>
           </a:xfrm>
           <a:prstGeom prst="rect">
             <a:avLst/>
@@ -5706,7 +5248,7 @@
               <a:buNone/>
             </a:pPr>
             <a:r>
-              <a:rPr lang="en-US" sz="1900" b="1" dirty="0">
+              <a:rPr lang="en-US" sz="2100" b="1" dirty="0">
                 <a:solidFill>
                   <a:srgbClr val="1F7A45"/>
                 </a:solidFill>
@@ -5714,10 +5256,10 @@
                 <a:ea typeface="Arial" pitchFamily="34" charset="-122"/>
                 <a:cs typeface="Arial" pitchFamily="34" charset="-120"/>
               </a:rPr>
-              <a:t>8</a:t>
-            </a:r>
-            <a:r>
-              <a:rPr lang="en-US" sz="1900" b="1" baseline="30000" dirty="0">
+              <a:t>4</a:t>
+            </a:r>
+            <a:r>
+              <a:rPr lang="en-US" sz="2100" b="1" baseline="30000" dirty="0">
                 <a:solidFill>
                   <a:srgbClr val="1F7A45"/>
                 </a:solidFill>
@@ -5725,31 +5267,9 @@
                 <a:ea typeface="Arial" pitchFamily="34" charset="-122"/>
                 <a:cs typeface="Arial" pitchFamily="34" charset="-120"/>
               </a:rPr>
-              <a:t>5</a:t>
-            </a:r>
-            <a:r>
-              <a:rPr lang="en-US" sz="1900" b="1" dirty="0">
-                <a:solidFill>
-                  <a:srgbClr val="1F7A45"/>
-                </a:solidFill>
-                <a:latin typeface="Arial" pitchFamily="34" charset="0"/>
-                <a:ea typeface="Arial" pitchFamily="34" charset="-122"/>
-                <a:cs typeface="Arial" pitchFamily="34" charset="-120"/>
-              </a:rPr>
-              <a:t>   y</a:t>
-            </a:r>
-            <a:r>
-              <a:rPr lang="en-US" sz="1900" b="1" baseline="30000" dirty="0">
-                <a:solidFill>
-                  <a:srgbClr val="1F7A45"/>
-                </a:solidFill>
-                <a:latin typeface="Arial" pitchFamily="34" charset="0"/>
-                <a:ea typeface="Arial" pitchFamily="34" charset="-122"/>
-                <a:cs typeface="Arial" pitchFamily="34" charset="-120"/>
-              </a:rPr>
               <a:t>3</a:t>
             </a:r>
-            <a:endParaRPr lang="en-US" sz="1900" dirty="0"/>
+            <a:endParaRPr lang="en-US" sz="2100" dirty="0"/>
           </a:p>
         </p:txBody>
       </p:sp>
@@ -5761,12 +5281,12 @@
         </p:nvSpPr>
         <p:spPr>
           <a:xfrm>
-            <a:off x="457200" y="2414016"/>
-            <a:ext cx="8229600" cy="676656"/>
+            <a:off x="457200" y="2779776"/>
+            <a:ext cx="8229600" cy="822960"/>
           </a:xfrm>
           <a:prstGeom prst="roundRect">
             <a:avLst>
-              <a:gd name="adj" fmla="val 13514"/>
+              <a:gd name="adj" fmla="val 11111"/>
             </a:avLst>
           </a:prstGeom>
           <a:solidFill>
@@ -5790,7 +5310,7 @@
         </p:nvSpPr>
         <p:spPr>
           <a:xfrm>
-            <a:off x="8183880" y="2560320"/>
+            <a:off x="8183880" y="2999232"/>
             <a:ext cx="384048" cy="384048"/>
           </a:xfrm>
           <a:prstGeom prst="ellipse">
@@ -5815,7 +5335,7 @@
         </p:nvSpPr>
         <p:spPr>
           <a:xfrm>
-            <a:off x="8183880" y="2560320"/>
+            <a:off x="8183880" y="2999232"/>
             <a:ext cx="384048" cy="384048"/>
           </a:xfrm>
           <a:prstGeom prst="rect">
@@ -5851,8 +5371,8 @@
         </p:nvSpPr>
         <p:spPr>
           <a:xfrm>
-            <a:off x="3520440" y="2414016"/>
-            <a:ext cx="4572000" cy="676656"/>
+            <a:off x="3520440" y="2779776"/>
+            <a:ext cx="4572000" cy="822960"/>
           </a:xfrm>
           <a:prstGeom prst="rect">
             <a:avLst/>
@@ -5868,14 +5388,14 @@
               <a:buNone/>
             </a:pPr>
             <a:r>
-              <a:rPr lang="ar-LB" altLang="en-US" sz="1700" dirty="0">
+              <a:rPr lang="ar-LB" altLang="en-US" sz="1900" dirty="0">
                 <a:solidFill>
                   <a:srgbClr val="1B262C"/>
                 </a:solidFill>
               </a:rPr>
-              <a:t>5 أُس 12.</a:t>
-            </a:r>
-            <a:endParaRPr lang="ar-LB" sz="1700" dirty="0"/>
+              <a:t>5 أُس 2 = 5 × 5 = 25</a:t>
+            </a:r>
+            <a:endParaRPr lang="ar-LB" sz="1900" dirty="0"/>
           </a:p>
         </p:txBody>
       </p:sp>
@@ -5887,8 +5407,8 @@
         </p:nvSpPr>
         <p:spPr>
           <a:xfrm>
-            <a:off x="594360" y="2414016"/>
-            <a:ext cx="2834640" cy="676656"/>
+            <a:off x="594360" y="2779776"/>
+            <a:ext cx="2834640" cy="822960"/>
           </a:xfrm>
           <a:prstGeom prst="rect">
             <a:avLst/>
@@ -5904,7 +5424,7 @@
               <a:buNone/>
             </a:pPr>
             <a:r>
-              <a:rPr lang="en-US" sz="1900" b="1" dirty="0">
+              <a:rPr lang="en-US" sz="2100" b="1" dirty="0">
                 <a:solidFill>
                   <a:srgbClr val="1F7A45"/>
                 </a:solidFill>
@@ -5915,7 +5435,7 @@
               <a:t>5</a:t>
             </a:r>
             <a:r>
-              <a:rPr lang="en-US" sz="1900" b="1" baseline="30000" dirty="0">
+              <a:rPr lang="en-US" sz="2100" b="1" baseline="30000" dirty="0">
                 <a:solidFill>
                   <a:srgbClr val="1F7A45"/>
                 </a:solidFill>
@@ -5923,9 +5443,20 @@
                 <a:ea typeface="Arial" pitchFamily="34" charset="-122"/>
                 <a:cs typeface="Arial" pitchFamily="34" charset="-120"/>
               </a:rPr>
-              <a:t>12</a:t>
-            </a:r>
-            <a:endParaRPr lang="en-US" sz="1900" dirty="0"/>
+              <a:t>2</a:t>
+            </a:r>
+            <a:r>
+              <a:rPr lang="en-US" sz="2100" b="1" dirty="0">
+                <a:solidFill>
+                  <a:srgbClr val="1F7A45"/>
+                </a:solidFill>
+                <a:latin typeface="Arial" pitchFamily="34" charset="0"/>
+                <a:ea typeface="Arial" pitchFamily="34" charset="-122"/>
+                <a:cs typeface="Arial" pitchFamily="34" charset="-120"/>
+              </a:rPr>
+              <a:t> = 25</a:t>
+            </a:r>
+            <a:endParaRPr lang="en-US" sz="2100" dirty="0"/>
           </a:p>
         </p:txBody>
       </p:sp>
@@ -5937,12 +5468,12 @@
         </p:nvSpPr>
         <p:spPr>
           <a:xfrm>
-            <a:off x="457200" y="3163824"/>
-            <a:ext cx="8229600" cy="676656"/>
+            <a:off x="457200" y="3712464"/>
+            <a:ext cx="8229600" cy="822960"/>
           </a:xfrm>
           <a:prstGeom prst="roundRect">
             <a:avLst>
-              <a:gd name="adj" fmla="val 13514"/>
+              <a:gd name="adj" fmla="val 11111"/>
             </a:avLst>
           </a:prstGeom>
           <a:solidFill>
@@ -5966,7 +5497,7 @@
         </p:nvSpPr>
         <p:spPr>
           <a:xfrm>
-            <a:off x="8183880" y="3310128"/>
+            <a:off x="8183880" y="3931920"/>
             <a:ext cx="384048" cy="384048"/>
           </a:xfrm>
           <a:prstGeom prst="ellipse">
@@ -5991,7 +5522,7 @@
         </p:nvSpPr>
         <p:spPr>
           <a:xfrm>
-            <a:off x="8183880" y="3310128"/>
+            <a:off x="8183880" y="3931920"/>
             <a:ext cx="384048" cy="384048"/>
           </a:xfrm>
           <a:prstGeom prst="rect">
@@ -6027,8 +5558,8 @@
         </p:nvSpPr>
         <p:spPr>
           <a:xfrm>
-            <a:off x="3520440" y="3163824"/>
-            <a:ext cx="4572000" cy="676656"/>
+            <a:off x="3520440" y="3712464"/>
+            <a:ext cx="4572000" cy="822960"/>
           </a:xfrm>
           <a:prstGeom prst="rect">
             <a:avLst/>
@@ -6044,14 +5575,14 @@
               <a:buNone/>
             </a:pPr>
             <a:r>
-              <a:rPr lang="ar-LB" altLang="en-US" sz="1700" dirty="0">
+              <a:rPr lang="ar-LB" altLang="en-US" sz="1900" dirty="0">
                 <a:solidFill>
                   <a:srgbClr val="1B262C"/>
                 </a:solidFill>
               </a:rPr>
-              <a:t>2 أُس 8 = 256.</a:t>
-            </a:r>
-            <a:endParaRPr lang="ar-LB" sz="1700" dirty="0"/>
+              <a:t>2 أُس 4</a:t>
+            </a:r>
+            <a:endParaRPr lang="ar-LB" sz="1900" dirty="0"/>
           </a:p>
         </p:txBody>
       </p:sp>
@@ -6063,8 +5594,8 @@
         </p:nvSpPr>
         <p:spPr>
           <a:xfrm>
-            <a:off x="594360" y="3163824"/>
-            <a:ext cx="2834640" cy="676656"/>
+            <a:off x="594360" y="3712464"/>
+            <a:ext cx="2834640" cy="822960"/>
           </a:xfrm>
           <a:prstGeom prst="rect">
             <a:avLst/>
@@ -6080,7 +5611,7 @@
               <a:buNone/>
             </a:pPr>
             <a:r>
-              <a:rPr lang="en-US" sz="1900" b="1" dirty="0">
+              <a:rPr lang="en-US" sz="2100" b="1" dirty="0">
                 <a:solidFill>
                   <a:srgbClr val="1F7A45"/>
                 </a:solidFill>
@@ -6091,7 +5622,7 @@
               <a:t>2</a:t>
             </a:r>
             <a:r>
-              <a:rPr lang="en-US" sz="1900" b="1" baseline="30000" dirty="0">
+              <a:rPr lang="en-US" sz="2100" b="1" baseline="30000" dirty="0">
                 <a:solidFill>
                   <a:srgbClr val="1F7A45"/>
                 </a:solidFill>
@@ -6099,207 +5630,9 @@
                 <a:ea typeface="Arial" pitchFamily="34" charset="-122"/>
                 <a:cs typeface="Arial" pitchFamily="34" charset="-120"/>
               </a:rPr>
-              <a:t>8</a:t>
-            </a:r>
-            <a:r>
-              <a:rPr lang="en-US" sz="1900" b="1" dirty="0">
-                <a:solidFill>
-                  <a:srgbClr val="1F7A45"/>
-                </a:solidFill>
-                <a:latin typeface="Arial" pitchFamily="34" charset="0"/>
-                <a:ea typeface="Arial" pitchFamily="34" charset="-122"/>
-                <a:cs typeface="Arial" pitchFamily="34" charset="-120"/>
-              </a:rPr>
-              <a:t> = 256</a:t>
-            </a:r>
-            <a:endParaRPr lang="en-US" sz="1900" dirty="0"/>
-          </a:p>
-        </p:txBody>
-      </p:sp>
-      <p:sp>
-        <p:nvSpPr>
-          <p:cNvPr id="23" name="Shape 21"/>
-          <p:cNvSpPr/>
-          <p:nvPr/>
-        </p:nvSpPr>
-        <p:spPr>
-          <a:xfrm>
-            <a:off x="457200" y="3913632"/>
-            <a:ext cx="8229600" cy="676656"/>
-          </a:xfrm>
-          <a:prstGeom prst="roundRect">
-            <a:avLst>
-              <a:gd name="adj" fmla="val 13514"/>
-            </a:avLst>
-          </a:prstGeom>
-          <a:solidFill>
-            <a:srgbClr val="1F7A45">
-              <a:alpha val="8000"/>
-            </a:srgbClr>
-          </a:solidFill>
-          <a:ln w="19050">
-            <a:solidFill>
-              <a:srgbClr val="1F7A45"/>
-            </a:solidFill>
-            <a:prstDash val="solid"/>
-          </a:ln>
-        </p:spPr>
-      </p:sp>
-      <p:sp>
-        <p:nvSpPr>
-          <p:cNvPr id="24" name="Shape 22"/>
-          <p:cNvSpPr/>
-          <p:nvPr/>
-        </p:nvSpPr>
-        <p:spPr>
-          <a:xfrm>
-            <a:off x="8183880" y="4059936"/>
-            <a:ext cx="384048" cy="384048"/>
-          </a:xfrm>
-          <a:prstGeom prst="ellipse">
-            <a:avLst/>
-          </a:prstGeom>
-          <a:solidFill>
-            <a:srgbClr val="1F7A45"/>
-          </a:solidFill>
-          <a:ln w="12700">
-            <a:solidFill>
-              <a:srgbClr val="1F7A45"/>
-            </a:solidFill>
-            <a:prstDash val="solid"/>
-          </a:ln>
-        </p:spPr>
-      </p:sp>
-      <p:sp>
-        <p:nvSpPr>
-          <p:cNvPr id="25" name="Text 23"/>
-          <p:cNvSpPr txBox="1"/>
-          <p:nvPr/>
-        </p:nvSpPr>
-        <p:spPr>
-          <a:xfrm>
-            <a:off x="8183880" y="4059936"/>
-            <a:ext cx="384048" cy="384048"/>
-          </a:xfrm>
-          <a:prstGeom prst="rect">
-            <a:avLst/>
-          </a:prstGeom>
-          <a:noFill/>
-          <a:ln/>
-        </p:spPr>
-        <p:txBody>
-          <a:bodyPr wrap="square" lIns="0" tIns="0" rIns="0" bIns="0" rtlCol="0" anchor="ctr"/>
-          <a:lstStyle/>
-          <a:p>
-            <a:pPr rtl="1" algn="ctr" indent="0" marL="0">
-              <a:buNone/>
-            </a:pPr>
-            <a:r>
-              <a:rPr lang="ar-LB" altLang="en-US" sz="1600" b="1" dirty="0">
-                <a:solidFill>
-                  <a:srgbClr val="FFFFFF"/>
-                </a:solidFill>
-              </a:rPr>
-              <a:t>5</a:t>
-            </a:r>
-            <a:endParaRPr lang="ar-LB" sz="1600" dirty="0"/>
-          </a:p>
-        </p:txBody>
-      </p:sp>
-      <p:sp>
-        <p:nvSpPr>
-          <p:cNvPr id="26" name="Text 24"/>
-          <p:cNvSpPr txBox="1"/>
-          <p:nvPr/>
-        </p:nvSpPr>
-        <p:spPr>
-          <a:xfrm>
-            <a:off x="3520440" y="3913632"/>
-            <a:ext cx="4572000" cy="676656"/>
-          </a:xfrm>
-          <a:prstGeom prst="rect">
-            <a:avLst/>
-          </a:prstGeom>
-          <a:noFill/>
-          <a:ln/>
-        </p:spPr>
-        <p:txBody>
-          <a:bodyPr wrap="square" lIns="0" tIns="0" rIns="0" bIns="0" rtlCol="0" anchor="ctr"/>
-          <a:lstStyle/>
-          <a:p>
-            <a:pPr rtl="1" algn="r" indent="0" marL="0">
-              <a:buNone/>
-            </a:pPr>
-            <a:r>
-              <a:rPr lang="ar-LB" altLang="en-US" sz="1700" dirty="0">
-                <a:solidFill>
-                  <a:srgbClr val="1B262C"/>
-                </a:solidFill>
-              </a:rPr>
-              <a:t>10 أُس 6 = مليون سنتيمتر مكعّب.</a:t>
-            </a:r>
-            <a:endParaRPr lang="ar-LB" sz="1700" dirty="0"/>
-          </a:p>
-        </p:txBody>
-      </p:sp>
-      <p:sp>
-        <p:nvSpPr>
-          <p:cNvPr id="27" name="Text 25"/>
-          <p:cNvSpPr txBox="1"/>
-          <p:nvPr/>
-        </p:nvSpPr>
-        <p:spPr>
-          <a:xfrm>
-            <a:off x="594360" y="3913632"/>
-            <a:ext cx="2834640" cy="676656"/>
-          </a:xfrm>
-          <a:prstGeom prst="rect">
-            <a:avLst/>
-          </a:prstGeom>
-          <a:noFill/>
-          <a:ln/>
-        </p:spPr>
-        <p:txBody>
-          <a:bodyPr wrap="square" lIns="0" tIns="0" rIns="0" bIns="0" rtlCol="0" anchor="ctr"/>
-          <a:lstStyle/>
-          <a:p>
-            <a:pPr rtl="0" algn="ctr" indent="0" marL="0">
-              <a:buNone/>
-            </a:pPr>
-            <a:r>
-              <a:rPr lang="en-US" sz="1900" b="1" dirty="0">
-                <a:solidFill>
-                  <a:srgbClr val="1F7A45"/>
-                </a:solidFill>
-                <a:latin typeface="Arial" pitchFamily="34" charset="0"/>
-                <a:ea typeface="Arial" pitchFamily="34" charset="-122"/>
-                <a:cs typeface="Arial" pitchFamily="34" charset="-120"/>
-              </a:rPr>
-              <a:t>10</a:t>
-            </a:r>
-            <a:r>
-              <a:rPr lang="en-US" sz="1900" b="1" baseline="30000" dirty="0">
-                <a:solidFill>
-                  <a:srgbClr val="1F7A45"/>
-                </a:solidFill>
-                <a:latin typeface="Arial" pitchFamily="34" charset="0"/>
-                <a:ea typeface="Arial" pitchFamily="34" charset="-122"/>
-                <a:cs typeface="Arial" pitchFamily="34" charset="-120"/>
-              </a:rPr>
-              <a:t>6</a:t>
-            </a:r>
-            <a:r>
-              <a:rPr lang="en-US" sz="1900" b="1" dirty="0">
-                <a:solidFill>
-                  <a:srgbClr val="1F7A45"/>
-                </a:solidFill>
-                <a:latin typeface="Arial" pitchFamily="34" charset="0"/>
-                <a:ea typeface="Arial" pitchFamily="34" charset="-122"/>
-                <a:cs typeface="Arial" pitchFamily="34" charset="-120"/>
-              </a:rPr>
-              <a:t> = 1 000 000</a:t>
-            </a:r>
-            <a:endParaRPr lang="en-US" sz="1900" dirty="0"/>
+              <a:t>4</a:t>
+            </a:r>
+            <a:endParaRPr lang="en-US" sz="2100" dirty="0"/>
           </a:p>
         </p:txBody>
       </p:sp>
@@ -6526,14 +5859,14 @@
               <a:buNone/>
             </a:pPr>
             <a:r>
-              <a:rPr lang="ar-LB" altLang="en-US" sz="2000" dirty="0">
+              <a:rPr lang="ar-LB" altLang="en-US" sz="2100" dirty="0">
                 <a:solidFill>
                   <a:srgbClr val="1B262C"/>
                 </a:solidFill>
               </a:rPr>
               <a:t>أفرّق بين القوّة والضرب.</a:t>
             </a:r>
-            <a:endParaRPr lang="ar-LB" sz="2000" dirty="0"/>
+            <a:endParaRPr lang="ar-LB" sz="2100" dirty="0"/>
           </a:p>
         </p:txBody>
       </p:sp>
@@ -6652,14 +5985,14 @@
               <a:buNone/>
             </a:pPr>
             <a:r>
-              <a:rPr lang="ar-LB" altLang="en-US" sz="2000" dirty="0">
+              <a:rPr lang="ar-LB" altLang="en-US" sz="2100" dirty="0">
                 <a:solidFill>
                   <a:srgbClr val="1B262C"/>
                 </a:solidFill>
               </a:rPr>
               <a:t>أقرأ القوّة وأكتبها.</a:t>
             </a:r>
-            <a:endParaRPr lang="ar-LB" sz="2000" dirty="0"/>
+            <a:endParaRPr lang="ar-LB" sz="2100" dirty="0"/>
           </a:p>
         </p:txBody>
       </p:sp>
@@ -6778,14 +6111,14 @@
               <a:buNone/>
             </a:pPr>
             <a:r>
-              <a:rPr lang="ar-LB" altLang="en-US" sz="2000" dirty="0">
+              <a:rPr lang="ar-LB" altLang="en-US" sz="2100" dirty="0">
                 <a:solidFill>
                   <a:srgbClr val="1B262C"/>
                 </a:solidFill>
               </a:rPr>
               <a:t>أحسب قوّة القوّة.</a:t>
             </a:r>
-            <a:endParaRPr lang="ar-LB" sz="2000" dirty="0"/>
+            <a:endParaRPr lang="ar-LB" sz="2100" dirty="0"/>
           </a:p>
         </p:txBody>
       </p:sp>
@@ -6814,14 +6147,14 @@
               <a:buNone/>
             </a:pPr>
             <a:r>
-              <a:rPr lang="ar-LB" altLang="en-US" sz="1800" b="1" dirty="0">
+              <a:rPr lang="ar-LB" altLang="en-US" sz="1900" b="1" dirty="0">
                 <a:solidFill>
                   <a:srgbClr val="0F4C5C"/>
                 </a:solidFill>
               </a:rPr>
-              <a:t>ارفع إبهامك: إلى أعلى (أستطيع أن أشرحه) • أفقيًا (أحتاج تدريبًا) • إلى أسفل (أحتاج مساعدة)</a:t>
-            </a:r>
-            <a:endParaRPr lang="ar-LB" sz="1800" dirty="0"/>
+              <a:t>ارفع إبهامك: إلى أعلى (فهمت) • أفقيًا (أحتاج تدريبًا) • إلى أسفل (أحتاج مساعدة)</a:t>
+            </a:r>
+            <a:endParaRPr lang="ar-LB" sz="1900" dirty="0"/>
           </a:p>
         </p:txBody>
       </p:sp>
@@ -7048,14 +6381,14 @@
               <a:buNone/>
             </a:pPr>
             <a:r>
-              <a:rPr lang="ar-LB" altLang="en-US" sz="1800" dirty="0">
+              <a:rPr lang="ar-LB" altLang="en-US" sz="2000" dirty="0">
                 <a:solidFill>
                   <a:srgbClr val="1B262C"/>
                 </a:solidFill>
               </a:rPr>
-              <a:t>العرض (أ): نجمع العدد 2 عشر مرات.</a:t>
-            </a:r>
-            <a:endParaRPr lang="ar-LB" sz="1800" dirty="0"/>
+              <a:t>العرض (أ): نجمع العدد 2 أربع مرات.</a:t>
+            </a:r>
+            <a:endParaRPr lang="ar-LB" sz="2000" dirty="0"/>
           </a:p>
         </p:txBody>
       </p:sp>
@@ -7084,7 +6417,7 @@
               <a:buNone/>
             </a:pPr>
             <a:r>
-              <a:rPr lang="en-US" sz="2000" b="1" dirty="0">
+              <a:rPr lang="en-US" sz="2200" b="1" dirty="0">
                 <a:solidFill>
                   <a:srgbClr val="0B6E70"/>
                 </a:solidFill>
@@ -7092,9 +6425,9 @@
                 <a:ea typeface="Arial" pitchFamily="34" charset="-122"/>
                 <a:cs typeface="Arial" pitchFamily="34" charset="-120"/>
               </a:rPr>
-              <a:t>2 + 2 + ... + 2</a:t>
-            </a:r>
-            <a:endParaRPr lang="en-US" sz="2000" dirty="0"/>
+              <a:t>2 + 2 + 2 + 2</a:t>
+            </a:r>
+            <a:endParaRPr lang="en-US" sz="2200" dirty="0"/>
           </a:p>
         </p:txBody>
       </p:sp>
@@ -7213,14 +6546,14 @@
               <a:buNone/>
             </a:pPr>
             <a:r>
-              <a:rPr lang="ar-LB" altLang="en-US" sz="1800" dirty="0">
+              <a:rPr lang="ar-LB" altLang="en-US" sz="2000" dirty="0">
                 <a:solidFill>
                   <a:srgbClr val="1B262C"/>
                 </a:solidFill>
               </a:rPr>
-              <a:t>العرض (ب): نضرب العدد 2 في نفسه عشر مرات.</a:t>
-            </a:r>
-            <a:endParaRPr lang="ar-LB" sz="1800" dirty="0"/>
+              <a:t>العرض (ب): نضرب العدد 2 في نفسه أربع مرات.</a:t>
+            </a:r>
+            <a:endParaRPr lang="ar-LB" sz="2000" dirty="0"/>
           </a:p>
         </p:txBody>
       </p:sp>
@@ -7249,7 +6582,7 @@
               <a:buNone/>
             </a:pPr>
             <a:r>
-              <a:rPr lang="en-US" sz="2000" b="1" dirty="0">
+              <a:rPr lang="en-US" sz="2200" b="1" dirty="0">
                 <a:solidFill>
                   <a:srgbClr val="C2500C"/>
                 </a:solidFill>
@@ -7257,9 +6590,9 @@
                 <a:ea typeface="Arial" pitchFamily="34" charset="-122"/>
                 <a:cs typeface="Arial" pitchFamily="34" charset="-120"/>
               </a:rPr>
-              <a:t>2 × 2 × ... × 2</a:t>
-            </a:r>
-            <a:endParaRPr lang="en-US" sz="2000" dirty="0"/>
+              <a:t>2 × 2 × 2 × 2</a:t>
+            </a:r>
+            <a:endParaRPr lang="en-US" sz="2200" dirty="0"/>
           </a:p>
         </p:txBody>
       </p:sp>
@@ -7405,14 +6738,14 @@
               <a:buNone/>
             </a:pPr>
             <a:r>
-              <a:rPr lang="ar-LB" altLang="en-US" sz="1800" dirty="0">
+              <a:rPr lang="ar-LB" altLang="en-US" sz="1900" dirty="0">
                 <a:solidFill>
                   <a:srgbClr val="1B262C"/>
                 </a:solidFill>
               </a:rPr>
               <a:t>الكومة (أ): أضف خرزتين في كل خطوة.</a:t>
             </a:r>
-            <a:endParaRPr lang="ar-LB" sz="1800" dirty="0"/>
+            <a:endParaRPr lang="ar-LB" sz="1900" dirty="0"/>
           </a:p>
           <a:p>
             <a:pPr rtl="1" algn="r" indent="0" marL="0">
@@ -7422,14 +6755,14 @@
               <a:buNone/>
             </a:pPr>
             <a:r>
-              <a:rPr lang="ar-LB" altLang="en-US" sz="1800" dirty="0">
+              <a:rPr lang="ar-LB" altLang="en-US" sz="1900" dirty="0">
                 <a:solidFill>
                   <a:srgbClr val="1B262C"/>
                 </a:solidFill>
               </a:rPr>
-              <a:t>الكومة (ب): ضاعِف عدد الخرز في كل خطوة.</a:t>
-            </a:r>
-            <a:endParaRPr lang="ar-LB" sz="1800" dirty="0"/>
+              <a:t>الكومة (ب): ضاعِف الخرز في كل خطوة.</a:t>
+            </a:r>
+            <a:endParaRPr lang="ar-LB" sz="1900" dirty="0"/>
           </a:p>
           <a:p>
             <a:pPr rtl="1" algn="r" indent="0" marL="0">
@@ -7439,14 +6772,14 @@
               <a:buNone/>
             </a:pPr>
             <a:r>
-              <a:rPr lang="ar-LB" altLang="en-US" sz="1800" dirty="0">
+              <a:rPr lang="ar-LB" altLang="en-US" sz="1900" dirty="0">
                 <a:solidFill>
                   <a:srgbClr val="1B262C"/>
                 </a:solidFill>
               </a:rPr>
-              <a:t>نفّذ 4 خطوات. أيّ الكومتين أكبر؟ وأيّ العرضين تختار؟</a:t>
-            </a:r>
-            <a:endParaRPr lang="ar-LB" sz="1800" dirty="0"/>
+              <a:t>بعد 4 خطوات: أيّ الكومتين أكبر؟</a:t>
+            </a:r>
+            <a:endParaRPr lang="ar-LB" sz="1900" dirty="0"/>
           </a:p>
         </p:txBody>
       </p:sp>
@@ -7567,11 +6900,11 @@
         <p:spPr>
           <a:xfrm>
             <a:off x="457200" y="914400"/>
-            <a:ext cx="8229600" cy="731520"/>
+            <a:ext cx="8229600" cy="777240"/>
           </a:xfrm>
           <a:prstGeom prst="roundRect">
             <a:avLst>
-              <a:gd name="adj" fmla="val 12500"/>
+              <a:gd name="adj" fmla="val 11765"/>
             </a:avLst>
           </a:prstGeom>
           <a:solidFill>
@@ -7595,7 +6928,7 @@
         </p:nvSpPr>
         <p:spPr>
           <a:xfrm>
-            <a:off x="8183880" y="1088136"/>
+            <a:off x="8183880" y="1110996"/>
             <a:ext cx="384048" cy="384048"/>
           </a:xfrm>
           <a:prstGeom prst="ellipse">
@@ -7620,7 +6953,7 @@
         </p:nvSpPr>
         <p:spPr>
           <a:xfrm>
-            <a:off x="8183880" y="1088136"/>
+            <a:off x="8183880" y="1110996"/>
             <a:ext cx="384048" cy="384048"/>
           </a:xfrm>
           <a:prstGeom prst="rect">
@@ -7657,7 +6990,7 @@
         <p:spPr>
           <a:xfrm>
             <a:off x="3520440" y="914400"/>
-            <a:ext cx="4572000" cy="731520"/>
+            <a:ext cx="4572000" cy="777240"/>
           </a:xfrm>
           <a:prstGeom prst="rect">
             <a:avLst/>
@@ -7673,14 +7006,14 @@
               <a:buNone/>
             </a:pPr>
             <a:r>
-              <a:rPr lang="ar-LB" altLang="en-US" sz="1800" dirty="0">
+              <a:rPr lang="ar-LB" altLang="en-US" sz="2000" dirty="0">
                 <a:solidFill>
                   <a:srgbClr val="1B262C"/>
                 </a:solidFill>
               </a:rPr>
-              <a:t>الكومة (أ): 2، 4، 6، 8 … وبعد 10 خطوات:</a:t>
-            </a:r>
-            <a:endParaRPr lang="ar-LB" sz="1800" dirty="0"/>
+              <a:t>الكومة (أ): 2، 4، 6، 8</a:t>
+            </a:r>
+            <a:endParaRPr lang="ar-LB" sz="2000" dirty="0"/>
           </a:p>
         </p:txBody>
       </p:sp>
@@ -7693,7 +7026,7 @@
         <p:spPr>
           <a:xfrm>
             <a:off x="594360" y="914400"/>
-            <a:ext cx="2834640" cy="731520"/>
+            <a:ext cx="2834640" cy="777240"/>
           </a:xfrm>
           <a:prstGeom prst="rect">
             <a:avLst/>
@@ -7709,7 +7042,7 @@
               <a:buNone/>
             </a:pPr>
             <a:r>
-              <a:rPr lang="en-US" sz="2000" b="1" dirty="0">
+              <a:rPr lang="en-US" sz="2200" b="1" dirty="0">
                 <a:solidFill>
                   <a:srgbClr val="0B6E70"/>
                 </a:solidFill>
@@ -7717,9 +7050,9 @@
                 <a:ea typeface="Arial" pitchFamily="34" charset="-122"/>
                 <a:cs typeface="Arial" pitchFamily="34" charset="-120"/>
               </a:rPr>
-              <a:t>10 × 2 = 20</a:t>
-            </a:r>
-            <a:endParaRPr lang="en-US" sz="2000" dirty="0"/>
+              <a:t>2 + 2 + 2 + 2 = 8</a:t>
+            </a:r>
+            <a:endParaRPr lang="en-US" sz="2200" dirty="0"/>
           </a:p>
         </p:txBody>
       </p:sp>
@@ -7731,12 +7064,12 @@
         </p:nvSpPr>
         <p:spPr>
           <a:xfrm>
-            <a:off x="457200" y="1737360"/>
-            <a:ext cx="8229600" cy="731520"/>
+            <a:off x="457200" y="1783080"/>
+            <a:ext cx="8229600" cy="777240"/>
           </a:xfrm>
           <a:prstGeom prst="roundRect">
             <a:avLst>
-              <a:gd name="adj" fmla="val 12500"/>
+              <a:gd name="adj" fmla="val 11765"/>
             </a:avLst>
           </a:prstGeom>
           <a:solidFill>
@@ -7760,7 +7093,7 @@
         </p:nvSpPr>
         <p:spPr>
           <a:xfrm>
-            <a:off x="8183880" y="1911096"/>
+            <a:off x="8183880" y="1979676"/>
             <a:ext cx="384048" cy="384048"/>
           </a:xfrm>
           <a:prstGeom prst="ellipse">
@@ -7785,7 +7118,7 @@
         </p:nvSpPr>
         <p:spPr>
           <a:xfrm>
-            <a:off x="8183880" y="1911096"/>
+            <a:off x="8183880" y="1979676"/>
             <a:ext cx="384048" cy="384048"/>
           </a:xfrm>
           <a:prstGeom prst="rect">
@@ -7821,8 +7154,8 @@
         </p:nvSpPr>
         <p:spPr>
           <a:xfrm>
-            <a:off x="3520440" y="1737360"/>
-            <a:ext cx="4572000" cy="731520"/>
+            <a:off x="3520440" y="1783080"/>
+            <a:ext cx="4572000" cy="777240"/>
           </a:xfrm>
           <a:prstGeom prst="rect">
             <a:avLst/>
@@ -7838,14 +7171,14 @@
               <a:buNone/>
             </a:pPr>
             <a:r>
-              <a:rPr lang="ar-LB" altLang="en-US" sz="1800" dirty="0">
+              <a:rPr lang="ar-LB" altLang="en-US" sz="2000" dirty="0">
                 <a:solidFill>
                   <a:srgbClr val="1B262C"/>
                 </a:solidFill>
               </a:rPr>
-              <a:t>الكومة (ب): 2، 4، 8، 16 … وبعد 10 خطوات:</a:t>
-            </a:r>
-            <a:endParaRPr lang="ar-LB" sz="1800" dirty="0"/>
+              <a:t>الكومة (ب): 2، 4، 8، 16</a:t>
+            </a:r>
+            <a:endParaRPr lang="ar-LB" sz="2000" dirty="0"/>
           </a:p>
         </p:txBody>
       </p:sp>
@@ -7857,8 +7190,8 @@
         </p:nvSpPr>
         <p:spPr>
           <a:xfrm>
-            <a:off x="594360" y="1737360"/>
-            <a:ext cx="2834640" cy="731520"/>
+            <a:off x="594360" y="1783080"/>
+            <a:ext cx="2834640" cy="777240"/>
           </a:xfrm>
           <a:prstGeom prst="rect">
             <a:avLst/>
@@ -7874,7 +7207,7 @@
               <a:buNone/>
             </a:pPr>
             <a:r>
-              <a:rPr lang="en-US" sz="2000" b="1" dirty="0">
+              <a:rPr lang="en-US" sz="2200" b="1" dirty="0">
                 <a:solidFill>
                   <a:srgbClr val="C2500C"/>
                 </a:solidFill>
@@ -7882,9 +7215,9 @@
                 <a:ea typeface="Arial" pitchFamily="34" charset="-122"/>
                 <a:cs typeface="Arial" pitchFamily="34" charset="-120"/>
               </a:rPr>
-              <a:t>1024</a:t>
-            </a:r>
-            <a:endParaRPr lang="en-US" sz="2000" dirty="0"/>
+              <a:t>2 × 2 × 2 × 2 = 16</a:t>
+            </a:r>
+            <a:endParaRPr lang="en-US" sz="2200" dirty="0"/>
           </a:p>
         </p:txBody>
       </p:sp>
@@ -7896,7 +7229,7 @@
         </p:nvSpPr>
         <p:spPr>
           <a:xfrm>
-            <a:off x="457200" y="2697480"/>
+            <a:off x="457200" y="2834640"/>
             <a:ext cx="8229600" cy="548640"/>
           </a:xfrm>
           <a:prstGeom prst="rect">
@@ -7913,50 +7246,14 @@
               <a:buNone/>
             </a:pPr>
             <a:r>
-              <a:rPr lang="ar-LB" altLang="en-US" sz="2200" b="1" dirty="0">
+              <a:rPr lang="ar-LB" altLang="en-US" sz="2400" b="1" dirty="0">
                 <a:solidFill>
                   <a:srgbClr val="0F4C5C"/>
                 </a:solidFill>
               </a:rPr>
-              <a:t>العرض (ب) أكبر بكثير، لأننا نضرب في كل خطوة ولا نجمع.</a:t>
-            </a:r>
-            <a:endParaRPr lang="ar-LB" sz="2200" dirty="0"/>
-          </a:p>
-        </p:txBody>
-      </p:sp>
-      <p:sp>
-        <p:nvSpPr>
-          <p:cNvPr id="14" name="Text 12"/>
-          <p:cNvSpPr txBox="1"/>
-          <p:nvPr/>
-        </p:nvSpPr>
-        <p:spPr>
-          <a:xfrm>
-            <a:off x="457200" y="3383280"/>
-            <a:ext cx="8229600" cy="548640"/>
-          </a:xfrm>
-          <a:prstGeom prst="rect">
-            <a:avLst/>
-          </a:prstGeom>
-          <a:noFill/>
-          <a:ln/>
-        </p:spPr>
-        <p:txBody>
-          <a:bodyPr wrap="square" lIns="0" tIns="0" rIns="0" bIns="0" rtlCol="0" anchor="t"/>
-          <a:lstStyle/>
-          <a:p>
-            <a:pPr rtl="1" algn="ctr" indent="0" marL="0">
-              <a:buNone/>
-            </a:pPr>
-            <a:r>
-              <a:rPr lang="ar-LB" altLang="en-US" sz="2000" dirty="0">
-                <a:solidFill>
-                  <a:srgbClr val="3E4A52"/>
-                </a:solidFill>
-              </a:rPr>
-              <a:t>سؤال: كيف نختصر كتابة الضرب المتكرر 2 × 2 × 2 × … ؟</a:t>
-            </a:r>
-            <a:endParaRPr lang="ar-LB" sz="2000" dirty="0"/>
+              <a:t>العرض (ب) أكبر، لأننا نضرب ولا نجمع.</a:t>
+            </a:r>
+            <a:endParaRPr lang="ar-LB" sz="2400" dirty="0"/>
           </a:p>
         </p:txBody>
       </p:sp>
@@ -8077,11 +7374,11 @@
         <p:spPr>
           <a:xfrm>
             <a:off x="457200" y="914400"/>
-            <a:ext cx="8229600" cy="1600200"/>
+            <a:ext cx="8229600" cy="1554480"/>
           </a:xfrm>
           <a:prstGeom prst="roundRect">
             <a:avLst>
-              <a:gd name="adj" fmla="val 5714"/>
+              <a:gd name="adj" fmla="val 5882"/>
             </a:avLst>
           </a:prstGeom>
           <a:solidFill>
@@ -8191,7 +7488,7 @@
         <p:spPr>
           <a:xfrm>
             <a:off x="640080" y="1444752"/>
-            <a:ext cx="7863840" cy="1033272"/>
+            <a:ext cx="7863840" cy="987552"/>
           </a:xfrm>
           <a:prstGeom prst="rect">
             <a:avLst/>
@@ -8210,14 +7507,14 @@
               <a:buNone/>
             </a:pPr>
             <a:r>
-              <a:rPr lang="ar-LB" altLang="en-US" sz="1700" dirty="0">
+              <a:rPr lang="ar-LB" altLang="en-US" sz="1900" dirty="0">
                 <a:solidFill>
                   <a:srgbClr val="1B262C"/>
                 </a:solidFill>
               </a:rPr>
-              <a:t>اطوِ الورقة نصفين، واضغط على خط الطيّ بإصبعك.</a:t>
-            </a:r>
-            <a:endParaRPr lang="ar-LB" sz="1700" dirty="0"/>
+              <a:t>اطوِ الورقة نصفين، ثم افتحها وعُدّ الأجزاء.</a:t>
+            </a:r>
+            <a:endParaRPr lang="ar-LB" sz="1900" dirty="0"/>
           </a:p>
           <a:p>
             <a:pPr rtl="1" algn="r" indent="0" marL="0">
@@ -8227,31 +7524,14 @@
               <a:buNone/>
             </a:pPr>
             <a:r>
-              <a:rPr lang="ar-LB" altLang="en-US" sz="1700" dirty="0">
+              <a:rPr lang="ar-LB" altLang="en-US" sz="1900" dirty="0">
                 <a:solidFill>
                   <a:srgbClr val="1B262C"/>
                 </a:solidFill>
               </a:rPr>
-              <a:t>افتحها، وتحسّس خطوط الطيّ، وعُدّ الأجزاء.</a:t>
-            </a:r>
-            <a:endParaRPr lang="ar-LB" sz="1700" dirty="0"/>
-          </a:p>
-          <a:p>
-            <a:pPr rtl="1" algn="r" indent="0" marL="0">
-              <a:spcAft>
-                <a:spcPts val="400"/>
-              </a:spcAft>
-              <a:buNone/>
-            </a:pPr>
-            <a:r>
-              <a:rPr lang="ar-LB" altLang="en-US" sz="1700" dirty="0">
-                <a:solidFill>
-                  <a:srgbClr val="1B262C"/>
-                </a:solidFill>
-              </a:rPr>
-              <a:t>أعد الطيّ وزِد طيّة جديدة في كل مرة، ثم عُدّ.</a:t>
-            </a:r>
-            <a:endParaRPr lang="ar-LB" sz="1700" dirty="0"/>
+              <a:t>اطوِها مرة ثانية، ثم مرة ثالثة، وعُدّ في كل مرة.</a:t>
+            </a:r>
+            <a:endParaRPr lang="ar-LB" sz="1900" dirty="0"/>
           </a:p>
         </p:txBody>
       </p:sp>
@@ -8263,8 +7543,8 @@
         </p:nvSpPr>
         <p:spPr>
           <a:xfrm>
-            <a:off x="7086600" y="2651760"/>
-            <a:ext cx="1554480" cy="960120"/>
+            <a:off x="6035040" y="2651760"/>
+            <a:ext cx="2560320" cy="960120"/>
           </a:xfrm>
           <a:prstGeom prst="roundRect">
             <a:avLst>
@@ -8292,8 +7572,8 @@
         </p:nvSpPr>
         <p:spPr>
           <a:xfrm>
-            <a:off x="7086600" y="2697480"/>
-            <a:ext cx="1554480" cy="411480"/>
+            <a:off x="6035040" y="2697480"/>
+            <a:ext cx="2560320" cy="411480"/>
           </a:xfrm>
           <a:prstGeom prst="rect">
             <a:avLst/>
@@ -8309,14 +7589,14 @@
               <a:buNone/>
             </a:pPr>
             <a:r>
-              <a:rPr lang="ar-LB" altLang="en-US" sz="1600" b="1" dirty="0">
+              <a:rPr lang="ar-LB" altLang="en-US" sz="1900" b="1" dirty="0">
                 <a:solidFill>
                   <a:srgbClr val="1B262C"/>
                 </a:solidFill>
               </a:rPr>
               <a:t>طيّة واحدة</a:t>
             </a:r>
-            <a:endParaRPr lang="ar-LB" sz="1600" dirty="0"/>
+            <a:endParaRPr lang="ar-LB" sz="1900" dirty="0"/>
           </a:p>
         </p:txBody>
       </p:sp>
@@ -8328,8 +7608,8 @@
         </p:nvSpPr>
         <p:spPr>
           <a:xfrm>
-            <a:off x="7086600" y="3127248"/>
-            <a:ext cx="1554480" cy="411480"/>
+            <a:off x="6035040" y="3127248"/>
+            <a:ext cx="2560320" cy="411480"/>
           </a:xfrm>
           <a:prstGeom prst="rect">
             <a:avLst/>
@@ -8345,14 +7625,14 @@
               <a:buNone/>
             </a:pPr>
             <a:r>
-              <a:rPr lang="ar-LB" altLang="en-US" sz="1600" dirty="0">
+              <a:rPr lang="ar-LB" altLang="en-US" sz="1900" dirty="0">
                 <a:solidFill>
                   <a:srgbClr val="1B262C"/>
                 </a:solidFill>
               </a:rPr>
-              <a:t>2 جزءان</a:t>
-            </a:r>
-            <a:endParaRPr lang="ar-LB" sz="1600" dirty="0"/>
+              <a:t>جزءان</a:t>
+            </a:r>
+            <a:endParaRPr lang="ar-LB" sz="1900" dirty="0"/>
           </a:p>
         </p:txBody>
       </p:sp>
@@ -8364,8 +7644,8 @@
         </p:nvSpPr>
         <p:spPr>
           <a:xfrm>
-            <a:off x="5440680" y="2651760"/>
-            <a:ext cx="1554480" cy="960120"/>
+            <a:off x="3337560" y="2651760"/>
+            <a:ext cx="2560320" cy="960120"/>
           </a:xfrm>
           <a:prstGeom prst="roundRect">
             <a:avLst>
@@ -8393,8 +7673,8 @@
         </p:nvSpPr>
         <p:spPr>
           <a:xfrm>
-            <a:off x="5440680" y="2697480"/>
-            <a:ext cx="1554480" cy="411480"/>
+            <a:off x="3337560" y="2697480"/>
+            <a:ext cx="2560320" cy="411480"/>
           </a:xfrm>
           <a:prstGeom prst="rect">
             <a:avLst/>
@@ -8410,14 +7690,14 @@
               <a:buNone/>
             </a:pPr>
             <a:r>
-              <a:rPr lang="ar-LB" altLang="en-US" sz="1600" b="1" dirty="0">
+              <a:rPr lang="ar-LB" altLang="en-US" sz="1900" b="1" dirty="0">
                 <a:solidFill>
                   <a:srgbClr val="1B262C"/>
                 </a:solidFill>
               </a:rPr>
               <a:t>طيّتان</a:t>
             </a:r>
-            <a:endParaRPr lang="ar-LB" sz="1600" dirty="0"/>
+            <a:endParaRPr lang="ar-LB" sz="1900" dirty="0"/>
           </a:p>
         </p:txBody>
       </p:sp>
@@ -8429,8 +7709,8 @@
         </p:nvSpPr>
         <p:spPr>
           <a:xfrm>
-            <a:off x="5440680" y="3127248"/>
-            <a:ext cx="1554480" cy="411480"/>
+            <a:off x="3337560" y="3127248"/>
+            <a:ext cx="2560320" cy="411480"/>
           </a:xfrm>
           <a:prstGeom prst="rect">
             <a:avLst/>
@@ -8446,14 +7726,14 @@
               <a:buNone/>
             </a:pPr>
             <a:r>
-              <a:rPr lang="ar-LB" altLang="en-US" sz="1600" dirty="0">
+              <a:rPr lang="ar-LB" altLang="en-US" sz="1900" dirty="0">
                 <a:solidFill>
                   <a:srgbClr val="C2500C"/>
                 </a:solidFill>
               </a:rPr>
               <a:t>؟ أجزاء</a:t>
             </a:r>
-            <a:endParaRPr lang="ar-LB" sz="1600" dirty="0"/>
+            <a:endParaRPr lang="ar-LB" sz="1900" dirty="0"/>
           </a:p>
         </p:txBody>
       </p:sp>
@@ -8465,8 +7745,8 @@
         </p:nvSpPr>
         <p:spPr>
           <a:xfrm>
-            <a:off x="3794760" y="2651760"/>
-            <a:ext cx="1554480" cy="960120"/>
+            <a:off x="640080" y="2651760"/>
+            <a:ext cx="2560320" cy="960120"/>
           </a:xfrm>
           <a:prstGeom prst="roundRect">
             <a:avLst>
@@ -8494,8 +7774,8 @@
         </p:nvSpPr>
         <p:spPr>
           <a:xfrm>
-            <a:off x="3794760" y="2697480"/>
-            <a:ext cx="1554480" cy="411480"/>
+            <a:off x="640080" y="2697480"/>
+            <a:ext cx="2560320" cy="411480"/>
           </a:xfrm>
           <a:prstGeom prst="rect">
             <a:avLst/>
@@ -8511,14 +7791,14 @@
               <a:buNone/>
             </a:pPr>
             <a:r>
-              <a:rPr lang="ar-LB" altLang="en-US" sz="1600" b="1" dirty="0">
+              <a:rPr lang="ar-LB" altLang="en-US" sz="1900" b="1" dirty="0">
                 <a:solidFill>
                   <a:srgbClr val="1B262C"/>
                 </a:solidFill>
               </a:rPr>
               <a:t>3 طيّات</a:t>
             </a:r>
-            <a:endParaRPr lang="ar-LB" sz="1600" dirty="0"/>
+            <a:endParaRPr lang="ar-LB" sz="1900" dirty="0"/>
           </a:p>
         </p:txBody>
       </p:sp>
@@ -8530,8 +7810,8 @@
         </p:nvSpPr>
         <p:spPr>
           <a:xfrm>
-            <a:off x="3794760" y="3127248"/>
-            <a:ext cx="1554480" cy="411480"/>
+            <a:off x="640080" y="3127248"/>
+            <a:ext cx="2560320" cy="411480"/>
           </a:xfrm>
           <a:prstGeom prst="rect">
             <a:avLst/>
@@ -8547,56 +7827,27 @@
               <a:buNone/>
             </a:pPr>
             <a:r>
-              <a:rPr lang="ar-LB" altLang="en-US" sz="1600" dirty="0">
+              <a:rPr lang="ar-LB" altLang="en-US" sz="1900" dirty="0">
                 <a:solidFill>
                   <a:srgbClr val="C2500C"/>
                 </a:solidFill>
               </a:rPr>
               <a:t>؟ أجزاء</a:t>
             </a:r>
-            <a:endParaRPr lang="ar-LB" sz="1600" dirty="0"/>
-          </a:p>
-        </p:txBody>
-      </p:sp>
-      <p:sp>
-        <p:nvSpPr>
-          <p:cNvPr id="17" name="Shape 14"/>
-          <p:cNvSpPr/>
-          <p:nvPr/>
-        </p:nvSpPr>
-        <p:spPr>
-          <a:xfrm>
-            <a:off x="2148840" y="2651760"/>
-            <a:ext cx="1554480" cy="960120"/>
-          </a:xfrm>
-          <a:prstGeom prst="roundRect">
-            <a:avLst>
-              <a:gd name="adj" fmla="val 9524"/>
-            </a:avLst>
-          </a:prstGeom>
-          <a:solidFill>
-            <a:srgbClr val="0B6E70">
-              <a:alpha val="8000"/>
-            </a:srgbClr>
-          </a:solidFill>
-          <a:ln w="19050">
-            <a:solidFill>
-              <a:srgbClr val="0B6E70"/>
-            </a:solidFill>
-            <a:prstDash val="solid"/>
-          </a:ln>
-        </p:spPr>
-      </p:sp>
-      <p:sp>
-        <p:nvSpPr>
-          <p:cNvPr id="18" name="Text 15"/>
-          <p:cNvSpPr txBox="1"/>
-          <p:nvPr/>
-        </p:nvSpPr>
-        <p:spPr>
-          <a:xfrm>
-            <a:off x="2148840" y="2697480"/>
-            <a:ext cx="1554480" cy="411480"/>
+            <a:endParaRPr lang="ar-LB" sz="1900" dirty="0"/>
+          </a:p>
+        </p:txBody>
+      </p:sp>
+      <p:sp>
+        <p:nvSpPr>
+          <p:cNvPr id="17" name="Text 14"/>
+          <p:cNvSpPr txBox="1"/>
+          <p:nvPr/>
+        </p:nvSpPr>
+        <p:spPr>
+          <a:xfrm>
+            <a:off x="457200" y="3840480"/>
+            <a:ext cx="8229600" cy="548640"/>
           </a:xfrm>
           <a:prstGeom prst="rect">
             <a:avLst/>
@@ -8612,207 +7863,14 @@
               <a:buNone/>
             </a:pPr>
             <a:r>
-              <a:rPr lang="ar-LB" altLang="en-US" sz="1600" b="1" dirty="0">
-                <a:solidFill>
-                  <a:srgbClr val="1B262C"/>
-                </a:solidFill>
-              </a:rPr>
-              <a:t>4 طيّات</a:t>
-            </a:r>
-            <a:endParaRPr lang="ar-LB" sz="1600" dirty="0"/>
-          </a:p>
-        </p:txBody>
-      </p:sp>
-      <p:sp>
-        <p:nvSpPr>
-          <p:cNvPr id="19" name="Text 16"/>
-          <p:cNvSpPr txBox="1"/>
-          <p:nvPr/>
-        </p:nvSpPr>
-        <p:spPr>
-          <a:xfrm>
-            <a:off x="2148840" y="3127248"/>
-            <a:ext cx="1554480" cy="411480"/>
-          </a:xfrm>
-          <a:prstGeom prst="rect">
-            <a:avLst/>
-          </a:prstGeom>
-          <a:noFill/>
-          <a:ln/>
-        </p:spPr>
-        <p:txBody>
-          <a:bodyPr wrap="square" lIns="0" tIns="0" rIns="0" bIns="0" rtlCol="0" anchor="t"/>
-          <a:lstStyle/>
-          <a:p>
-            <a:pPr rtl="1" algn="ctr" indent="0" marL="0">
-              <a:buNone/>
-            </a:pPr>
-            <a:r>
-              <a:rPr lang="ar-LB" altLang="en-US" sz="1600" dirty="0">
-                <a:solidFill>
-                  <a:srgbClr val="C2500C"/>
-                </a:solidFill>
-              </a:rPr>
-              <a:t>؟ أجزاء</a:t>
-            </a:r>
-            <a:endParaRPr lang="ar-LB" sz="1600" dirty="0"/>
-          </a:p>
-        </p:txBody>
-      </p:sp>
-      <p:sp>
-        <p:nvSpPr>
-          <p:cNvPr id="20" name="Shape 17"/>
-          <p:cNvSpPr/>
-          <p:nvPr/>
-        </p:nvSpPr>
-        <p:spPr>
-          <a:xfrm>
-            <a:off x="502920" y="2651760"/>
-            <a:ext cx="1554480" cy="960120"/>
-          </a:xfrm>
-          <a:prstGeom prst="roundRect">
-            <a:avLst>
-              <a:gd name="adj" fmla="val 9524"/>
-            </a:avLst>
-          </a:prstGeom>
-          <a:solidFill>
-            <a:srgbClr val="0B6E70">
-              <a:alpha val="8000"/>
-            </a:srgbClr>
-          </a:solidFill>
-          <a:ln w="19050">
-            <a:solidFill>
-              <a:srgbClr val="0B6E70"/>
-            </a:solidFill>
-            <a:prstDash val="solid"/>
-          </a:ln>
-        </p:spPr>
-      </p:sp>
-      <p:sp>
-        <p:nvSpPr>
-          <p:cNvPr id="21" name="Text 18"/>
-          <p:cNvSpPr txBox="1"/>
-          <p:nvPr/>
-        </p:nvSpPr>
-        <p:spPr>
-          <a:xfrm>
-            <a:off x="502920" y="2697480"/>
-            <a:ext cx="1554480" cy="411480"/>
-          </a:xfrm>
-          <a:prstGeom prst="rect">
-            <a:avLst/>
-          </a:prstGeom>
-          <a:noFill/>
-          <a:ln/>
-        </p:spPr>
-        <p:txBody>
-          <a:bodyPr wrap="square" lIns="0" tIns="0" rIns="0" bIns="0" rtlCol="0" anchor="t"/>
-          <a:lstStyle/>
-          <a:p>
-            <a:pPr rtl="1" algn="ctr" indent="0" marL="0">
-              <a:buNone/>
-            </a:pPr>
-            <a:r>
-              <a:rPr lang="ar-LB" altLang="en-US" sz="1600" b="1" dirty="0">
-                <a:solidFill>
-                  <a:srgbClr val="1B262C"/>
-                </a:solidFill>
-              </a:rPr>
-              <a:t>5 طيّات</a:t>
-            </a:r>
-            <a:endParaRPr lang="ar-LB" sz="1600" dirty="0"/>
-          </a:p>
-        </p:txBody>
-      </p:sp>
-      <p:sp>
-        <p:nvSpPr>
-          <p:cNvPr id="22" name="Text 19"/>
-          <p:cNvSpPr txBox="1"/>
-          <p:nvPr/>
-        </p:nvSpPr>
-        <p:spPr>
-          <a:xfrm>
-            <a:off x="502920" y="3127248"/>
-            <a:ext cx="1554480" cy="411480"/>
-          </a:xfrm>
-          <a:prstGeom prst="rect">
-            <a:avLst/>
-          </a:prstGeom>
-          <a:noFill/>
-          <a:ln/>
-        </p:spPr>
-        <p:txBody>
-          <a:bodyPr wrap="square" lIns="0" tIns="0" rIns="0" bIns="0" rtlCol="0" anchor="t"/>
-          <a:lstStyle/>
-          <a:p>
-            <a:pPr rtl="1" algn="ctr" indent="0" marL="0">
-              <a:buNone/>
-            </a:pPr>
-            <a:r>
-              <a:rPr lang="ar-LB" altLang="en-US" sz="1600" dirty="0">
-                <a:solidFill>
-                  <a:srgbClr val="C2500C"/>
-                </a:solidFill>
-              </a:rPr>
-              <a:t>؟ أجزاء</a:t>
-            </a:r>
-            <a:endParaRPr lang="ar-LB" sz="1600" dirty="0"/>
-          </a:p>
-        </p:txBody>
-      </p:sp>
-      <p:sp>
-        <p:nvSpPr>
-          <p:cNvPr id="23" name="Text 20"/>
-          <p:cNvSpPr txBox="1"/>
-          <p:nvPr/>
-        </p:nvSpPr>
-        <p:spPr>
-          <a:xfrm>
-            <a:off x="457200" y="3749040"/>
-            <a:ext cx="8229600" cy="914400"/>
-          </a:xfrm>
-          <a:prstGeom prst="rect">
-            <a:avLst/>
-          </a:prstGeom>
-          <a:noFill/>
-          <a:ln/>
-        </p:spPr>
-        <p:txBody>
-          <a:bodyPr wrap="square" lIns="0" tIns="0" rIns="0" bIns="0" rtlCol="0" anchor="t"/>
-          <a:lstStyle/>
-          <a:p>
-            <a:pPr rtl="1" algn="r" indent="0" marL="0">
-              <a:spcAft>
-                <a:spcPts val="400"/>
-              </a:spcAft>
-              <a:buNone/>
-            </a:pPr>
-            <a:r>
-              <a:rPr lang="ar-LB" altLang="en-US" sz="1800" b="1" dirty="0">
+              <a:rPr lang="ar-LB" altLang="en-US" sz="2100" b="1" dirty="0">
                 <a:solidFill>
                   <a:srgbClr val="0F4C5C"/>
                 </a:solidFill>
               </a:rPr>
-              <a:t>بعد 5 طيّات: هل عدد الأجزاء 2 × 5 = 10؟ لماذا؟</a:t>
-            </a:r>
-            <a:endParaRPr lang="ar-LB" sz="1800" dirty="0"/>
-          </a:p>
-          <a:p>
-            <a:pPr rtl="1" algn="r" indent="0" marL="0">
-              <a:spcAft>
-                <a:spcPts val="400"/>
-              </a:spcAft>
-              <a:buNone/>
-            </a:pPr>
-            <a:r>
-              <a:rPr lang="ar-LB" altLang="en-US" sz="1800" b="1" dirty="0">
-                <a:solidFill>
-                  <a:srgbClr val="0F4C5C"/>
-                </a:solidFill>
-              </a:rPr>
-              <a:t>كيف نكتب 2 × 2 × 2 × 2 × 2 باختصار؟</a:t>
-            </a:r>
-            <a:endParaRPr lang="ar-LB" sz="1800" dirty="0"/>
+              <a:t>بعد 3 طيّات: هل عدد الأجزاء 2 × 3 = 6؟</a:t>
+            </a:r>
+            <a:endParaRPr lang="ar-LB" sz="2100" dirty="0"/>
           </a:p>
         </p:txBody>
       </p:sp>
@@ -8933,11 +7991,11 @@
         <p:spPr>
           <a:xfrm>
             <a:off x="457200" y="914400"/>
-            <a:ext cx="8229600" cy="1234440"/>
+            <a:ext cx="8229600" cy="1188720"/>
           </a:xfrm>
           <a:prstGeom prst="roundRect">
             <a:avLst>
-              <a:gd name="adj" fmla="val 7407"/>
+              <a:gd name="adj" fmla="val 7692"/>
             </a:avLst>
           </a:prstGeom>
           <a:solidFill>
@@ -9032,7 +8090,7 @@
                   <a:srgbClr val="1F7A45"/>
                 </a:solidFill>
               </a:rPr>
-              <a:t>باللمس: خيط عليه 5 خرزات، وكل خرزة تعني «ضرب 2»</a:t>
+              <a:t>باللمس: خيط عليه 3 خرزات، كل خرزة تعني «ضرب 2»</a:t>
             </a:r>
             <a:endParaRPr lang="ar-LB" sz="1900" dirty="0"/>
           </a:p>
@@ -9047,7 +8105,7 @@
         <p:spPr>
           <a:xfrm>
             <a:off x="640080" y="1444752"/>
-            <a:ext cx="7863840" cy="667512"/>
+            <a:ext cx="7863840" cy="621792"/>
           </a:xfrm>
           <a:prstGeom prst="rect">
             <a:avLst/>
@@ -9066,14 +8124,14 @@
               <a:buNone/>
             </a:pPr>
             <a:r>
-              <a:rPr lang="ar-LB" altLang="en-US" sz="1800" dirty="0">
+              <a:rPr lang="ar-LB" altLang="en-US" sz="1900" dirty="0">
                 <a:solidFill>
                   <a:srgbClr val="1B262C"/>
                 </a:solidFill>
               </a:rPr>
-              <a:t>عُدّ الخرزات: كم مرة ضربنا العدد 2؟</a:t>
-            </a:r>
-            <a:endParaRPr lang="ar-LB" sz="1800" dirty="0"/>
+              <a:t>كم مرة ضربنا العدد 2؟</a:t>
+            </a:r>
+            <a:endParaRPr lang="ar-LB" sz="1900" dirty="0"/>
           </a:p>
         </p:txBody>
       </p:sp>
@@ -9085,12 +8143,12 @@
         </p:nvSpPr>
         <p:spPr>
           <a:xfrm>
-            <a:off x="457200" y="2286000"/>
-            <a:ext cx="8229600" cy="685800"/>
+            <a:off x="457200" y="2240280"/>
+            <a:ext cx="8229600" cy="731520"/>
           </a:xfrm>
           <a:prstGeom prst="roundRect">
             <a:avLst>
-              <a:gd name="adj" fmla="val 13333"/>
+              <a:gd name="adj" fmla="val 12500"/>
             </a:avLst>
           </a:prstGeom>
           <a:solidFill>
@@ -9114,7 +8172,7 @@
         </p:nvSpPr>
         <p:spPr>
           <a:xfrm>
-            <a:off x="8183880" y="2436876"/>
+            <a:off x="8183880" y="2414016"/>
             <a:ext cx="384048" cy="384048"/>
           </a:xfrm>
           <a:prstGeom prst="ellipse">
@@ -9139,7 +8197,7 @@
         </p:nvSpPr>
         <p:spPr>
           <a:xfrm>
-            <a:off x="8183880" y="2436876"/>
+            <a:off x="8183880" y="2414016"/>
             <a:ext cx="384048" cy="384048"/>
           </a:xfrm>
           <a:prstGeom prst="rect">
@@ -9175,8 +8233,8 @@
         </p:nvSpPr>
         <p:spPr>
           <a:xfrm>
-            <a:off x="3520440" y="2286000"/>
-            <a:ext cx="4572000" cy="685800"/>
+            <a:off x="3520440" y="2240280"/>
+            <a:ext cx="4572000" cy="731520"/>
           </a:xfrm>
           <a:prstGeom prst="rect">
             <a:avLst/>
@@ -9192,14 +8250,14 @@
               <a:buNone/>
             </a:pPr>
             <a:r>
-              <a:rPr lang="ar-LB" altLang="en-US" sz="1700" dirty="0">
+              <a:rPr lang="ar-LB" altLang="en-US" sz="1900" dirty="0">
                 <a:solidFill>
                   <a:srgbClr val="1B262C"/>
                 </a:solidFill>
               </a:rPr>
-              <a:t>ما قيمة: 2 ضرب 2 ضرب 2 ضرب 2 ضرب 2؟</a:t>
-            </a:r>
-            <a:endParaRPr lang="ar-LB" sz="1700" dirty="0"/>
+              <a:t>احسب: 2 ضرب 2 ضرب 2</a:t>
+            </a:r>
+            <a:endParaRPr lang="ar-LB" sz="1900" dirty="0"/>
           </a:p>
         </p:txBody>
       </p:sp>
@@ -9211,8 +8269,8 @@
         </p:nvSpPr>
         <p:spPr>
           <a:xfrm>
-            <a:off x="594360" y="2286000"/>
-            <a:ext cx="2834640" cy="685800"/>
+            <a:off x="594360" y="2240280"/>
+            <a:ext cx="2834640" cy="731520"/>
           </a:xfrm>
           <a:prstGeom prst="rect">
             <a:avLst/>
@@ -9228,7 +8286,7 @@
               <a:buNone/>
             </a:pPr>
             <a:r>
-              <a:rPr lang="en-US" sz="1900" b="1" dirty="0">
+              <a:rPr lang="en-US" sz="2100" b="1" dirty="0">
                 <a:solidFill>
                   <a:srgbClr val="0B6E70"/>
                 </a:solidFill>
@@ -9236,9 +8294,9 @@
                 <a:ea typeface="Arial" pitchFamily="34" charset="-122"/>
                 <a:cs typeface="Arial" pitchFamily="34" charset="-120"/>
               </a:rPr>
-              <a:t>2 × 2 × 2 × 2 × 2</a:t>
-            </a:r>
-            <a:endParaRPr lang="en-US" sz="1900" dirty="0"/>
+              <a:t>2 × 2 × 2</a:t>
+            </a:r>
+            <a:endParaRPr lang="en-US" sz="2100" dirty="0"/>
           </a:p>
         </p:txBody>
       </p:sp>
@@ -9251,11 +8309,11 @@
         <p:spPr>
           <a:xfrm>
             <a:off x="457200" y="3063240"/>
-            <a:ext cx="8229600" cy="685800"/>
+            <a:ext cx="8229600" cy="731520"/>
           </a:xfrm>
           <a:prstGeom prst="roundRect">
             <a:avLst>
-              <a:gd name="adj" fmla="val 13333"/>
+              <a:gd name="adj" fmla="val 12500"/>
             </a:avLst>
           </a:prstGeom>
           <a:solidFill>
@@ -9279,7 +8337,7 @@
         </p:nvSpPr>
         <p:spPr>
           <a:xfrm>
-            <a:off x="8183880" y="3214116"/>
+            <a:off x="8183880" y="3236976"/>
             <a:ext cx="384048" cy="384048"/>
           </a:xfrm>
           <a:prstGeom prst="ellipse">
@@ -9304,7 +8362,7 @@
         </p:nvSpPr>
         <p:spPr>
           <a:xfrm>
-            <a:off x="8183880" y="3214116"/>
+            <a:off x="8183880" y="3236976"/>
             <a:ext cx="384048" cy="384048"/>
           </a:xfrm>
           <a:prstGeom prst="rect">
@@ -9341,7 +8399,7 @@
         <p:spPr>
           <a:xfrm>
             <a:off x="3520440" y="3063240"/>
-            <a:ext cx="4572000" cy="685800"/>
+            <a:ext cx="4572000" cy="731520"/>
           </a:xfrm>
           <a:prstGeom prst="rect">
             <a:avLst/>
@@ -9357,14 +8415,14 @@
               <a:buNone/>
             </a:pPr>
             <a:r>
-              <a:rPr lang="ar-LB" altLang="en-US" sz="1700" dirty="0">
+              <a:rPr lang="ar-LB" altLang="en-US" sz="1900" dirty="0">
                 <a:solidFill>
                   <a:srgbClr val="1B262C"/>
                 </a:solidFill>
               </a:rPr>
-              <a:t>خيط عليه 4 خرزات، كل خرزة «ضرب 3». ما القيمة؟</a:t>
-            </a:r>
-            <a:endParaRPr lang="ar-LB" sz="1700" dirty="0"/>
+              <a:t>نكتبها باختصار: 2 أُس 3. ما قيمتها؟</a:t>
+            </a:r>
+            <a:endParaRPr lang="ar-LB" sz="1900" dirty="0"/>
           </a:p>
         </p:txBody>
       </p:sp>
@@ -9377,7 +8435,7 @@
         <p:spPr>
           <a:xfrm>
             <a:off x="594360" y="3063240"/>
-            <a:ext cx="2834640" cy="685800"/>
+            <a:ext cx="2834640" cy="731520"/>
           </a:xfrm>
           <a:prstGeom prst="rect">
             <a:avLst/>
@@ -9393,7 +8451,7 @@
               <a:buNone/>
             </a:pPr>
             <a:r>
-              <a:rPr lang="en-US" sz="1900" b="1" dirty="0">
+              <a:rPr lang="en-US" sz="2100" b="1" dirty="0">
                 <a:solidFill>
                   <a:srgbClr val="0B6E70"/>
                 </a:solidFill>
@@ -9401,9 +8459,31 @@
                 <a:ea typeface="Arial" pitchFamily="34" charset="-122"/>
                 <a:cs typeface="Arial" pitchFamily="34" charset="-120"/>
               </a:rPr>
-              <a:t>3 × 3 × 3 × 3</a:t>
-            </a:r>
-            <a:endParaRPr lang="en-US" sz="1900" dirty="0"/>
+              <a:t>2</a:t>
+            </a:r>
+            <a:r>
+              <a:rPr lang="en-US" sz="2100" b="1" baseline="30000" dirty="0">
+                <a:solidFill>
+                  <a:srgbClr val="0B6E70"/>
+                </a:solidFill>
+                <a:latin typeface="Arial" pitchFamily="34" charset="0"/>
+                <a:ea typeface="Arial" pitchFamily="34" charset="-122"/>
+                <a:cs typeface="Arial" pitchFamily="34" charset="-120"/>
+              </a:rPr>
+              <a:t>3</a:t>
+            </a:r>
+            <a:r>
+              <a:rPr lang="en-US" sz="2100" b="1" dirty="0">
+                <a:solidFill>
+                  <a:srgbClr val="0B6E70"/>
+                </a:solidFill>
+                <a:latin typeface="Arial" pitchFamily="34" charset="0"/>
+                <a:ea typeface="Arial" pitchFamily="34" charset="-122"/>
+                <a:cs typeface="Arial" pitchFamily="34" charset="-120"/>
+              </a:rPr>
+              <a:t> = ?</a:t>
+            </a:r>
+            <a:endParaRPr lang="en-US" sz="2100" dirty="0"/>
           </a:p>
         </p:txBody>
       </p:sp>
@@ -9415,12 +8495,12 @@
         </p:nvSpPr>
         <p:spPr>
           <a:xfrm>
-            <a:off x="457200" y="3840480"/>
-            <a:ext cx="8229600" cy="685800"/>
+            <a:off x="457200" y="3886200"/>
+            <a:ext cx="8229600" cy="731520"/>
           </a:xfrm>
           <a:prstGeom prst="roundRect">
             <a:avLst>
-              <a:gd name="adj" fmla="val 13333"/>
+              <a:gd name="adj" fmla="val 12500"/>
             </a:avLst>
           </a:prstGeom>
           <a:solidFill>
@@ -9444,7 +8524,7 @@
         </p:nvSpPr>
         <p:spPr>
           <a:xfrm>
-            <a:off x="8183880" y="3991356"/>
+            <a:off x="8183880" y="4059936"/>
             <a:ext cx="384048" cy="384048"/>
           </a:xfrm>
           <a:prstGeom prst="ellipse">
@@ -9469,7 +8549,7 @@
         </p:nvSpPr>
         <p:spPr>
           <a:xfrm>
-            <a:off x="8183880" y="3991356"/>
+            <a:off x="8183880" y="4059936"/>
             <a:ext cx="384048" cy="384048"/>
           </a:xfrm>
           <a:prstGeom prst="rect">
@@ -9505,8 +8585,8 @@
         </p:nvSpPr>
         <p:spPr>
           <a:xfrm>
-            <a:off x="3520440" y="3840480"/>
-            <a:ext cx="4572000" cy="685800"/>
+            <a:off x="3520440" y="3886200"/>
+            <a:ext cx="4572000" cy="731520"/>
           </a:xfrm>
           <a:prstGeom prst="rect">
             <a:avLst/>
@@ -9522,14 +8602,14 @@
               <a:buNone/>
             </a:pPr>
             <a:r>
-              <a:rPr lang="ar-LB" altLang="en-US" sz="1700" dirty="0">
+              <a:rPr lang="ar-LB" altLang="en-US" sz="1900" dirty="0">
                 <a:solidFill>
                   <a:srgbClr val="1B262C"/>
                 </a:solidFill>
               </a:rPr>
-              <a:t>4 أكواب في كل كوب 3 حبات. كم حبة؟ قارن بالسؤال 2.</a:t>
-            </a:r>
-            <a:endParaRPr lang="ar-LB" sz="1700" dirty="0"/>
+              <a:t>قارن: 2 × 3 = ؟</a:t>
+            </a:r>
+            <a:endParaRPr lang="ar-LB" sz="1900" dirty="0"/>
           </a:p>
         </p:txBody>
       </p:sp>
@@ -9541,8 +8621,8 @@
         </p:nvSpPr>
         <p:spPr>
           <a:xfrm>
-            <a:off x="594360" y="3840480"/>
-            <a:ext cx="2834640" cy="685800"/>
+            <a:off x="594360" y="3886200"/>
+            <a:ext cx="2834640" cy="731520"/>
           </a:xfrm>
           <a:prstGeom prst="rect">
             <a:avLst/>
@@ -9558,7 +8638,7 @@
               <a:buNone/>
             </a:pPr>
             <a:r>
-              <a:rPr lang="en-US" sz="1900" b="1" dirty="0">
+              <a:rPr lang="en-US" sz="2100" b="1" dirty="0">
                 <a:solidFill>
                   <a:srgbClr val="C2500C"/>
                 </a:solidFill>
@@ -9566,9 +8646,9 @@
                 <a:ea typeface="Arial" pitchFamily="34" charset="-122"/>
                 <a:cs typeface="Arial" pitchFamily="34" charset="-120"/>
               </a:rPr>
-              <a:t>4 × 3</a:t>
-            </a:r>
-            <a:endParaRPr lang="en-US" sz="1900" dirty="0"/>
+              <a:t>2 × 3</a:t>
+            </a:r>
+            <a:endParaRPr lang="en-US" sz="2100" dirty="0"/>
           </a:p>
         </p:txBody>
       </p:sp>
@@ -9689,11 +8769,11 @@
         <p:spPr>
           <a:xfrm>
             <a:off x="457200" y="914400"/>
-            <a:ext cx="8229600" cy="1600200"/>
+            <a:ext cx="8229600" cy="1554480"/>
           </a:xfrm>
           <a:prstGeom prst="roundRect">
             <a:avLst>
-              <a:gd name="adj" fmla="val 5714"/>
+              <a:gd name="adj" fmla="val 5882"/>
             </a:avLst>
           </a:prstGeom>
           <a:solidFill>
@@ -9803,7 +8883,7 @@
         <p:spPr>
           <a:xfrm>
             <a:off x="640080" y="1444752"/>
-            <a:ext cx="7863840" cy="1033272"/>
+            <a:ext cx="7863840" cy="987552"/>
           </a:xfrm>
           <a:prstGeom prst="rect">
             <a:avLst/>
@@ -9822,14 +8902,14 @@
               <a:buNone/>
             </a:pPr>
             <a:r>
-              <a:rPr lang="ar-LB" altLang="en-US" sz="1800" dirty="0">
+              <a:rPr lang="ar-LB" altLang="en-US" sz="1900" dirty="0">
                 <a:solidFill>
                   <a:srgbClr val="1B262C"/>
                 </a:solidFill>
               </a:rPr>
-              <a:t>خيط عليه 3 خرزات يمثّل 2 أُس 3.</a:t>
-            </a:r>
-            <a:endParaRPr lang="ar-LB" sz="1800" dirty="0"/>
+              <a:t>خيط عليه خرزتان يمثّل 2 أُس 2.</a:t>
+            </a:r>
+            <a:endParaRPr lang="ar-LB" sz="1900" dirty="0"/>
           </a:p>
           <a:p>
             <a:pPr rtl="1" algn="r" indent="0" marL="0">
@@ -9839,14 +8919,14 @@
               <a:buNone/>
             </a:pPr>
             <a:r>
-              <a:rPr lang="ar-LB" altLang="en-US" sz="1800" dirty="0">
+              <a:rPr lang="ar-LB" altLang="en-US" sz="1900" dirty="0">
                 <a:solidFill>
                   <a:srgbClr val="1B262C"/>
                 </a:solidFill>
               </a:rPr>
-              <a:t>خذ خيطين متماثلين، واربطهما، وعُدّ الخرزات كلها.</a:t>
-            </a:r>
-            <a:endParaRPr lang="ar-LB" sz="1800" dirty="0"/>
+              <a:t>خذ خيطين مثله، واربطهما، وعُدّ الخرزات.</a:t>
+            </a:r>
+            <a:endParaRPr lang="ar-LB" sz="1900" dirty="0"/>
           </a:p>
         </p:txBody>
       </p:sp>
@@ -9859,11 +8939,11 @@
         <p:spPr>
           <a:xfrm>
             <a:off x="457200" y="2651760"/>
-            <a:ext cx="8229600" cy="685800"/>
+            <a:ext cx="8229600" cy="777240"/>
           </a:xfrm>
           <a:prstGeom prst="roundRect">
             <a:avLst>
-              <a:gd name="adj" fmla="val 13333"/>
+              <a:gd name="adj" fmla="val 11765"/>
             </a:avLst>
           </a:prstGeom>
           <a:solidFill>
@@ -9887,7 +8967,7 @@
         </p:nvSpPr>
         <p:spPr>
           <a:xfrm>
-            <a:off x="8183880" y="2802636"/>
+            <a:off x="8183880" y="2848356"/>
             <a:ext cx="384048" cy="384048"/>
           </a:xfrm>
           <a:prstGeom prst="ellipse">
@@ -9912,7 +8992,7 @@
         </p:nvSpPr>
         <p:spPr>
           <a:xfrm>
-            <a:off x="8183880" y="2802636"/>
+            <a:off x="8183880" y="2848356"/>
             <a:ext cx="384048" cy="384048"/>
           </a:xfrm>
           <a:prstGeom prst="rect">
@@ -9949,7 +9029,7 @@
         <p:spPr>
           <a:xfrm>
             <a:off x="3520440" y="2651760"/>
-            <a:ext cx="4572000" cy="685800"/>
+            <a:ext cx="4572000" cy="777240"/>
           </a:xfrm>
           <a:prstGeom prst="rect">
             <a:avLst/>
@@ -9965,14 +9045,14 @@
               <a:buNone/>
             </a:pPr>
             <a:r>
-              <a:rPr lang="ar-LB" altLang="en-US" sz="1700" dirty="0">
+              <a:rPr lang="ar-LB" altLang="en-US" sz="1900" dirty="0">
                 <a:solidFill>
                   <a:srgbClr val="1B262C"/>
                 </a:solidFill>
               </a:rPr>
-              <a:t>(2 أُس 3) الكلّ أُس 2: كم خرزة؟ 2 أُس كم؟</a:t>
-            </a:r>
-            <a:endParaRPr lang="ar-LB" sz="1700" dirty="0"/>
+              <a:t>خيطان، على كلٍّ منهما خرزتان: كم خرزة؟</a:t>
+            </a:r>
+            <a:endParaRPr lang="ar-LB" sz="1900" dirty="0"/>
           </a:p>
         </p:txBody>
       </p:sp>
@@ -9985,7 +9065,7 @@
         <p:spPr>
           <a:xfrm>
             <a:off x="594360" y="2651760"/>
-            <a:ext cx="2834640" cy="685800"/>
+            <a:ext cx="2834640" cy="777240"/>
           </a:xfrm>
           <a:prstGeom prst="rect">
             <a:avLst/>
@@ -10001,7 +9081,7 @@
               <a:buNone/>
             </a:pPr>
             <a:r>
-              <a:rPr lang="en-US" sz="1900" b="1" dirty="0">
+              <a:rPr lang="en-US" sz="2100" b="1" dirty="0">
                 <a:solidFill>
                   <a:srgbClr val="0B6E70"/>
                 </a:solidFill>
@@ -10009,64 +9089,9 @@
                 <a:ea typeface="Arial" pitchFamily="34" charset="-122"/>
                 <a:cs typeface="Arial" pitchFamily="34" charset="-120"/>
               </a:rPr>
-              <a:t>(2</a:t>
-            </a:r>
-            <a:r>
-              <a:rPr lang="en-US" sz="1900" b="1" baseline="30000" dirty="0">
-                <a:solidFill>
-                  <a:srgbClr val="0B6E70"/>
-                </a:solidFill>
-                <a:latin typeface="Arial" pitchFamily="34" charset="0"/>
-                <a:ea typeface="Arial" pitchFamily="34" charset="-122"/>
-                <a:cs typeface="Arial" pitchFamily="34" charset="-120"/>
-              </a:rPr>
-              <a:t>3</a:t>
-            </a:r>
-            <a:r>
-              <a:rPr lang="en-US" sz="1900" b="1" dirty="0">
-                <a:solidFill>
-                  <a:srgbClr val="0B6E70"/>
-                </a:solidFill>
-                <a:latin typeface="Arial" pitchFamily="34" charset="0"/>
-                <a:ea typeface="Arial" pitchFamily="34" charset="-122"/>
-                <a:cs typeface="Arial" pitchFamily="34" charset="-120"/>
-              </a:rPr>
-              <a:t>)</a:t>
-            </a:r>
-            <a:r>
-              <a:rPr lang="en-US" sz="1900" b="1" baseline="30000" dirty="0">
-                <a:solidFill>
-                  <a:srgbClr val="0B6E70"/>
-                </a:solidFill>
-                <a:latin typeface="Arial" pitchFamily="34" charset="0"/>
-                <a:ea typeface="Arial" pitchFamily="34" charset="-122"/>
-                <a:cs typeface="Arial" pitchFamily="34" charset="-120"/>
-              </a:rPr>
-              <a:t>2</a:t>
-            </a:r>
-            <a:r>
-              <a:rPr lang="en-US" sz="1900" b="1" dirty="0">
-                <a:solidFill>
-                  <a:srgbClr val="0B6E70"/>
-                </a:solidFill>
-                <a:latin typeface="Arial" pitchFamily="34" charset="0"/>
-                <a:ea typeface="Arial" pitchFamily="34" charset="-122"/>
-                <a:cs typeface="Arial" pitchFamily="34" charset="-120"/>
-              </a:rPr>
-              <a:t> = 2</a:t>
-            </a:r>
-            <a:r>
-              <a:rPr lang="en-US" sz="1900" b="1" baseline="30000" dirty="0">
-                <a:solidFill>
-                  <a:srgbClr val="0B6E70"/>
-                </a:solidFill>
-                <a:latin typeface="Arial" pitchFamily="34" charset="0"/>
-                <a:ea typeface="Arial" pitchFamily="34" charset="-122"/>
-                <a:cs typeface="Arial" pitchFamily="34" charset="-120"/>
-              </a:rPr>
-              <a:t>?</a:t>
-            </a:r>
-            <a:endParaRPr lang="en-US" sz="1900" dirty="0"/>
+              <a:t>2 × 2 = ?</a:t>
+            </a:r>
+            <a:endParaRPr lang="en-US" sz="2100" dirty="0"/>
           </a:p>
         </p:txBody>
       </p:sp>
@@ -10078,12 +9103,12 @@
         </p:nvSpPr>
         <p:spPr>
           <a:xfrm>
-            <a:off x="457200" y="3429000"/>
-            <a:ext cx="8229600" cy="685800"/>
+            <a:off x="457200" y="3520440"/>
+            <a:ext cx="8229600" cy="777240"/>
           </a:xfrm>
           <a:prstGeom prst="roundRect">
             <a:avLst>
-              <a:gd name="adj" fmla="val 13333"/>
+              <a:gd name="adj" fmla="val 11765"/>
             </a:avLst>
           </a:prstGeom>
           <a:solidFill>
@@ -10107,7 +9132,7 @@
         </p:nvSpPr>
         <p:spPr>
           <a:xfrm>
-            <a:off x="8183880" y="3579876"/>
+            <a:off x="8183880" y="3717036"/>
             <a:ext cx="384048" cy="384048"/>
           </a:xfrm>
           <a:prstGeom prst="ellipse">
@@ -10132,7 +9157,7 @@
         </p:nvSpPr>
         <p:spPr>
           <a:xfrm>
-            <a:off x="8183880" y="3579876"/>
+            <a:off x="8183880" y="3717036"/>
             <a:ext cx="384048" cy="384048"/>
           </a:xfrm>
           <a:prstGeom prst="rect">
@@ -10168,8 +9193,8 @@
         </p:nvSpPr>
         <p:spPr>
           <a:xfrm>
-            <a:off x="3520440" y="3429000"/>
-            <a:ext cx="4572000" cy="685800"/>
+            <a:off x="3520440" y="3520440"/>
+            <a:ext cx="4572000" cy="777240"/>
           </a:xfrm>
           <a:prstGeom prst="rect">
             <a:avLst/>
@@ -10185,14 +9210,14 @@
               <a:buNone/>
             </a:pPr>
             <a:r>
-              <a:rPr lang="ar-LB" altLang="en-US" sz="1700" dirty="0">
+              <a:rPr lang="ar-LB" altLang="en-US" sz="1900" dirty="0">
                 <a:solidFill>
                   <a:srgbClr val="1B262C"/>
                 </a:solidFill>
               </a:rPr>
-              <a:t>ثلاثة خيوط على كلٍّ خرزتان: (5 أُس 2) الكلّ أُس 3.</a:t>
-            </a:r>
-            <a:endParaRPr lang="ar-LB" sz="1700" dirty="0"/>
+              <a:t>(2 أُس 2) الكلّ أُس 2 = 2 أُس ؟</a:t>
+            </a:r>
+            <a:endParaRPr lang="ar-LB" sz="1900" dirty="0"/>
           </a:p>
         </p:txBody>
       </p:sp>
@@ -10204,8 +9229,8 @@
         </p:nvSpPr>
         <p:spPr>
           <a:xfrm>
-            <a:off x="594360" y="3429000"/>
-            <a:ext cx="2834640" cy="685800"/>
+            <a:off x="594360" y="3520440"/>
+            <a:ext cx="2834640" cy="777240"/>
           </a:xfrm>
           <a:prstGeom prst="rect">
             <a:avLst/>
@@ -10221,7 +9246,7 @@
               <a:buNone/>
             </a:pPr>
             <a:r>
-              <a:rPr lang="en-US" sz="1900" b="1" dirty="0">
+              <a:rPr lang="en-US" sz="2100" b="1" dirty="0">
                 <a:solidFill>
                   <a:srgbClr val="0B6E70"/>
                 </a:solidFill>
@@ -10229,10 +9254,10 @@
                 <a:ea typeface="Arial" pitchFamily="34" charset="-122"/>
                 <a:cs typeface="Arial" pitchFamily="34" charset="-120"/>
               </a:rPr>
-              <a:t>(5</a:t>
-            </a:r>
-            <a:r>
-              <a:rPr lang="en-US" sz="1900" b="1" baseline="30000" dirty="0">
+              <a:t>(2</a:t>
+            </a:r>
+            <a:r>
+              <a:rPr lang="en-US" sz="2100" b="1" baseline="30000" dirty="0">
                 <a:solidFill>
                   <a:srgbClr val="0B6E70"/>
                 </a:solidFill>
@@ -10243,7 +9268,7 @@
               <a:t>2</a:t>
             </a:r>
             <a:r>
-              <a:rPr lang="en-US" sz="1900" b="1" dirty="0">
+              <a:rPr lang="en-US" sz="2100" b="1" dirty="0">
                 <a:solidFill>
                   <a:srgbClr val="0B6E70"/>
                 </a:solidFill>
@@ -10254,7 +9279,7 @@
               <a:t>)</a:t>
             </a:r>
             <a:r>
-              <a:rPr lang="en-US" sz="1900" b="1" baseline="30000" dirty="0">
+              <a:rPr lang="en-US" sz="2100" b="1" baseline="30000" dirty="0">
                 <a:solidFill>
                   <a:srgbClr val="0B6E70"/>
                 </a:solidFill>
@@ -10262,10 +9287,10 @@
                 <a:ea typeface="Arial" pitchFamily="34" charset="-122"/>
                 <a:cs typeface="Arial" pitchFamily="34" charset="-120"/>
               </a:rPr>
-              <a:t>3</a:t>
-            </a:r>
-            <a:r>
-              <a:rPr lang="en-US" sz="1900" b="1" dirty="0">
+              <a:t>2</a:t>
+            </a:r>
+            <a:r>
+              <a:rPr lang="en-US" sz="2100" b="1" dirty="0">
                 <a:solidFill>
                   <a:srgbClr val="0B6E70"/>
                 </a:solidFill>
@@ -10273,10 +9298,10 @@
                 <a:ea typeface="Arial" pitchFamily="34" charset="-122"/>
                 <a:cs typeface="Arial" pitchFamily="34" charset="-120"/>
               </a:rPr>
-              <a:t> = 5</a:t>
-            </a:r>
-            <a:r>
-              <a:rPr lang="en-US" sz="1900" b="1" baseline="30000" dirty="0">
+              <a:t> = 2</a:t>
+            </a:r>
+            <a:r>
+              <a:rPr lang="en-US" sz="2100" b="1" baseline="30000" dirty="0">
                 <a:solidFill>
                   <a:srgbClr val="0B6E70"/>
                 </a:solidFill>
@@ -10286,43 +9311,7 @@
               </a:rPr>
               <a:t>?</a:t>
             </a:r>
-            <a:endParaRPr lang="en-US" sz="1900" dirty="0"/>
-          </a:p>
-        </p:txBody>
-      </p:sp>
-      <p:sp>
-        <p:nvSpPr>
-          <p:cNvPr id="18" name="Text 15"/>
-          <p:cNvSpPr txBox="1"/>
-          <p:nvPr/>
-        </p:nvSpPr>
-        <p:spPr>
-          <a:xfrm>
-            <a:off x="457200" y="4206240"/>
-            <a:ext cx="8229600" cy="457200"/>
-          </a:xfrm>
-          <a:prstGeom prst="rect">
-            <a:avLst/>
-          </a:prstGeom>
-          <a:noFill/>
-          <a:ln/>
-        </p:spPr>
-        <p:txBody>
-          <a:bodyPr wrap="square" lIns="0" tIns="0" rIns="0" bIns="0" rtlCol="0" anchor="t"/>
-          <a:lstStyle/>
-          <a:p>
-            <a:pPr rtl="1" algn="ctr" indent="0" marL="0">
-              <a:buNone/>
-            </a:pPr>
-            <a:r>
-              <a:rPr lang="ar-LB" altLang="en-US" sz="1900" b="1" dirty="0">
-                <a:solidFill>
-                  <a:srgbClr val="0F4C5C"/>
-                </a:solidFill>
-              </a:rPr>
-              <a:t>كيف نعرف عدد الخرزات دون أن نعدّها؟</a:t>
-            </a:r>
-            <a:endParaRPr lang="ar-LB" sz="1900" dirty="0"/>
+            <a:endParaRPr lang="en-US" sz="2100" dirty="0"/>
           </a:p>
         </p:txBody>
       </p:sp>
@@ -10488,14 +9477,14 @@
               <a:buNone/>
             </a:pPr>
             <a:r>
-              <a:rPr lang="ar-LB" altLang="en-US" sz="1900" b="1" dirty="0">
+              <a:rPr lang="ar-LB" altLang="en-US" sz="2000" b="1" dirty="0">
                 <a:solidFill>
                   <a:srgbClr val="0B6E70"/>
                 </a:solidFill>
               </a:rPr>
               <a:t>الضرب جمع متكرر</a:t>
             </a:r>
-            <a:endParaRPr lang="ar-LB" sz="1900" dirty="0"/>
+            <a:endParaRPr lang="ar-LB" sz="2000" dirty="0"/>
           </a:p>
         </p:txBody>
       </p:sp>
@@ -10507,8 +9496,8 @@
         </p:nvSpPr>
         <p:spPr>
           <a:xfrm>
-            <a:off x="4754880" y="1444752"/>
-            <a:ext cx="3794760" cy="530352"/>
+            <a:off x="4754880" y="1463040"/>
+            <a:ext cx="3794760" cy="502920"/>
           </a:xfrm>
           <a:prstGeom prst="rect">
             <a:avLst/>
@@ -10524,14 +9513,14 @@
               <a:buNone/>
             </a:pPr>
             <a:r>
-              <a:rPr lang="ar-LB" altLang="en-US" sz="1400" dirty="0">
+              <a:rPr lang="ar-LB" altLang="en-US" sz="1500" dirty="0">
                 <a:solidFill>
                   <a:srgbClr val="3E4A52"/>
                 </a:solidFill>
               </a:rPr>
-              <a:t>تُقرأ: 4 ضرب 3</a:t>
-            </a:r>
-            <a:endParaRPr lang="ar-LB" sz="1400" dirty="0"/>
+              <a:t>تُقرأ: 2 ضرب 3</a:t>
+            </a:r>
+            <a:endParaRPr lang="ar-LB" sz="1500" dirty="0"/>
           </a:p>
         </p:txBody>
       </p:sp>
@@ -10560,7 +9549,7 @@
               <a:buNone/>
             </a:pPr>
             <a:r>
-              <a:rPr lang="en-US" sz="2400" b="1" dirty="0">
+              <a:rPr lang="en-US" sz="2600" b="1" dirty="0">
                 <a:solidFill>
                   <a:srgbClr val="0B6E70"/>
                 </a:solidFill>
@@ -10568,9 +9557,9 @@
                 <a:ea typeface="Arial" pitchFamily="34" charset="-122"/>
                 <a:cs typeface="Arial" pitchFamily="34" charset="-120"/>
               </a:rPr>
-              <a:t>4 × 3 = 3 + 3 + 3 + 3 = 12</a:t>
-            </a:r>
-            <a:endParaRPr lang="en-US" sz="2400" dirty="0"/>
+              <a:t>2 × 3 = 2 + 2 + 2 = 6</a:t>
+            </a:r>
+            <a:endParaRPr lang="en-US" sz="2600" dirty="0"/>
           </a:p>
         </p:txBody>
       </p:sp>
@@ -10628,14 +9617,14 @@
               <a:buNone/>
             </a:pPr>
             <a:r>
-              <a:rPr lang="ar-LB" altLang="en-US" sz="1900" b="1" dirty="0">
+              <a:rPr lang="ar-LB" altLang="en-US" sz="2000" b="1" dirty="0">
                 <a:solidFill>
                   <a:srgbClr val="C2500C"/>
                 </a:solidFill>
               </a:rPr>
               <a:t>القوّة ضرب متكرر</a:t>
             </a:r>
-            <a:endParaRPr lang="ar-LB" sz="1900" dirty="0"/>
+            <a:endParaRPr lang="ar-LB" sz="2000" dirty="0"/>
           </a:p>
         </p:txBody>
       </p:sp>
@@ -10647,8 +9636,8 @@
         </p:nvSpPr>
         <p:spPr>
           <a:xfrm>
-            <a:off x="4754880" y="2706624"/>
-            <a:ext cx="3794760" cy="530352"/>
+            <a:off x="4754880" y="2724912"/>
+            <a:ext cx="3794760" cy="502920"/>
           </a:xfrm>
           <a:prstGeom prst="rect">
             <a:avLst/>
@@ -10664,14 +9653,14 @@
               <a:buNone/>
             </a:pPr>
             <a:r>
-              <a:rPr lang="ar-LB" altLang="en-US" sz="1400" dirty="0">
+              <a:rPr lang="ar-LB" altLang="en-US" sz="1500" dirty="0">
                 <a:solidFill>
                   <a:srgbClr val="3E4A52"/>
                 </a:solidFill>
               </a:rPr>
-              <a:t>تُقرأ: 2 أُس 5</a:t>
-            </a:r>
-            <a:endParaRPr lang="ar-LB" sz="1400" dirty="0"/>
+              <a:t>تُقرأ: 2 أُس 3</a:t>
+            </a:r>
+            <a:endParaRPr lang="ar-LB" sz="1500" dirty="0"/>
           </a:p>
         </p:txBody>
       </p:sp>
@@ -10700,7 +9689,7 @@
               <a:buNone/>
             </a:pPr>
             <a:r>
-              <a:rPr lang="en-US" sz="2400" b="1" dirty="0">
+              <a:rPr lang="en-US" sz="2600" b="1" dirty="0">
                 <a:solidFill>
                   <a:srgbClr val="C2500C"/>
                 </a:solidFill>
@@ -10711,7 +9700,7 @@
               <a:t>2</a:t>
             </a:r>
             <a:r>
-              <a:rPr lang="en-US" sz="2400" b="1" baseline="30000" dirty="0">
+              <a:rPr lang="en-US" sz="2600" b="1" baseline="30000" dirty="0">
                 <a:solidFill>
                   <a:srgbClr val="C2500C"/>
                 </a:solidFill>
@@ -10719,10 +9708,10 @@
                 <a:ea typeface="Arial" pitchFamily="34" charset="-122"/>
                 <a:cs typeface="Arial" pitchFamily="34" charset="-120"/>
               </a:rPr>
-              <a:t>5</a:t>
-            </a:r>
-            <a:r>
-              <a:rPr lang="en-US" sz="2400" b="1" dirty="0">
+              <a:t>3</a:t>
+            </a:r>
+            <a:r>
+              <a:rPr lang="en-US" sz="2600" b="1" dirty="0">
                 <a:solidFill>
                   <a:srgbClr val="C2500C"/>
                 </a:solidFill>
@@ -10730,9 +9719,9 @@
                 <a:ea typeface="Arial" pitchFamily="34" charset="-122"/>
                 <a:cs typeface="Arial" pitchFamily="34" charset="-120"/>
               </a:rPr>
-              <a:t> = 2 × 2 × 2 × 2 × 2 = 32</a:t>
-            </a:r>
-            <a:endParaRPr lang="en-US" sz="2400" dirty="0"/>
+              <a:t> = 2 × 2 × 2 = 8</a:t>
+            </a:r>
+            <a:endParaRPr lang="en-US" sz="2600" dirty="0"/>
           </a:p>
         </p:txBody>
       </p:sp>
@@ -10790,14 +9779,14 @@
               <a:buNone/>
             </a:pPr>
             <a:r>
-              <a:rPr lang="ar-LB" altLang="en-US" sz="1900" b="1" dirty="0">
+              <a:rPr lang="ar-LB" altLang="en-US" sz="2000" b="1" dirty="0">
                 <a:solidFill>
                   <a:srgbClr val="1F5C99"/>
                 </a:solidFill>
               </a:rPr>
               <a:t>قوّة القوّة: نضرب الأُسّين</a:t>
             </a:r>
-            <a:endParaRPr lang="ar-LB" sz="1900" dirty="0"/>
+            <a:endParaRPr lang="ar-LB" sz="2000" dirty="0"/>
           </a:p>
         </p:txBody>
       </p:sp>
@@ -10809,8 +9798,8 @@
         </p:nvSpPr>
         <p:spPr>
           <a:xfrm>
-            <a:off x="4754880" y="3968496"/>
-            <a:ext cx="3794760" cy="530352"/>
+            <a:off x="4754880" y="3986784"/>
+            <a:ext cx="3794760" cy="502920"/>
           </a:xfrm>
           <a:prstGeom prst="rect">
             <a:avLst/>
@@ -10826,14 +9815,14 @@
               <a:buNone/>
             </a:pPr>
             <a:r>
-              <a:rPr lang="ar-LB" altLang="en-US" sz="1400" dirty="0">
+              <a:rPr lang="ar-LB" altLang="en-US" sz="1500" dirty="0">
                 <a:solidFill>
                   <a:srgbClr val="3E4A52"/>
                 </a:solidFill>
               </a:rPr>
-              <a:t>تُقرأ: (a أُس m) الكلّ أُس n = a أُس (m ضرب n)</a:t>
-            </a:r>
-            <a:endParaRPr lang="ar-LB" sz="1400" dirty="0"/>
+              <a:t>تُقرأ: (2 أُس 2) الكلّ أُس 2 = 2 أُس 4</a:t>
+            </a:r>
+            <a:endParaRPr lang="ar-LB" sz="1500" dirty="0"/>
           </a:p>
         </p:txBody>
       </p:sp>
@@ -10862,7 +9851,7 @@
               <a:buNone/>
             </a:pPr>
             <a:r>
-              <a:rPr lang="en-US" sz="2400" b="1" dirty="0">
+              <a:rPr lang="en-US" sz="2600" b="1" dirty="0">
                 <a:solidFill>
                   <a:srgbClr val="1F5C99"/>
                 </a:solidFill>
@@ -10870,10 +9859,10 @@
                 <a:ea typeface="Arial" pitchFamily="34" charset="-122"/>
                 <a:cs typeface="Arial" pitchFamily="34" charset="-120"/>
               </a:rPr>
-              <a:t>(a</a:t>
-            </a:r>
-            <a:r>
-              <a:rPr lang="en-US" sz="2400" b="1" baseline="30000" dirty="0">
+              <a:t>(2</a:t>
+            </a:r>
+            <a:r>
+              <a:rPr lang="en-US" sz="2600" b="1" baseline="30000" dirty="0">
                 <a:solidFill>
                   <a:srgbClr val="1F5C99"/>
                 </a:solidFill>
@@ -10881,10 +9870,10 @@
                 <a:ea typeface="Arial" pitchFamily="34" charset="-122"/>
                 <a:cs typeface="Arial" pitchFamily="34" charset="-120"/>
               </a:rPr>
-              <a:t>m</a:t>
-            </a:r>
-            <a:r>
-              <a:rPr lang="en-US" sz="2400" b="1" dirty="0">
+              <a:t>2</a:t>
+            </a:r>
+            <a:r>
+              <a:rPr lang="en-US" sz="2600" b="1" dirty="0">
                 <a:solidFill>
                   <a:srgbClr val="1F5C99"/>
                 </a:solidFill>
@@ -10895,7 +9884,7 @@
               <a:t>)</a:t>
             </a:r>
             <a:r>
-              <a:rPr lang="en-US" sz="2400" b="1" baseline="30000" dirty="0">
+              <a:rPr lang="en-US" sz="2600" b="1" baseline="30000" dirty="0">
                 <a:solidFill>
                   <a:srgbClr val="1F5C99"/>
                 </a:solidFill>
@@ -10903,10 +9892,10 @@
                 <a:ea typeface="Arial" pitchFamily="34" charset="-122"/>
                 <a:cs typeface="Arial" pitchFamily="34" charset="-120"/>
               </a:rPr>
-              <a:t>n</a:t>
-            </a:r>
-            <a:r>
-              <a:rPr lang="en-US" sz="2400" b="1" dirty="0">
+              <a:t>2</a:t>
+            </a:r>
+            <a:r>
+              <a:rPr lang="en-US" sz="2600" b="1" dirty="0">
                 <a:solidFill>
                   <a:srgbClr val="1F5C99"/>
                 </a:solidFill>
@@ -10914,10 +9903,10 @@
                 <a:ea typeface="Arial" pitchFamily="34" charset="-122"/>
                 <a:cs typeface="Arial" pitchFamily="34" charset="-120"/>
               </a:rPr>
-              <a:t> = a</a:t>
-            </a:r>
-            <a:r>
-              <a:rPr lang="en-US" sz="2400" b="1" baseline="30000" dirty="0">
+              <a:t> = 2</a:t>
+            </a:r>
+            <a:r>
+              <a:rPr lang="en-US" sz="2600" b="1" baseline="30000" dirty="0">
                 <a:solidFill>
                   <a:srgbClr val="1F5C99"/>
                 </a:solidFill>
@@ -10925,9 +9914,31 @@
                 <a:ea typeface="Arial" pitchFamily="34" charset="-122"/>
                 <a:cs typeface="Arial" pitchFamily="34" charset="-120"/>
               </a:rPr>
-              <a:t>m × n</a:t>
-            </a:r>
-            <a:endParaRPr lang="en-US" sz="2400" dirty="0"/>
+              <a:t>2 × 2</a:t>
+            </a:r>
+            <a:r>
+              <a:rPr lang="en-US" sz="2600" b="1" dirty="0">
+                <a:solidFill>
+                  <a:srgbClr val="1F5C99"/>
+                </a:solidFill>
+                <a:latin typeface="Arial" pitchFamily="34" charset="0"/>
+                <a:ea typeface="Arial" pitchFamily="34" charset="-122"/>
+                <a:cs typeface="Arial" pitchFamily="34" charset="-120"/>
+              </a:rPr>
+              <a:t> = 2</a:t>
+            </a:r>
+            <a:r>
+              <a:rPr lang="en-US" sz="2600" b="1" baseline="30000" dirty="0">
+                <a:solidFill>
+                  <a:srgbClr val="1F5C99"/>
+                </a:solidFill>
+                <a:latin typeface="Arial" pitchFamily="34" charset="0"/>
+                <a:ea typeface="Arial" pitchFamily="34" charset="-122"/>
+                <a:cs typeface="Arial" pitchFamily="34" charset="-120"/>
+              </a:rPr>
+              <a:t>4</a:t>
+            </a:r>
+            <a:endParaRPr lang="en-US" sz="2600" dirty="0"/>
           </a:p>
         </p:txBody>
       </p:sp>
@@ -11097,11 +10108,11 @@
         <p:spPr>
           <a:xfrm>
             <a:off x="457200" y="914400"/>
-            <a:ext cx="8229600" cy="676656"/>
+            <a:ext cx="8229600" cy="822960"/>
           </a:xfrm>
           <a:prstGeom prst="roundRect">
             <a:avLst>
-              <a:gd name="adj" fmla="val 13514"/>
+              <a:gd name="adj" fmla="val 11111"/>
             </a:avLst>
           </a:prstGeom>
           <a:solidFill>
@@ -11125,7 +10136,7 @@
         </p:nvSpPr>
         <p:spPr>
           <a:xfrm>
-            <a:off x="8183880" y="1060704"/>
+            <a:off x="8183880" y="1133856"/>
             <a:ext cx="384048" cy="384048"/>
           </a:xfrm>
           <a:prstGeom prst="ellipse">
@@ -11150,7 +10161,7 @@
         </p:nvSpPr>
         <p:spPr>
           <a:xfrm>
-            <a:off x="8183880" y="1060704"/>
+            <a:off x="8183880" y="1133856"/>
             <a:ext cx="384048" cy="384048"/>
           </a:xfrm>
           <a:prstGeom prst="rect">
@@ -11187,7 +10198,7 @@
         <p:spPr>
           <a:xfrm>
             <a:off x="3520440" y="914400"/>
-            <a:ext cx="4572000" cy="676656"/>
+            <a:ext cx="4572000" cy="822960"/>
           </a:xfrm>
           <a:prstGeom prst="rect">
             <a:avLst/>
@@ -11203,14 +10214,14 @@
               <a:buNone/>
             </a:pPr>
             <a:r>
-              <a:rPr lang="ar-LB" altLang="en-US" sz="1600" dirty="0">
+              <a:rPr lang="ar-LB" altLang="en-US" sz="1900" dirty="0">
                 <a:solidFill>
                   <a:srgbClr val="1B262C"/>
                 </a:solidFill>
               </a:rPr>
-              <a:t>خيط عليه 4 خرزات، كل خرزة «ضرب 3». اكتب القوّة واحسبها.</a:t>
-            </a:r>
-            <a:endParaRPr lang="ar-LB" sz="1600" dirty="0"/>
+              <a:t>أكمل: 3 × 3 = 3 أُس ؟</a:t>
+            </a:r>
+            <a:endParaRPr lang="ar-LB" sz="1900" dirty="0"/>
           </a:p>
         </p:txBody>
       </p:sp>
@@ -11223,7 +10234,7 @@
         <p:spPr>
           <a:xfrm>
             <a:off x="594360" y="914400"/>
-            <a:ext cx="2834640" cy="676656"/>
+            <a:ext cx="2834640" cy="822960"/>
           </a:xfrm>
           <a:prstGeom prst="rect">
             <a:avLst/>
@@ -11239,7 +10250,7 @@
               <a:buNone/>
             </a:pPr>
             <a:r>
-              <a:rPr lang="en-US" sz="1800" b="1" dirty="0">
+              <a:rPr lang="en-US" sz="2100" b="1" dirty="0">
                 <a:solidFill>
                   <a:srgbClr val="1F7A45"/>
                 </a:solidFill>
@@ -11247,9 +10258,20 @@
                 <a:ea typeface="Arial" pitchFamily="34" charset="-122"/>
                 <a:cs typeface="Arial" pitchFamily="34" charset="-120"/>
               </a:rPr>
-              <a:t>3 × 3 × 3 × 3</a:t>
-            </a:r>
-            <a:endParaRPr lang="en-US" sz="1800" dirty="0"/>
+              <a:t>3 × 3 = 3</a:t>
+            </a:r>
+            <a:r>
+              <a:rPr lang="en-US" sz="2100" b="1" baseline="30000" dirty="0">
+                <a:solidFill>
+                  <a:srgbClr val="1F7A45"/>
+                </a:solidFill>
+                <a:latin typeface="Arial" pitchFamily="34" charset="0"/>
+                <a:ea typeface="Arial" pitchFamily="34" charset="-122"/>
+                <a:cs typeface="Arial" pitchFamily="34" charset="-120"/>
+              </a:rPr>
+              <a:t>?</a:t>
+            </a:r>
+            <a:endParaRPr lang="en-US" sz="2100" dirty="0"/>
           </a:p>
         </p:txBody>
       </p:sp>
@@ -11261,12 +10283,12 @@
         </p:nvSpPr>
         <p:spPr>
           <a:xfrm>
-            <a:off x="457200" y="1664208"/>
-            <a:ext cx="8229600" cy="676656"/>
+            <a:off x="457200" y="1847088"/>
+            <a:ext cx="8229600" cy="822960"/>
           </a:xfrm>
           <a:prstGeom prst="roundRect">
             <a:avLst>
-              <a:gd name="adj" fmla="val 13514"/>
+              <a:gd name="adj" fmla="val 11111"/>
             </a:avLst>
           </a:prstGeom>
           <a:solidFill>
@@ -11290,7 +10312,7 @@
         </p:nvSpPr>
         <p:spPr>
           <a:xfrm>
-            <a:off x="8183880" y="1810512"/>
+            <a:off x="8183880" y="2066544"/>
             <a:ext cx="384048" cy="384048"/>
           </a:xfrm>
           <a:prstGeom prst="ellipse">
@@ -11315,7 +10337,7 @@
         </p:nvSpPr>
         <p:spPr>
           <a:xfrm>
-            <a:off x="8183880" y="1810512"/>
+            <a:off x="8183880" y="2066544"/>
             <a:ext cx="384048" cy="384048"/>
           </a:xfrm>
           <a:prstGeom prst="rect">
@@ -11351,8 +10373,8 @@
         </p:nvSpPr>
         <p:spPr>
           <a:xfrm>
-            <a:off x="3520440" y="1664208"/>
-            <a:ext cx="4572000" cy="676656"/>
+            <a:off x="3520440" y="1847088"/>
+            <a:ext cx="4572000" cy="822960"/>
           </a:xfrm>
           <a:prstGeom prst="rect">
             <a:avLst/>
@@ -11368,14 +10390,14 @@
               <a:buNone/>
             </a:pPr>
             <a:r>
-              <a:rPr lang="ar-LB" altLang="en-US" sz="1600" dirty="0">
+              <a:rPr lang="ar-LB" altLang="en-US" sz="1900" dirty="0">
                 <a:solidFill>
                   <a:srgbClr val="1B262C"/>
                 </a:solidFill>
               </a:rPr>
-              <a:t>خيط عليه 3 خرزات، كل خرزة «ضرب 5». اكتب القوّة واحسبها.</a:t>
-            </a:r>
-            <a:endParaRPr lang="ar-LB" sz="1600" dirty="0"/>
+              <a:t>أكمل: 2 × 2 × 2 = 2 أُس ؟</a:t>
+            </a:r>
+            <a:endParaRPr lang="ar-LB" sz="1900" dirty="0"/>
           </a:p>
         </p:txBody>
       </p:sp>
@@ -11387,8 +10409,8 @@
         </p:nvSpPr>
         <p:spPr>
           <a:xfrm>
-            <a:off x="594360" y="1664208"/>
-            <a:ext cx="2834640" cy="676656"/>
+            <a:off x="594360" y="1847088"/>
+            <a:ext cx="2834640" cy="822960"/>
           </a:xfrm>
           <a:prstGeom prst="rect">
             <a:avLst/>
@@ -11404,7 +10426,7 @@
               <a:buNone/>
             </a:pPr>
             <a:r>
-              <a:rPr lang="en-US" sz="1800" b="1" dirty="0">
+              <a:rPr lang="en-US" sz="2100" b="1" dirty="0">
                 <a:solidFill>
                   <a:srgbClr val="1F7A45"/>
                 </a:solidFill>
@@ -11412,9 +10434,20 @@
                 <a:ea typeface="Arial" pitchFamily="34" charset="-122"/>
                 <a:cs typeface="Arial" pitchFamily="34" charset="-120"/>
               </a:rPr>
-              <a:t>5 × 5 × 5</a:t>
-            </a:r>
-            <a:endParaRPr lang="en-US" sz="1800" dirty="0"/>
+              <a:t>2 × 2 × 2 = 2</a:t>
+            </a:r>
+            <a:r>
+              <a:rPr lang="en-US" sz="2100" b="1" baseline="30000" dirty="0">
+                <a:solidFill>
+                  <a:srgbClr val="1F7A45"/>
+                </a:solidFill>
+                <a:latin typeface="Arial" pitchFamily="34" charset="0"/>
+                <a:ea typeface="Arial" pitchFamily="34" charset="-122"/>
+                <a:cs typeface="Arial" pitchFamily="34" charset="-120"/>
+              </a:rPr>
+              <a:t>?</a:t>
+            </a:r>
+            <a:endParaRPr lang="en-US" sz="2100" dirty="0"/>
           </a:p>
         </p:txBody>
       </p:sp>
@@ -11426,12 +10459,12 @@
         </p:nvSpPr>
         <p:spPr>
           <a:xfrm>
-            <a:off x="457200" y="2414016"/>
-            <a:ext cx="8229600" cy="676656"/>
+            <a:off x="457200" y="2779776"/>
+            <a:ext cx="8229600" cy="822960"/>
           </a:xfrm>
           <a:prstGeom prst="roundRect">
             <a:avLst>
-              <a:gd name="adj" fmla="val 13514"/>
+              <a:gd name="adj" fmla="val 11111"/>
             </a:avLst>
           </a:prstGeom>
           <a:solidFill>
@@ -11455,7 +10488,7 @@
         </p:nvSpPr>
         <p:spPr>
           <a:xfrm>
-            <a:off x="8183880" y="2560320"/>
+            <a:off x="8183880" y="2999232"/>
             <a:ext cx="384048" cy="384048"/>
           </a:xfrm>
           <a:prstGeom prst="ellipse">
@@ -11480,7 +10513,7 @@
         </p:nvSpPr>
         <p:spPr>
           <a:xfrm>
-            <a:off x="8183880" y="2560320"/>
+            <a:off x="8183880" y="2999232"/>
             <a:ext cx="384048" cy="384048"/>
           </a:xfrm>
           <a:prstGeom prst="rect">
@@ -11516,8 +10549,8 @@
         </p:nvSpPr>
         <p:spPr>
           <a:xfrm>
-            <a:off x="640080" y="2414016"/>
-            <a:ext cx="7452360" cy="676656"/>
+            <a:off x="3520440" y="2779776"/>
+            <a:ext cx="4572000" cy="822960"/>
           </a:xfrm>
           <a:prstGeom prst="rect">
             <a:avLst/>
@@ -11533,31 +10566,92 @@
               <a:buNone/>
             </a:pPr>
             <a:r>
-              <a:rPr lang="ar-LB" altLang="en-US" sz="1600" dirty="0">
+              <a:rPr lang="ar-LB" altLang="en-US" sz="1900" dirty="0">
                 <a:solidFill>
                   <a:srgbClr val="1B262C"/>
                 </a:solidFill>
               </a:rPr>
-              <a:t>طابق بطاقات البرايل: الكتابة المطوّلة، المختصرة، القيمة.</a:t>
-            </a:r>
-            <a:endParaRPr lang="ar-LB" sz="1600" dirty="0"/>
-          </a:p>
-        </p:txBody>
-      </p:sp>
-      <p:sp>
-        <p:nvSpPr>
-          <p:cNvPr id="19" name="Shape 16"/>
+              <a:t>احسب: 2 أُس 2</a:t>
+            </a:r>
+            <a:endParaRPr lang="ar-LB" sz="1900" dirty="0"/>
+          </a:p>
+        </p:txBody>
+      </p:sp>
+      <p:sp>
+        <p:nvSpPr>
+          <p:cNvPr id="19" name="Text 16"/>
+          <p:cNvSpPr txBox="1"/>
+          <p:nvPr/>
+        </p:nvSpPr>
+        <p:spPr>
+          <a:xfrm>
+            <a:off x="594360" y="2779776"/>
+            <a:ext cx="2834640" cy="822960"/>
+          </a:xfrm>
+          <a:prstGeom prst="rect">
+            <a:avLst/>
+          </a:prstGeom>
+          <a:noFill/>
+          <a:ln/>
+        </p:spPr>
+        <p:txBody>
+          <a:bodyPr wrap="square" lIns="0" tIns="0" rIns="0" bIns="0" rtlCol="0" anchor="ctr"/>
+          <a:lstStyle/>
+          <a:p>
+            <a:pPr rtl="0" algn="ctr" indent="0" marL="0">
+              <a:buNone/>
+            </a:pPr>
+            <a:r>
+              <a:rPr lang="en-US" sz="2100" b="1" dirty="0">
+                <a:solidFill>
+                  <a:srgbClr val="1F7A45"/>
+                </a:solidFill>
+                <a:latin typeface="Arial" pitchFamily="34" charset="0"/>
+                <a:ea typeface="Arial" pitchFamily="34" charset="-122"/>
+                <a:cs typeface="Arial" pitchFamily="34" charset="-120"/>
+              </a:rPr>
+              <a:t>2</a:t>
+            </a:r>
+            <a:r>
+              <a:rPr lang="en-US" sz="2100" b="1" baseline="30000" dirty="0">
+                <a:solidFill>
+                  <a:srgbClr val="1F7A45"/>
+                </a:solidFill>
+                <a:latin typeface="Arial" pitchFamily="34" charset="0"/>
+                <a:ea typeface="Arial" pitchFamily="34" charset="-122"/>
+                <a:cs typeface="Arial" pitchFamily="34" charset="-120"/>
+              </a:rPr>
+              <a:t>2</a:t>
+            </a:r>
+            <a:r>
+              <a:rPr lang="en-US" sz="2100" b="1" dirty="0">
+                <a:solidFill>
+                  <a:srgbClr val="1F7A45"/>
+                </a:solidFill>
+                <a:latin typeface="Arial" pitchFamily="34" charset="0"/>
+                <a:ea typeface="Arial" pitchFamily="34" charset="-122"/>
+                <a:cs typeface="Arial" pitchFamily="34" charset="-120"/>
+              </a:rPr>
+              <a:t> = ?</a:t>
+            </a:r>
+            <a:endParaRPr lang="en-US" sz="2100" dirty="0"/>
+          </a:p>
+        </p:txBody>
+      </p:sp>
+      <p:sp>
+        <p:nvSpPr>
+          <p:cNvPr id="20" name="Shape 17"/>
           <p:cNvSpPr/>
           <p:nvPr/>
         </p:nvSpPr>
         <p:spPr>
           <a:xfrm>
-            <a:off x="457200" y="3163824"/>
-            <a:ext cx="8229600" cy="676656"/>
+            <a:off x="457200" y="3712464"/>
+            <a:ext cx="8229600" cy="822960"/>
           </a:xfrm>
           <a:prstGeom prst="roundRect">
             <a:avLst>
-              <a:gd name="adj" fmla="val 13514"/>
+              <a:gd name="adj" fmla="val 11111"/>
             </a:avLst>
           </a:prstGeom>
           <a:solidFill>
@@ -11575,13 +10669,13 @@
       </p:sp>
       <p:sp>
         <p:nvSpPr>
-          <p:cNvPr id="20" name="Shape 17"/>
+          <p:cNvPr id="21" name="Shape 18"/>
           <p:cNvSpPr/>
           <p:nvPr/>
         </p:nvSpPr>
         <p:spPr>
           <a:xfrm>
-            <a:off x="8183880" y="3310128"/>
+            <a:off x="8183880" y="3931920"/>
             <a:ext cx="384048" cy="384048"/>
           </a:xfrm>
           <a:prstGeom prst="ellipse">
@@ -11600,13 +10694,13 @@
       </p:sp>
       <p:sp>
         <p:nvSpPr>
-          <p:cNvPr id="21" name="Text 18"/>
-          <p:cNvSpPr txBox="1"/>
-          <p:nvPr/>
-        </p:nvSpPr>
-        <p:spPr>
-          <a:xfrm>
-            <a:off x="8183880" y="3310128"/>
+          <p:cNvPr id="22" name="Text 19"/>
+          <p:cNvSpPr txBox="1"/>
+          <p:nvPr/>
+        </p:nvSpPr>
+        <p:spPr>
+          <a:xfrm>
+            <a:off x="8183880" y="3931920"/>
             <a:ext cx="384048" cy="384048"/>
           </a:xfrm>
           <a:prstGeom prst="rect">
@@ -11636,14 +10730,14 @@
       </p:sp>
       <p:sp>
         <p:nvSpPr>
-          <p:cNvPr id="22" name="Text 19"/>
-          <p:cNvSpPr txBox="1"/>
-          <p:nvPr/>
-        </p:nvSpPr>
-        <p:spPr>
-          <a:xfrm>
-            <a:off x="3520440" y="3163824"/>
-            <a:ext cx="4572000" cy="676656"/>
+          <p:cNvPr id="23" name="Text 20"/>
+          <p:cNvSpPr txBox="1"/>
+          <p:nvPr/>
+        </p:nvSpPr>
+        <p:spPr>
+          <a:xfrm>
+            <a:off x="3520440" y="3712464"/>
+            <a:ext cx="4572000" cy="822960"/>
           </a:xfrm>
           <a:prstGeom prst="rect">
             <a:avLst/>
@@ -11659,27 +10753,27 @@
               <a:buNone/>
             </a:pPr>
             <a:r>
-              <a:rPr lang="ar-LB" altLang="en-US" sz="1600" dirty="0">
+              <a:rPr lang="ar-LB" altLang="en-US" sz="1900" dirty="0">
                 <a:solidFill>
                   <a:srgbClr val="1B262C"/>
                 </a:solidFill>
               </a:rPr>
-              <a:t>بالخيوط: (2 أُس 2) الكلّ أُس 2. اكتب الناتج كقوّة واحسبه.</a:t>
-            </a:r>
-            <a:endParaRPr lang="ar-LB" sz="1600" dirty="0"/>
-          </a:p>
-        </p:txBody>
-      </p:sp>
-      <p:sp>
-        <p:nvSpPr>
-          <p:cNvPr id="23" name="Text 20"/>
-          <p:cNvSpPr txBox="1"/>
-          <p:nvPr/>
-        </p:nvSpPr>
-        <p:spPr>
-          <a:xfrm>
-            <a:off x="594360" y="3163824"/>
-            <a:ext cx="2834640" cy="676656"/>
+              <a:t>احسب: 2 × 3 و 2 أُس 3</a:t>
+            </a:r>
+            <a:endParaRPr lang="ar-LB" sz="1900" dirty="0"/>
+          </a:p>
+        </p:txBody>
+      </p:sp>
+      <p:sp>
+        <p:nvSpPr>
+          <p:cNvPr id="24" name="Text 21"/>
+          <p:cNvSpPr txBox="1"/>
+          <p:nvPr/>
+        </p:nvSpPr>
+        <p:spPr>
+          <a:xfrm>
+            <a:off x="594360" y="3712464"/>
+            <a:ext cx="2834640" cy="822960"/>
           </a:xfrm>
           <a:prstGeom prst="rect">
             <a:avLst/>
@@ -11695,7 +10789,7 @@
               <a:buNone/>
             </a:pPr>
             <a:r>
-              <a:rPr lang="en-US" sz="1800" b="1" dirty="0">
+              <a:rPr lang="en-US" sz="2100" b="1" dirty="0">
                 <a:solidFill>
                   <a:srgbClr val="1F7A45"/>
                 </a:solidFill>
@@ -11703,10 +10797,10 @@
                 <a:ea typeface="Arial" pitchFamily="34" charset="-122"/>
                 <a:cs typeface="Arial" pitchFamily="34" charset="-120"/>
               </a:rPr>
-              <a:t>(2</a:t>
-            </a:r>
-            <a:r>
-              <a:rPr lang="en-US" sz="1800" b="1" baseline="30000" dirty="0">
+              <a:t>2 × 3     2</a:t>
+            </a:r>
+            <a:r>
+              <a:rPr lang="en-US" sz="2100" b="1" baseline="30000" dirty="0">
                 <a:solidFill>
                   <a:srgbClr val="1F7A45"/>
                 </a:solidFill>
@@ -11714,196 +10808,9 @@
                 <a:ea typeface="Arial" pitchFamily="34" charset="-122"/>
                 <a:cs typeface="Arial" pitchFamily="34" charset="-120"/>
               </a:rPr>
-              <a:t>2</a:t>
-            </a:r>
-            <a:r>
-              <a:rPr lang="en-US" sz="1800" b="1" dirty="0">
-                <a:solidFill>
-                  <a:srgbClr val="1F7A45"/>
-                </a:solidFill>
-                <a:latin typeface="Arial" pitchFamily="34" charset="0"/>
-                <a:ea typeface="Arial" pitchFamily="34" charset="-122"/>
-                <a:cs typeface="Arial" pitchFamily="34" charset="-120"/>
-              </a:rPr>
-              <a:t>)</a:t>
-            </a:r>
-            <a:r>
-              <a:rPr lang="en-US" sz="1800" b="1" baseline="30000" dirty="0">
-                <a:solidFill>
-                  <a:srgbClr val="1F7A45"/>
-                </a:solidFill>
-                <a:latin typeface="Arial" pitchFamily="34" charset="0"/>
-                <a:ea typeface="Arial" pitchFamily="34" charset="-122"/>
-                <a:cs typeface="Arial" pitchFamily="34" charset="-120"/>
-              </a:rPr>
-              <a:t>2</a:t>
-            </a:r>
-            <a:endParaRPr lang="en-US" sz="1800" dirty="0"/>
-          </a:p>
-        </p:txBody>
-      </p:sp>
-      <p:sp>
-        <p:nvSpPr>
-          <p:cNvPr id="24" name="Shape 21"/>
-          <p:cNvSpPr/>
-          <p:nvPr/>
-        </p:nvSpPr>
-        <p:spPr>
-          <a:xfrm>
-            <a:off x="457200" y="3913632"/>
-            <a:ext cx="8229600" cy="676656"/>
-          </a:xfrm>
-          <a:prstGeom prst="roundRect">
-            <a:avLst>
-              <a:gd name="adj" fmla="val 13514"/>
-            </a:avLst>
-          </a:prstGeom>
-          <a:solidFill>
-            <a:srgbClr val="1F7A45">
-              <a:alpha val="8000"/>
-            </a:srgbClr>
-          </a:solidFill>
-          <a:ln w="19050">
-            <a:solidFill>
-              <a:srgbClr val="1F7A45"/>
-            </a:solidFill>
-            <a:prstDash val="solid"/>
-          </a:ln>
-        </p:spPr>
-      </p:sp>
-      <p:sp>
-        <p:nvSpPr>
-          <p:cNvPr id="25" name="Shape 22"/>
-          <p:cNvSpPr/>
-          <p:nvPr/>
-        </p:nvSpPr>
-        <p:spPr>
-          <a:xfrm>
-            <a:off x="8183880" y="4059936"/>
-            <a:ext cx="384048" cy="384048"/>
-          </a:xfrm>
-          <a:prstGeom prst="ellipse">
-            <a:avLst/>
-          </a:prstGeom>
-          <a:solidFill>
-            <a:srgbClr val="1F7A45"/>
-          </a:solidFill>
-          <a:ln w="12700">
-            <a:solidFill>
-              <a:srgbClr val="1F7A45"/>
-            </a:solidFill>
-            <a:prstDash val="solid"/>
-          </a:ln>
-        </p:spPr>
-      </p:sp>
-      <p:sp>
-        <p:nvSpPr>
-          <p:cNvPr id="26" name="Text 23"/>
-          <p:cNvSpPr txBox="1"/>
-          <p:nvPr/>
-        </p:nvSpPr>
-        <p:spPr>
-          <a:xfrm>
-            <a:off x="8183880" y="4059936"/>
-            <a:ext cx="384048" cy="384048"/>
-          </a:xfrm>
-          <a:prstGeom prst="rect">
-            <a:avLst/>
-          </a:prstGeom>
-          <a:noFill/>
-          <a:ln/>
-        </p:spPr>
-        <p:txBody>
-          <a:bodyPr wrap="square" lIns="0" tIns="0" rIns="0" bIns="0" rtlCol="0" anchor="ctr"/>
-          <a:lstStyle/>
-          <a:p>
-            <a:pPr rtl="1" algn="ctr" indent="0" marL="0">
-              <a:buNone/>
-            </a:pPr>
-            <a:r>
-              <a:rPr lang="ar-LB" altLang="en-US" sz="1600" b="1" dirty="0">
-                <a:solidFill>
-                  <a:srgbClr val="FFFFFF"/>
-                </a:solidFill>
-              </a:rPr>
-              <a:t>5</a:t>
-            </a:r>
-            <a:endParaRPr lang="ar-LB" sz="1600" dirty="0"/>
-          </a:p>
-        </p:txBody>
-      </p:sp>
-      <p:sp>
-        <p:nvSpPr>
-          <p:cNvPr id="27" name="Text 24"/>
-          <p:cNvSpPr txBox="1"/>
-          <p:nvPr/>
-        </p:nvSpPr>
-        <p:spPr>
-          <a:xfrm>
-            <a:off x="3520440" y="3913632"/>
-            <a:ext cx="4572000" cy="676656"/>
-          </a:xfrm>
-          <a:prstGeom prst="rect">
-            <a:avLst/>
-          </a:prstGeom>
-          <a:noFill/>
-          <a:ln/>
-        </p:spPr>
-        <p:txBody>
-          <a:bodyPr wrap="square" lIns="0" tIns="0" rIns="0" bIns="0" rtlCol="0" anchor="ctr"/>
-          <a:lstStyle/>
-          <a:p>
-            <a:pPr rtl="1" algn="r" indent="0" marL="0">
-              <a:buNone/>
-            </a:pPr>
-            <a:r>
-              <a:rPr lang="ar-LB" altLang="en-US" sz="1600" dirty="0">
-                <a:solidFill>
-                  <a:srgbClr val="1B262C"/>
-                </a:solidFill>
-              </a:rPr>
-              <a:t>ابنِ مربّعًا طول ضلعه 2 أُس 2 = 4 مكعّبات. كم مكعّبًا؟</a:t>
-            </a:r>
-            <a:endParaRPr lang="ar-LB" sz="1600" dirty="0"/>
-          </a:p>
-        </p:txBody>
-      </p:sp>
-      <p:sp>
-        <p:nvSpPr>
-          <p:cNvPr id="28" name="Text 25"/>
-          <p:cNvSpPr txBox="1"/>
-          <p:nvPr/>
-        </p:nvSpPr>
-        <p:spPr>
-          <a:xfrm>
-            <a:off x="594360" y="3913632"/>
-            <a:ext cx="2834640" cy="676656"/>
-          </a:xfrm>
-          <a:prstGeom prst="rect">
-            <a:avLst/>
-          </a:prstGeom>
-          <a:noFill/>
-          <a:ln/>
-        </p:spPr>
-        <p:txBody>
-          <a:bodyPr wrap="square" lIns="0" tIns="0" rIns="0" bIns="0" rtlCol="0" anchor="ctr"/>
-          <a:lstStyle/>
-          <a:p>
-            <a:pPr rtl="0" algn="ctr" indent="0" marL="0">
-              <a:buNone/>
-            </a:pPr>
-            <a:r>
-              <a:rPr lang="en-US" sz="1800" b="1" dirty="0">
-                <a:solidFill>
-                  <a:srgbClr val="1F7A45"/>
-                </a:solidFill>
-                <a:latin typeface="Arial" pitchFamily="34" charset="0"/>
-                <a:ea typeface="Arial" pitchFamily="34" charset="-122"/>
-                <a:cs typeface="Arial" pitchFamily="34" charset="-120"/>
-              </a:rPr>
-              <a:t>4 × 4 = ?</a:t>
-            </a:r>
-            <a:endParaRPr lang="en-US" sz="1800" dirty="0"/>
+              <a:t>3</a:t>
+            </a:r>
+            <a:endParaRPr lang="en-US" sz="2100" dirty="0"/>
           </a:p>
         </p:txBody>
       </p:sp>
@@ -12073,11 +10980,11 @@
         <p:spPr>
           <a:xfrm>
             <a:off x="457200" y="914400"/>
-            <a:ext cx="8229600" cy="676656"/>
+            <a:ext cx="8229600" cy="822960"/>
           </a:xfrm>
           <a:prstGeom prst="roundRect">
             <a:avLst>
-              <a:gd name="adj" fmla="val 13514"/>
+              <a:gd name="adj" fmla="val 11111"/>
             </a:avLst>
           </a:prstGeom>
           <a:solidFill>
@@ -12101,7 +11008,7 @@
         </p:nvSpPr>
         <p:spPr>
           <a:xfrm>
-            <a:off x="8183880" y="1060704"/>
+            <a:off x="8183880" y="1133856"/>
             <a:ext cx="384048" cy="384048"/>
           </a:xfrm>
           <a:prstGeom prst="ellipse">
@@ -12126,7 +11033,7 @@
         </p:nvSpPr>
         <p:spPr>
           <a:xfrm>
-            <a:off x="8183880" y="1060704"/>
+            <a:off x="8183880" y="1133856"/>
             <a:ext cx="384048" cy="384048"/>
           </a:xfrm>
           <a:prstGeom prst="rect">
@@ -12163,7 +11070,7 @@
         <p:spPr>
           <a:xfrm>
             <a:off x="3520440" y="914400"/>
-            <a:ext cx="4572000" cy="676656"/>
+            <a:ext cx="4572000" cy="822960"/>
           </a:xfrm>
           <a:prstGeom prst="rect">
             <a:avLst/>
@@ -12179,14 +11086,14 @@
               <a:buNone/>
             </a:pPr>
             <a:r>
-              <a:rPr lang="ar-LB" altLang="en-US" sz="1600" dirty="0">
+              <a:rPr lang="ar-LB" altLang="en-US" sz="1900" dirty="0">
                 <a:solidFill>
                   <a:srgbClr val="1B262C"/>
                 </a:solidFill>
               </a:rPr>
-              <a:t>اكتب على شكل قوّة واحدة ثم احسب: (2 أُس 4) الكلّ أُس 2.</a:t>
-            </a:r>
-            <a:endParaRPr lang="ar-LB" sz="1600" dirty="0"/>
+              <a:t>اكتب على شكل قوّة: 5 × 5 × 5</a:t>
+            </a:r>
+            <a:endParaRPr lang="ar-LB" sz="1900" dirty="0"/>
           </a:p>
         </p:txBody>
       </p:sp>
@@ -12199,7 +11106,7 @@
         <p:spPr>
           <a:xfrm>
             <a:off x="594360" y="914400"/>
-            <a:ext cx="2834640" cy="676656"/>
+            <a:ext cx="2834640" cy="822960"/>
           </a:xfrm>
           <a:prstGeom prst="rect">
             <a:avLst/>
@@ -12215,7 +11122,7 @@
               <a:buNone/>
             </a:pPr>
             <a:r>
-              <a:rPr lang="en-US" sz="1800" b="1" dirty="0">
+              <a:rPr lang="en-US" sz="2100" b="1" dirty="0">
                 <a:solidFill>
                   <a:srgbClr val="1F5C99"/>
                 </a:solidFill>
@@ -12223,42 +11130,9 @@
                 <a:ea typeface="Arial" pitchFamily="34" charset="-122"/>
                 <a:cs typeface="Arial" pitchFamily="34" charset="-120"/>
               </a:rPr>
-              <a:t>(2</a:t>
-            </a:r>
-            <a:r>
-              <a:rPr lang="en-US" sz="1800" b="1" baseline="30000" dirty="0">
-                <a:solidFill>
-                  <a:srgbClr val="1F5C99"/>
-                </a:solidFill>
-                <a:latin typeface="Arial" pitchFamily="34" charset="0"/>
-                <a:ea typeface="Arial" pitchFamily="34" charset="-122"/>
-                <a:cs typeface="Arial" pitchFamily="34" charset="-120"/>
-              </a:rPr>
-              <a:t>4</a:t>
-            </a:r>
-            <a:r>
-              <a:rPr lang="en-US" sz="1800" b="1" dirty="0">
-                <a:solidFill>
-                  <a:srgbClr val="1F5C99"/>
-                </a:solidFill>
-                <a:latin typeface="Arial" pitchFamily="34" charset="0"/>
-                <a:ea typeface="Arial" pitchFamily="34" charset="-122"/>
-                <a:cs typeface="Arial" pitchFamily="34" charset="-120"/>
-              </a:rPr>
-              <a:t>)</a:t>
-            </a:r>
-            <a:r>
-              <a:rPr lang="en-US" sz="1800" b="1" baseline="30000" dirty="0">
-                <a:solidFill>
-                  <a:srgbClr val="1F5C99"/>
-                </a:solidFill>
-                <a:latin typeface="Arial" pitchFamily="34" charset="0"/>
-                <a:ea typeface="Arial" pitchFamily="34" charset="-122"/>
-                <a:cs typeface="Arial" pitchFamily="34" charset="-120"/>
-              </a:rPr>
-              <a:t>2</a:t>
-            </a:r>
-            <a:endParaRPr lang="en-US" sz="1800" dirty="0"/>
+              <a:t>5 × 5 × 5</a:t>
+            </a:r>
+            <a:endParaRPr lang="en-US" sz="2100" dirty="0"/>
           </a:p>
         </p:txBody>
       </p:sp>
@@ -12270,12 +11144,12 @@
         </p:nvSpPr>
         <p:spPr>
           <a:xfrm>
-            <a:off x="457200" y="1664208"/>
-            <a:ext cx="8229600" cy="676656"/>
+            <a:off x="457200" y="1847088"/>
+            <a:ext cx="8229600" cy="822960"/>
           </a:xfrm>
           <a:prstGeom prst="roundRect">
             <a:avLst>
-              <a:gd name="adj" fmla="val 13514"/>
+              <a:gd name="adj" fmla="val 11111"/>
             </a:avLst>
           </a:prstGeom>
           <a:solidFill>
@@ -12299,7 +11173,7 @@
         </p:nvSpPr>
         <p:spPr>
           <a:xfrm>
-            <a:off x="8183880" y="1810512"/>
+            <a:off x="8183880" y="2066544"/>
             <a:ext cx="384048" cy="384048"/>
           </a:xfrm>
           <a:prstGeom prst="ellipse">
@@ -12324,7 +11198,7 @@
         </p:nvSpPr>
         <p:spPr>
           <a:xfrm>
-            <a:off x="8183880" y="1810512"/>
+            <a:off x="8183880" y="2066544"/>
             <a:ext cx="384048" cy="384048"/>
           </a:xfrm>
           <a:prstGeom prst="rect">
@@ -12360,8 +11234,8 @@
         </p:nvSpPr>
         <p:spPr>
           <a:xfrm>
-            <a:off x="3520440" y="1664208"/>
-            <a:ext cx="4572000" cy="676656"/>
+            <a:off x="3520440" y="1847088"/>
+            <a:ext cx="4572000" cy="822960"/>
           </a:xfrm>
           <a:prstGeom prst="rect">
             <a:avLst/>
@@ -12377,14 +11251,14 @@
               <a:buNone/>
             </a:pPr>
             <a:r>
-              <a:rPr lang="ar-LB" altLang="en-US" sz="1600" dirty="0">
+              <a:rPr lang="ar-LB" altLang="en-US" sz="1900" dirty="0">
                 <a:solidFill>
                   <a:srgbClr val="1B262C"/>
                 </a:solidFill>
               </a:rPr>
-              <a:t>اكتب على شكل قوّة واحدة ثم احسب: (3 أُس 3) الكلّ أُس 2.</a:t>
-            </a:r>
-            <a:endParaRPr lang="ar-LB" sz="1600" dirty="0"/>
+              <a:t>احسب: 3 أُس 2</a:t>
+            </a:r>
+            <a:endParaRPr lang="ar-LB" sz="1900" dirty="0"/>
           </a:p>
         </p:txBody>
       </p:sp>
@@ -12396,8 +11270,8 @@
         </p:nvSpPr>
         <p:spPr>
           <a:xfrm>
-            <a:off x="594360" y="1664208"/>
-            <a:ext cx="2834640" cy="676656"/>
+            <a:off x="594360" y="1847088"/>
+            <a:ext cx="2834640" cy="822960"/>
           </a:xfrm>
           <a:prstGeom prst="rect">
             <a:avLst/>
@@ -12413,7 +11287,7 @@
               <a:buNone/>
             </a:pPr>
             <a:r>
-              <a:rPr lang="en-US" sz="1800" b="1" dirty="0">
+              <a:rPr lang="en-US" sz="2100" b="1" dirty="0">
                 <a:solidFill>
                   <a:srgbClr val="1F5C99"/>
                 </a:solidFill>
@@ -12421,10 +11295,10 @@
                 <a:ea typeface="Arial" pitchFamily="34" charset="-122"/>
                 <a:cs typeface="Arial" pitchFamily="34" charset="-120"/>
               </a:rPr>
-              <a:t>(3</a:t>
-            </a:r>
-            <a:r>
-              <a:rPr lang="en-US" sz="1800" b="1" baseline="30000" dirty="0">
+              <a:t>3</a:t>
+            </a:r>
+            <a:r>
+              <a:rPr lang="en-US" sz="2100" b="1" baseline="30000" dirty="0">
                 <a:solidFill>
                   <a:srgbClr val="1F5C99"/>
                 </a:solidFill>
@@ -12432,10 +11306,10 @@
                 <a:ea typeface="Arial" pitchFamily="34" charset="-122"/>
                 <a:cs typeface="Arial" pitchFamily="34" charset="-120"/>
               </a:rPr>
-              <a:t>3</a:t>
-            </a:r>
-            <a:r>
-              <a:rPr lang="en-US" sz="1800" b="1" dirty="0">
+              <a:t>2</a:t>
+            </a:r>
+            <a:r>
+              <a:rPr lang="en-US" sz="2100" b="1" dirty="0">
                 <a:solidFill>
                   <a:srgbClr val="1F5C99"/>
                 </a:solidFill>
@@ -12443,20 +11317,9 @@
                 <a:ea typeface="Arial" pitchFamily="34" charset="-122"/>
                 <a:cs typeface="Arial" pitchFamily="34" charset="-120"/>
               </a:rPr>
-              <a:t>)</a:t>
-            </a:r>
-            <a:r>
-              <a:rPr lang="en-US" sz="1800" b="1" baseline="30000" dirty="0">
-                <a:solidFill>
-                  <a:srgbClr val="1F5C99"/>
-                </a:solidFill>
-                <a:latin typeface="Arial" pitchFamily="34" charset="0"/>
-                <a:ea typeface="Arial" pitchFamily="34" charset="-122"/>
-                <a:cs typeface="Arial" pitchFamily="34" charset="-120"/>
-              </a:rPr>
-              <a:t>2</a:t>
-            </a:r>
-            <a:endParaRPr lang="en-US" sz="1800" dirty="0"/>
+              <a:t> = ?</a:t>
+            </a:r>
+            <a:endParaRPr lang="en-US" sz="2100" dirty="0"/>
           </a:p>
         </p:txBody>
       </p:sp>
@@ -12468,12 +11331,12 @@
         </p:nvSpPr>
         <p:spPr>
           <a:xfrm>
-            <a:off x="457200" y="2414016"/>
-            <a:ext cx="8229600" cy="676656"/>
+            <a:off x="457200" y="2779776"/>
+            <a:ext cx="8229600" cy="822960"/>
           </a:xfrm>
           <a:prstGeom prst="roundRect">
             <a:avLst>
-              <a:gd name="adj" fmla="val 13514"/>
+              <a:gd name="adj" fmla="val 11111"/>
             </a:avLst>
           </a:prstGeom>
           <a:solidFill>
@@ -12497,7 +11360,7 @@
         </p:nvSpPr>
         <p:spPr>
           <a:xfrm>
-            <a:off x="8183880" y="2560320"/>
+            <a:off x="8183880" y="2999232"/>
             <a:ext cx="384048" cy="384048"/>
           </a:xfrm>
           <a:prstGeom prst="ellipse">
@@ -12522,7 +11385,7 @@
         </p:nvSpPr>
         <p:spPr>
           <a:xfrm>
-            <a:off x="8183880" y="2560320"/>
+            <a:off x="8183880" y="2999232"/>
             <a:ext cx="384048" cy="384048"/>
           </a:xfrm>
           <a:prstGeom prst="rect">
@@ -12558,8 +11421,8 @@
         </p:nvSpPr>
         <p:spPr>
           <a:xfrm>
-            <a:off x="3520440" y="2414016"/>
-            <a:ext cx="4572000" cy="676656"/>
+            <a:off x="3520440" y="2779776"/>
+            <a:ext cx="4572000" cy="822960"/>
           </a:xfrm>
           <a:prstGeom prst="rect">
             <a:avLst/>
@@ -12575,14 +11438,14 @@
               <a:buNone/>
             </a:pPr>
             <a:r>
-              <a:rPr lang="ar-LB" altLang="en-US" sz="1600" dirty="0">
+              <a:rPr lang="ar-LB" altLang="en-US" sz="1900" dirty="0">
                 <a:solidFill>
                   <a:srgbClr val="1B262C"/>
                 </a:solidFill>
               </a:rPr>
-              <a:t>صح أم خطأ؟ صحّح: (4 أُس 2) الكلّ أُس 3 = 4 أُس 5.</a:t>
-            </a:r>
-            <a:endParaRPr lang="ar-LB" sz="1600" dirty="0"/>
+              <a:t>أكمل: (2 أُس 2) الكلّ أُس 2 = 2 أُس ؟</a:t>
+            </a:r>
+            <a:endParaRPr lang="ar-LB" sz="1900" dirty="0"/>
           </a:p>
         </p:txBody>
       </p:sp>
@@ -12594,8 +11457,8 @@
         </p:nvSpPr>
         <p:spPr>
           <a:xfrm>
-            <a:off x="594360" y="2414016"/>
-            <a:ext cx="2834640" cy="676656"/>
+            <a:off x="594360" y="2779776"/>
+            <a:ext cx="2834640" cy="822960"/>
           </a:xfrm>
           <a:prstGeom prst="rect">
             <a:avLst/>
@@ -12611,7 +11474,7 @@
               <a:buNone/>
             </a:pPr>
             <a:r>
-              <a:rPr lang="en-US" sz="1800" b="1" dirty="0">
+              <a:rPr lang="en-US" sz="2100" b="1" dirty="0">
                 <a:solidFill>
                   <a:srgbClr val="1F5C99"/>
                 </a:solidFill>
@@ -12619,10 +11482,10 @@
                 <a:ea typeface="Arial" pitchFamily="34" charset="-122"/>
                 <a:cs typeface="Arial" pitchFamily="34" charset="-120"/>
               </a:rPr>
-              <a:t>(4</a:t>
-            </a:r>
-            <a:r>
-              <a:rPr lang="en-US" sz="1800" b="1" baseline="30000" dirty="0">
+              <a:t>(2</a:t>
+            </a:r>
+            <a:r>
+              <a:rPr lang="en-US" sz="2100" b="1" baseline="30000" dirty="0">
                 <a:solidFill>
                   <a:srgbClr val="1F5C99"/>
                 </a:solidFill>
@@ -12633,7 +11496,7 @@
               <a:t>2</a:t>
             </a:r>
             <a:r>
-              <a:rPr lang="en-US" sz="1800" b="1" dirty="0">
+              <a:rPr lang="en-US" sz="2100" b="1" dirty="0">
                 <a:solidFill>
                   <a:srgbClr val="1F5C99"/>
                 </a:solidFill>
@@ -12644,7 +11507,7 @@
               <a:t>)</a:t>
             </a:r>
             <a:r>
-              <a:rPr lang="en-US" sz="1800" b="1" baseline="30000" dirty="0">
+              <a:rPr lang="en-US" sz="2100" b="1" baseline="30000" dirty="0">
                 <a:solidFill>
                   <a:srgbClr val="1F5C99"/>
                 </a:solidFill>
@@ -12652,10 +11515,10 @@
                 <a:ea typeface="Arial" pitchFamily="34" charset="-122"/>
                 <a:cs typeface="Arial" pitchFamily="34" charset="-120"/>
               </a:rPr>
-              <a:t>3</a:t>
-            </a:r>
-            <a:r>
-              <a:rPr lang="en-US" sz="1800" b="1" dirty="0">
+              <a:t>2</a:t>
+            </a:r>
+            <a:r>
+              <a:rPr lang="en-US" sz="2100" b="1" dirty="0">
                 <a:solidFill>
                   <a:srgbClr val="1F5C99"/>
                 </a:solidFill>
@@ -12663,10 +11526,10 @@
                 <a:ea typeface="Arial" pitchFamily="34" charset="-122"/>
                 <a:cs typeface="Arial" pitchFamily="34" charset="-120"/>
               </a:rPr>
-              <a:t> = 4</a:t>
-            </a:r>
-            <a:r>
-              <a:rPr lang="en-US" sz="1800" b="1" baseline="30000" dirty="0">
+              <a:t> = 2</a:t>
+            </a:r>
+            <a:r>
+              <a:rPr lang="en-US" sz="2100" b="1" baseline="30000" dirty="0">
                 <a:solidFill>
                   <a:srgbClr val="1F5C99"/>
                 </a:solidFill>
@@ -12674,9 +11537,9 @@
                 <a:ea typeface="Arial" pitchFamily="34" charset="-122"/>
                 <a:cs typeface="Arial" pitchFamily="34" charset="-120"/>
               </a:rPr>
-              <a:t>5</a:t>
-            </a:r>
-            <a:endParaRPr lang="en-US" sz="1800" dirty="0"/>
+              <a:t>?</a:t>
+            </a:r>
+            <a:endParaRPr lang="en-US" sz="2100" dirty="0"/>
           </a:p>
         </p:txBody>
       </p:sp>
@@ -12688,12 +11551,12 @@
         </p:nvSpPr>
         <p:spPr>
           <a:xfrm>
-            <a:off x="457200" y="3163824"/>
-            <a:ext cx="8229600" cy="676656"/>
+            <a:off x="457200" y="3712464"/>
+            <a:ext cx="8229600" cy="822960"/>
           </a:xfrm>
           <a:prstGeom prst="roundRect">
             <a:avLst>
-              <a:gd name="adj" fmla="val 13514"/>
+              <a:gd name="adj" fmla="val 11111"/>
             </a:avLst>
           </a:prstGeom>
           <a:solidFill>
@@ -12717,7 +11580,7 @@
         </p:nvSpPr>
         <p:spPr>
           <a:xfrm>
-            <a:off x="8183880" y="3310128"/>
+            <a:off x="8183880" y="3931920"/>
             <a:ext cx="384048" cy="384048"/>
           </a:xfrm>
           <a:prstGeom prst="ellipse">
@@ -12742,7 +11605,7 @@
         </p:nvSpPr>
         <p:spPr>
           <a:xfrm>
-            <a:off x="8183880" y="3310128"/>
+            <a:off x="8183880" y="3931920"/>
             <a:ext cx="384048" cy="384048"/>
           </a:xfrm>
           <a:prstGeom prst="rect">
@@ -12778,8 +11641,8 @@
         </p:nvSpPr>
         <p:spPr>
           <a:xfrm>
-            <a:off x="3520440" y="3163824"/>
-            <a:ext cx="4572000" cy="676656"/>
+            <a:off x="3520440" y="3712464"/>
+            <a:ext cx="4572000" cy="822960"/>
           </a:xfrm>
           <a:prstGeom prst="rect">
             <a:avLst/>
@@ -12795,14 +11658,14 @@
               <a:buNone/>
             </a:pPr>
             <a:r>
-              <a:rPr lang="ar-LB" altLang="en-US" sz="1600" dirty="0">
+              <a:rPr lang="ar-LB" altLang="en-US" sz="1900" dirty="0">
                 <a:solidFill>
                   <a:srgbClr val="1B262C"/>
                 </a:solidFill>
               </a:rPr>
-              <a:t>صح أم خطأ؟ صحّح: 5 أُس 2 = 10.</a:t>
-            </a:r>
-            <a:endParaRPr lang="ar-LB" sz="1600" dirty="0"/>
+              <a:t>صح أم خطأ: 3 أُس 2 = 6</a:t>
+            </a:r>
+            <a:endParaRPr lang="ar-LB" sz="1900" dirty="0"/>
           </a:p>
         </p:txBody>
       </p:sp>
@@ -12814,8 +11677,8 @@
         </p:nvSpPr>
         <p:spPr>
           <a:xfrm>
-            <a:off x="594360" y="3163824"/>
-            <a:ext cx="2834640" cy="676656"/>
+            <a:off x="594360" y="3712464"/>
+            <a:ext cx="2834640" cy="822960"/>
           </a:xfrm>
           <a:prstGeom prst="rect">
             <a:avLst/>
@@ -12831,7 +11694,7 @@
               <a:buNone/>
             </a:pPr>
             <a:r>
-              <a:rPr lang="en-US" sz="1800" b="1" dirty="0">
+              <a:rPr lang="en-US" sz="2100" b="1" dirty="0">
                 <a:solidFill>
                   <a:srgbClr val="1F5C99"/>
                 </a:solidFill>
@@ -12839,10 +11702,10 @@
                 <a:ea typeface="Arial" pitchFamily="34" charset="-122"/>
                 <a:cs typeface="Arial" pitchFamily="34" charset="-120"/>
               </a:rPr>
-              <a:t>5</a:t>
-            </a:r>
-            <a:r>
-              <a:rPr lang="en-US" sz="1800" b="1" baseline="30000" dirty="0">
+              <a:t>3</a:t>
+            </a:r>
+            <a:r>
+              <a:rPr lang="en-US" sz="2100" b="1" baseline="30000" dirty="0">
                 <a:solidFill>
                   <a:srgbClr val="1F5C99"/>
                 </a:solidFill>
@@ -12853,7 +11716,7 @@
               <a:t>2</a:t>
             </a:r>
             <a:r>
-              <a:rPr lang="en-US" sz="1800" b="1" dirty="0">
+              <a:rPr lang="en-US" sz="2100" b="1" dirty="0">
                 <a:solidFill>
                   <a:srgbClr val="1F5C99"/>
                 </a:solidFill>
@@ -12861,207 +11724,9 @@
                 <a:ea typeface="Arial" pitchFamily="34" charset="-122"/>
                 <a:cs typeface="Arial" pitchFamily="34" charset="-120"/>
               </a:rPr>
-              <a:t> = 10</a:t>
-            </a:r>
-            <a:endParaRPr lang="en-US" sz="1800" dirty="0"/>
-          </a:p>
-        </p:txBody>
-      </p:sp>
-      <p:sp>
-        <p:nvSpPr>
-          <p:cNvPr id="25" name="Shape 22"/>
-          <p:cNvSpPr/>
-          <p:nvPr/>
-        </p:nvSpPr>
-        <p:spPr>
-          <a:xfrm>
-            <a:off x="457200" y="3913632"/>
-            <a:ext cx="8229600" cy="676656"/>
-          </a:xfrm>
-          <a:prstGeom prst="roundRect">
-            <a:avLst>
-              <a:gd name="adj" fmla="val 13514"/>
-            </a:avLst>
-          </a:prstGeom>
-          <a:solidFill>
-            <a:srgbClr val="1F5C99">
-              <a:alpha val="8000"/>
-            </a:srgbClr>
-          </a:solidFill>
-          <a:ln w="19050">
-            <a:solidFill>
-              <a:srgbClr val="1F5C99"/>
-            </a:solidFill>
-            <a:prstDash val="solid"/>
-          </a:ln>
-        </p:spPr>
-      </p:sp>
-      <p:sp>
-        <p:nvSpPr>
-          <p:cNvPr id="26" name="Shape 23"/>
-          <p:cNvSpPr/>
-          <p:nvPr/>
-        </p:nvSpPr>
-        <p:spPr>
-          <a:xfrm>
-            <a:off x="8183880" y="4059936"/>
-            <a:ext cx="384048" cy="384048"/>
-          </a:xfrm>
-          <a:prstGeom prst="ellipse">
-            <a:avLst/>
-          </a:prstGeom>
-          <a:solidFill>
-            <a:srgbClr val="1F5C99"/>
-          </a:solidFill>
-          <a:ln w="12700">
-            <a:solidFill>
-              <a:srgbClr val="1F5C99"/>
-            </a:solidFill>
-            <a:prstDash val="solid"/>
-          </a:ln>
-        </p:spPr>
-      </p:sp>
-      <p:sp>
-        <p:nvSpPr>
-          <p:cNvPr id="27" name="Text 24"/>
-          <p:cNvSpPr txBox="1"/>
-          <p:nvPr/>
-        </p:nvSpPr>
-        <p:spPr>
-          <a:xfrm>
-            <a:off x="8183880" y="4059936"/>
-            <a:ext cx="384048" cy="384048"/>
-          </a:xfrm>
-          <a:prstGeom prst="rect">
-            <a:avLst/>
-          </a:prstGeom>
-          <a:noFill/>
-          <a:ln/>
-        </p:spPr>
-        <p:txBody>
-          <a:bodyPr wrap="square" lIns="0" tIns="0" rIns="0" bIns="0" rtlCol="0" anchor="ctr"/>
-          <a:lstStyle/>
-          <a:p>
-            <a:pPr rtl="1" algn="ctr" indent="0" marL="0">
-              <a:buNone/>
-            </a:pPr>
-            <a:r>
-              <a:rPr lang="ar-LB" altLang="en-US" sz="1600" b="1" dirty="0">
-                <a:solidFill>
-                  <a:srgbClr val="FFFFFF"/>
-                </a:solidFill>
-              </a:rPr>
-              <a:t>5</a:t>
-            </a:r>
-            <a:endParaRPr lang="ar-LB" sz="1600" dirty="0"/>
-          </a:p>
-        </p:txBody>
-      </p:sp>
-      <p:sp>
-        <p:nvSpPr>
-          <p:cNvPr id="28" name="Text 25"/>
-          <p:cNvSpPr txBox="1"/>
-          <p:nvPr/>
-        </p:nvSpPr>
-        <p:spPr>
-          <a:xfrm>
-            <a:off x="3520440" y="3913632"/>
-            <a:ext cx="4572000" cy="676656"/>
-          </a:xfrm>
-          <a:prstGeom prst="rect">
-            <a:avLst/>
-          </a:prstGeom>
-          <a:noFill/>
-          <a:ln/>
-        </p:spPr>
-        <p:txBody>
-          <a:bodyPr wrap="square" lIns="0" tIns="0" rIns="0" bIns="0" rtlCol="0" anchor="ctr"/>
-          <a:lstStyle/>
-          <a:p>
-            <a:pPr rtl="1" algn="r" indent="0" marL="0">
-              <a:buNone/>
-            </a:pPr>
-            <a:r>
-              <a:rPr lang="ar-LB" altLang="en-US" sz="1600" dirty="0">
-                <a:solidFill>
-                  <a:srgbClr val="1B262C"/>
-                </a:solidFill>
-              </a:rPr>
-              <a:t>مزرعة مربّعة طول ضلعها 10 أُس 2 مترًا. ما مساحتها؟</a:t>
-            </a:r>
-            <a:endParaRPr lang="ar-LB" sz="1600" dirty="0"/>
-          </a:p>
-        </p:txBody>
-      </p:sp>
-      <p:sp>
-        <p:nvSpPr>
-          <p:cNvPr id="29" name="Text 26"/>
-          <p:cNvSpPr txBox="1"/>
-          <p:nvPr/>
-        </p:nvSpPr>
-        <p:spPr>
-          <a:xfrm>
-            <a:off x="594360" y="3913632"/>
-            <a:ext cx="2834640" cy="676656"/>
-          </a:xfrm>
-          <a:prstGeom prst="rect">
-            <a:avLst/>
-          </a:prstGeom>
-          <a:noFill/>
-          <a:ln/>
-        </p:spPr>
-        <p:txBody>
-          <a:bodyPr wrap="square" lIns="0" tIns="0" rIns="0" bIns="0" rtlCol="0" anchor="ctr"/>
-          <a:lstStyle/>
-          <a:p>
-            <a:pPr rtl="0" algn="ctr" indent="0" marL="0">
-              <a:buNone/>
-            </a:pPr>
-            <a:r>
-              <a:rPr lang="en-US" sz="1800" b="1" dirty="0">
-                <a:solidFill>
-                  <a:srgbClr val="1F5C99"/>
-                </a:solidFill>
-                <a:latin typeface="Arial" pitchFamily="34" charset="0"/>
-                <a:ea typeface="Arial" pitchFamily="34" charset="-122"/>
-                <a:cs typeface="Arial" pitchFamily="34" charset="-120"/>
-              </a:rPr>
-              <a:t>(10</a:t>
-            </a:r>
-            <a:r>
-              <a:rPr lang="en-US" sz="1800" b="1" baseline="30000" dirty="0">
-                <a:solidFill>
-                  <a:srgbClr val="1F5C99"/>
-                </a:solidFill>
-                <a:latin typeface="Arial" pitchFamily="34" charset="0"/>
-                <a:ea typeface="Arial" pitchFamily="34" charset="-122"/>
-                <a:cs typeface="Arial" pitchFamily="34" charset="-120"/>
-              </a:rPr>
-              <a:t>2</a:t>
-            </a:r>
-            <a:r>
-              <a:rPr lang="en-US" sz="1800" b="1" dirty="0">
-                <a:solidFill>
-                  <a:srgbClr val="1F5C99"/>
-                </a:solidFill>
-                <a:latin typeface="Arial" pitchFamily="34" charset="0"/>
-                <a:ea typeface="Arial" pitchFamily="34" charset="-122"/>
-                <a:cs typeface="Arial" pitchFamily="34" charset="-120"/>
-              </a:rPr>
-              <a:t>)</a:t>
-            </a:r>
-            <a:r>
-              <a:rPr lang="en-US" sz="1800" b="1" baseline="30000" dirty="0">
-                <a:solidFill>
-                  <a:srgbClr val="1F5C99"/>
-                </a:solidFill>
-                <a:latin typeface="Arial" pitchFamily="34" charset="0"/>
-                <a:ea typeface="Arial" pitchFamily="34" charset="-122"/>
-                <a:cs typeface="Arial" pitchFamily="34" charset="-120"/>
-              </a:rPr>
-              <a:t>2</a:t>
-            </a:r>
-            <a:endParaRPr lang="en-US" sz="1800" dirty="0"/>
+              <a:t> = 6</a:t>
+            </a:r>
+            <a:endParaRPr lang="en-US" sz="2100" dirty="0"/>
           </a:p>
         </p:txBody>
       </p:sp>
